--- a/build/reports/informes/Informe_Meta_Ads_Orchid_2026-10-12.pptx
+++ b/build/reports/informes/Informe_Meta_Ads_Orchid_2026-10-12.pptx
@@ -118,37 +118,37 @@
   <p:extLst>
     <p:ext uri="{521415D9-36F7-43E2-AB2F-B90AF26B5E84}">
       <p14:sectionLst xmlns:p14="http://schemas.microsoft.com/office/powerpoint/2010/main">
-        <p14:section name="Resumen" id="{f346f9f7-986e-3c62-bf5b-6d2ea2fec6e3}">
+        <p14:section name="Resumen" id="{6f914353-7174-81ba-764e-f7d819d33f31}">
           <p14:sldIdLst>
             <p14:sldId id="256"/>
             <p14:sldId id="257"/>
           </p14:sldIdLst>
         </p14:section>
-        <p14:section name="Resultados" id="{3d479de7-8898-77c8-64c6-d463d5d6b43c}">
+        <p14:section name="Resultados" id="{6f7e0170-f4ad-aead-fbfb-670bdf5efb98}">
           <p14:sldIdLst>
             <p14:sldId id="258"/>
             <p14:sldId id="259"/>
           </p14:sldIdLst>
         </p14:section>
-        <p14:section name="Qué hicimos" id="{4f9b72b1-7f96-c33c-b135-10fd4ec9f026}">
+        <p14:section name="Qué hicimos" id="{6c6e38f4-c2a2-4fe7-cda8-78467961f165}">
           <p14:sldIdLst>
             <p14:sldId id="260"/>
             <p14:sldId id="261"/>
           </p14:sldIdLst>
         </p14:section>
-        <p14:section name="Aprendizajes" id="{21803d57-8c52-9cbf-c15a-68b3850957e6}">
+        <p14:section name="Aprendizajes" id="{7536cfe1-3e4b-48e4-bdc1-5ac35f2912bd}">
           <p14:sldIdLst>
             <p14:sldId id="262"/>
           </p14:sldIdLst>
         </p14:section>
-        <p14:section name="Anuncios" id="{a7b91a82-eecc-9dba-687c-980c92f98b9a}">
+        <p14:section name="Anuncios" id="{47484183-e717-cd62-f9c1-460b1534cd9f}">
           <p14:sldIdLst>
             <p14:sldId id="263"/>
             <p14:sldId id="264"/>
             <p14:sldId id="265"/>
           </p14:sldIdLst>
         </p14:section>
-        <p14:section name="Próximos pasos" id="{aba67608-c7af-26a7-b45a-1b8975bcbba2}">
+        <p14:section name="Próximos pasos" id="{576c564e-d721-b2ae-26e3-8cb41c738ff5}">
           <p14:sldIdLst>
             <p14:sldId id="266"/>
             <p14:sldId id="267"/>
@@ -184,7 +184,7 @@
               <c:strCache>
                 <c:ptCount val="1"/>
                 <c:pt idx="0">
-                  <c:v>Clics al enlace</c:v>
+                  <c:v>Clics en el enlace</c:v>
                 </c:pt>
               </c:strCache>
             </c:strRef>
@@ -261,7 +261,7 @@
               <c:strCache>
                 <c:ptCount val="1"/>
                 <c:pt idx="0">
-                  <c:v>Visitas a la página</c:v>
+                  <c:v>Landing page views</c:v>
                 </c:pt>
               </c:strCache>
             </c:strRef>
@@ -620,10 +620,10 @@
               <c:strCache>
                 <c:ptCount val="2"/>
                 <c:pt idx="0">
-                  <c:v>Buscan trabajo</c:v>
+                  <c:v>No calificado (busca empleo)</c:v>
                 </c:pt>
                 <c:pt idx="1">
-                  <c:v>Quieren contratar</c:v>
+                  <c:v>Calificado</c:v>
                 </c:pt>
               </c:strCache>
             </c:strRef>
@@ -1085,7 +1085,7 @@
           <a:p>
             <a:r>
               <a:rPr lang="en-US" dirty="0"/>
-              <a:t>Informe de las dos primeras semanas de la campaña de Meta Ads de Orchid, con lo que se hizo, lo que aprendimos y las decisiones que necesitamos.</a:t>
+              <a:t>Desempeño de la campaña Leads – Hire VA, semanas 1 y 2: resultados, calidad de leads, cambios, hallazgos y decisiones pendientes.</a:t>
             </a:r>
             <a:endParaRPr lang="en-US" dirty="0"/>
           </a:p>
@@ -1173,7 +1173,7 @@
           <a:p>
             <a:r>
               <a:rPr lang="en-US" dirty="0"/>
-              <a:t>Ninguno trajo leads. S6 se pausó porque 'What does a Virtual Assistant do?' también le habla a quien busca ese trabajo.</a:t>
+              <a:t>Sin leads. S6 pausado: el hook 'What does a Virtual Assistant do?' también atrae candidatos.</a:t>
             </a:r>
             <a:endParaRPr lang="en-US" dirty="0"/>
           </a:p>
@@ -1261,7 +1261,7 @@
           <a:p>
             <a:r>
               <a:rPr lang="en-US" dirty="0"/>
-              <a:t>El próximo informe sale el lunes 19 de octubre con la semana del 12 al 18.</a:t>
+              <a:t>Próximo reporte: lunes 19 oct (semana 12–18 oct).</a:t>
             </a:r>
             <a:endParaRPr lang="en-US" dirty="0"/>
           </a:p>
@@ -1349,7 +1349,7 @@
           <a:p>
             <a:r>
               <a:rPr lang="en-US" dirty="0"/>
-              <a:t>Con estas tres respuestas podemos fijar metas claras para las próximas semanas.</a:t>
+              <a:t>Insumos necesarios para fijar metas de las próximas semanas.</a:t>
             </a:r>
             <a:endParaRPr lang="en-US" dirty="0"/>
           </a:p>
@@ -1437,7 +1437,7 @@
           <a:p>
             <a:r>
               <a:rPr lang="en-US" dirty="0"/>
-              <a:t>Mensaje principal: en dos semanas, un solo lead real. La causa está identificada y corregida el 12 de octubre.</a:t>
+              <a:t>1 lead calificado en 2 semanas. Causa identificada (reasignación de presupuesto a S3) y corregida el 12 oct.</a:t>
             </a:r>
             <a:endParaRPr lang="en-US" dirty="0"/>
           </a:p>
@@ -1525,7 +1525,7 @@
           <a:p>
             <a:r>
               <a:rPr lang="en-US" dirty="0"/>
-              <a:t>Con un gasto parecido, la semana 2 bajó de 183 a 53 clics y de 145 a 38 visitas a la página, y no trajo ningún lead que quisiera contratar.</a:t>
+              <a:t>Semana 2: CTR 6.46% → 2.21%, CPM $74.49 → $115.40, 0 leads calificados.</a:t>
             </a:r>
             <a:endParaRPr lang="en-US" dirty="0"/>
           </a:p>
@@ -1613,7 +1613,7 @@
           <a:p>
             <a:r>
               <a:rPr lang="en-US" dirty="0"/>
-              <a:t>Quien busca trabajo suele mentir en las demás preguntas del formulario; la única que lo delata es 'Hiring or job seeking'. Meta cuenta a todos como lead, por eso medimos con GHL.</a:t>
+              <a:t>El campo 'Hiring or job seeking' es el único filtro confiable; las demás respuestas de los no calificados son inconsistentes. KPI: lead calificado en GHL.</a:t>
             </a:r>
             <a:endParaRPr lang="en-US" dirty="0"/>
           </a:p>
@@ -1701,7 +1701,7 @@
           <a:p>
             <a:r>
               <a:rPr lang="en-US" dirty="0"/>
-              <a:t>El 11 de octubre se pausó el video V2, el único que trajo un cliente; no quedó registrado el motivo.</a:t>
+              <a:t>11 oct: se pausó V2, único anuncio con lead calificado. Motivo no documentado.</a:t>
             </a:r>
             <a:endParaRPr lang="en-US" dirty="0"/>
           </a:p>
@@ -1789,7 +1789,7 @@
           <a:p>
             <a:r>
               <a:rPr lang="en-US" dirty="0"/>
-              <a:t>Además, el equipo simplificó el formulario de GHL el mismo día.</a:t>
+              <a:t>Formulario de GHL simplificado el mismo día.</a:t>
             </a:r>
             <a:endParaRPr lang="en-US" dirty="0"/>
           </a:p>
@@ -1877,7 +1877,7 @@
           <a:p>
             <a:r>
               <a:rPr lang="en-US" dirty="0"/>
-              <a:t>Advantage+ Audience también gastaba en personas de 18 a 34 años; ya está apagado.</a:t>
+              <a:t>Advantage+ Audience asignaba gasto fuera del rango 30–65; desactivado.</a:t>
             </a:r>
             <a:endParaRPr lang="en-US" dirty="0"/>
           </a:p>
@@ -1965,7 +1965,7 @@
           <a:p>
             <a:r>
               <a:rPr lang="en-US" dirty="0"/>
-              <a:t>Las capturas muestran cómo se ve cada anuncio en el feed del celular desde el 12 de octubre.</a:t>
+              <a:t>Vista previa en feed móvil con el copy vigente desde el 12 oct.</a:t>
             </a:r>
             <a:endParaRPr lang="en-US" dirty="0"/>
           </a:p>
@@ -2053,7 +2053,7 @@
           <a:p>
             <a:r>
               <a:rPr lang="en-US" dirty="0"/>
-              <a:t>Ninguno de los dos trajo a alguien que quisiera contratar.</a:t>
+              <a:t>0 leads calificados entre ambos.</a:t>
             </a:r>
             <a:endParaRPr lang="en-US" dirty="0"/>
           </a:p>
@@ -2915,7 +2915,7 @@
                   <a:schemeClr val="accent1"/>
                 </a:solidFill>
               </a:rPr>
-              <a:t>Del 29 de septiembre al 11 de octubre de 2026</a:t>
+              <a:t>Periodo: 29 sep – 11 oct 2026</a:t>
             </a:r>
             <a:endParaRPr lang="en-US" sz="1800" dirty="0"/>
           </a:p>
@@ -2929,7 +2929,7 @@
                   <a:schemeClr val="bg1"/>
                 </a:solidFill>
               </a:rPr>
-              <a:t>Preparado para la dirección de Orchid · 12 de octubre de 2026</a:t>
+              <a:t>Reporte de desempeño · Dirección de Orchid · 12 oct 2026</a:t>
             </a:r>
             <a:endParaRPr lang="en-US" sz="1800" dirty="0"/>
           </a:p>
@@ -2992,7 +2992,7 @@
                   <a:schemeClr val="tx2"/>
                 </a:solidFill>
               </a:rPr>
-              <a:t>Otros anuncios pausados</a:t>
+              <a:t>Creativos pausados sin conversiones</a:t>
             </a:r>
             <a:endParaRPr lang="en-US" sz="3000" dirty="0"/>
           </a:p>
@@ -3615,7 +3615,7 @@
                   <a:schemeClr val="tx2"/>
                 </a:solidFill>
               </a:rPr>
-              <a:t>Plan para esta semana (12 – 18 oct)</a:t>
+              <a:t>Plan · 12 – 18 oct</a:t>
             </a:r>
             <a:endParaRPr lang="en-US" sz="3000" dirty="0"/>
           </a:p>
@@ -3742,7 +3742,7 @@
                 <a:ea typeface="Cambria" pitchFamily="34" charset="-122"/>
                 <a:cs typeface="Cambria" pitchFamily="34" charset="-120"/>
               </a:rPr>
-              <a:t>Dejar que Meta aprenda</a:t>
+              <a:t>Fase de aprendizaje</a:t>
             </a:r>
             <a:endParaRPr lang="en-US" sz="1700" dirty="0"/>
           </a:p>
@@ -3778,7 +3778,7 @@
                   <a:schemeClr val="tx1"/>
                 </a:solidFill>
               </a:rPr>
-              <a:t>No tocar la campaña durante 5 días. Solo pausar un anuncio si gasta unos $120 sin traer un lead que quiera contratar.</a:t>
+              <a:t>Sin cambios durante 5 días. Criterio de pausa: ~$120 de gasto sin lead calificado.</a:t>
             </a:r>
             <a:endParaRPr lang="en-US" sz="1300" dirty="0"/>
           </a:p>
@@ -3905,7 +3905,7 @@
                 <a:ea typeface="Cambria" pitchFamily="34" charset="-122"/>
                 <a:cs typeface="Cambria" pitchFamily="34" charset="-120"/>
               </a:rPr>
-              <a:t>Medir cada lead en GHL</a:t>
+              <a:t>Medición en GHL</a:t>
             </a:r>
             <a:endParaRPr lang="en-US" sz="1700" dirty="0"/>
           </a:p>
@@ -3941,7 +3941,7 @@
                   <a:schemeClr val="tx1"/>
                 </a:solidFill>
               </a:rPr>
-              <a:t>La alerta diaria (martes a viernes) separa a quien quiere contratar de quien busca trabajo, por anuncio.</a:t>
+              <a:t>Reporte diario de leads calificados vs. no calificados por anuncio.</a:t>
             </a:r>
             <a:endParaRPr lang="en-US" sz="1300" dirty="0"/>
           </a:p>
@@ -4068,7 +4068,7 @@
                 <a:ea typeface="Cambria" pitchFamily="34" charset="-122"/>
                 <a:cs typeface="Cambria" pitchFamily="34" charset="-120"/>
               </a:rPr>
-              <a:t>Subir creativos nuevos</a:t>
+              <a:t>Nuevos creativos</a:t>
             </a:r>
             <a:endParaRPr lang="en-US" sz="1700" dirty="0"/>
           </a:p>
@@ -4104,7 +4104,7 @@
                   <a:schemeClr val="tx1"/>
                 </a:solidFill>
               </a:rPr>
-              <a:t>Con "For Law Firm Owners" o "For Business Owners" sobre la imagen. En el video de V2, cambiar "19 jobs" por "19 roles".</a:t>
+              <a:t>Texto en imagen dirigido al comprador ("For Law Firm Owners"). V2: reemplazar "19 jobs" por "19 roles".</a:t>
             </a:r>
             <a:endParaRPr lang="en-US" sz="1300" dirty="0"/>
           </a:p>
@@ -4212,7 +4212,7 @@
                   <a:schemeClr val="bg1"/>
                 </a:solidFill>
               </a:rPr>
-              <a:t>Decisiones que necesitamos de ustedes</a:t>
+              <a:t>Decisiones requeridas</a:t>
             </a:r>
             <a:endParaRPr lang="en-US" sz="3000" dirty="0"/>
           </a:p>
@@ -4275,7 +4275,7 @@
                   <a:schemeClr val="accent1"/>
                 </a:solidFill>
               </a:rPr>
-              <a:t>Origen de 3 contactos</a:t>
+              <a:t>Atribución de 3 leads del 11 oct</a:t>
             </a:r>
             <a:endParaRPr lang="en-US" sz="1800" dirty="0"/>
           </a:p>
@@ -4311,7 +4311,7 @@
                   <a:schemeClr val="bg1"/>
                 </a:solidFill>
               </a:rPr>
-              <a:t>¿Los 3 contactos que agendaron la noche del 11 de octubre vinieron de otro canal o fueron pruebas del formulario?</a:t>
+              <a:t>Confirmar si provienen de otro canal o de pruebas del formulario.</a:t>
             </a:r>
             <a:endParaRPr lang="en-US" sz="1400" dirty="0"/>
           </a:p>
@@ -4374,7 +4374,7 @@
                   <a:schemeClr val="accent1"/>
                 </a:solidFill>
               </a:rPr>
-              <a:t>Costo máximo por lead calificado</a:t>
+              <a:t>CPL calificado objetivo</a:t>
             </a:r>
             <a:endParaRPr lang="en-US" sz="1800" dirty="0"/>
           </a:p>
@@ -4410,7 +4410,7 @@
                   <a:schemeClr val="bg1"/>
                 </a:solidFill>
               </a:rPr>
-              <a:t>¿Cuánto están dispuestos a pagar por cada lead que quiere contratar? Ese número define cuándo escalar o pausar.</a:t>
+              <a:t>Definir el máximo aceptable. Determina los umbrales de escalado y pausa.</a:t>
             </a:r>
             <a:endParaRPr lang="en-US" sz="1400" dirty="0"/>
           </a:p>
@@ -4473,7 +4473,7 @@
                   <a:schemeClr val="accent1"/>
                 </a:solidFill>
               </a:rPr>
-              <a:t>Evento "Lead" solo para compradores</a:t>
+              <a:t>Optimización por lead calificado</a:t>
             </a:r>
             <a:endParaRPr lang="en-US" sz="1800" dirty="0"/>
           </a:p>
@@ -4509,7 +4509,7 @@
                   <a:schemeClr val="bg1"/>
                 </a:solidFill>
               </a:rPr>
-              <a:t>¿Aprueban que GHL avise a Meta de un lead solo cuando la persona responde "I want to hire."? Así Meta aprende de compradores.</a:t>
+              <a:t>Aprobar el envío del evento Lead vía CAPI solo cuando la respuesta es "I want to hire.".</a:t>
             </a:r>
             <a:endParaRPr lang="en-US" sz="1400" dirty="0"/>
           </a:p>
@@ -4617,7 +4617,7 @@
                   <a:schemeClr val="tx2"/>
                 </a:solidFill>
               </a:rPr>
-              <a:t>Dos semanas en tres números</a:t>
+              <a:t>Resumen ejecutivo</a:t>
             </a:r>
             <a:endParaRPr lang="en-US" sz="3000" dirty="0"/>
           </a:p>
@@ -4719,7 +4719,7 @@
                   <a:schemeClr val="tx1"/>
                 </a:solidFill>
               </a:rPr>
-              <a:t>Inversión total en Meta</a:t>
+              <a:t>Inversión</a:t>
             </a:r>
             <a:endParaRPr lang="en-US" sz="1500" dirty="0"/>
           </a:p>
@@ -4857,7 +4857,7 @@
                   <a:schemeClr val="tx1"/>
                 </a:solidFill>
               </a:rPr>
-              <a:t>Lead que quiere contratar</a:t>
+              <a:t>Lead calificado</a:t>
             </a:r>
             <a:endParaRPr lang="en-US" sz="1500" dirty="0"/>
           </a:p>
@@ -4893,7 +4893,7 @@
                   <a:schemeClr val="accent6"/>
                 </a:solidFill>
               </a:rPr>
-              <a:t>Llegó por el video V2 y agendó llamada</a:t>
+              <a:t>V2 · llamada agendada</a:t>
             </a:r>
             <a:endParaRPr lang="en-US" sz="1100" dirty="0"/>
           </a:p>
@@ -4995,7 +4995,7 @@
                   <a:schemeClr val="tx1"/>
                 </a:solidFill>
               </a:rPr>
-              <a:t>Costo por lead calificado</a:t>
+              <a:t>CPL calificado</a:t>
             </a:r>
             <a:endParaRPr lang="en-US" sz="1500" dirty="0"/>
           </a:p>
@@ -5031,7 +5031,7 @@
                   <a:schemeClr val="accent6"/>
                 </a:solidFill>
               </a:rPr>
-              <a:t>Inversión ÷ leads que quieren contratar</a:t>
+              <a:t>Inversión ÷ leads calificados</a:t>
             </a:r>
             <a:endParaRPr lang="en-US" sz="1100" dirty="0"/>
           </a:p>
@@ -5067,7 +5067,7 @@
                   <a:schemeClr val="tx1"/>
                 </a:solidFill>
               </a:rPr>
-              <a:t>La semana 1 funcionó porque el presupuesto fue al video V2. </a:t>
+              <a:t>Semana 1: delivery concentrado en V2 (82% del gasto). </a:t>
             </a:r>
             <a:pPr indent="0" marL="0">
               <a:buNone/>
@@ -5078,7 +5078,7 @@
                   <a:schemeClr val="tx1"/>
                 </a:solidFill>
               </a:rPr>
-              <a:t>En la semana 2, Meta movió el dinero a un anuncio estático (S3) que atrajo a personas que buscaban trabajo. El 12 de octubre corregimos la audiencia, los anuncios activos y los textos.</a:t>
+              <a:t>Semana 2: el algoritmo reasignó el 75% del gasto a S3 (estático), con tráfico de baja intención y 0 leads calificados. Ajustes de segmentación, creativos y copy aplicados el 12 oct.</a:t>
             </a:r>
             <a:endParaRPr lang="en-US" sz="1500" dirty="0"/>
           </a:p>
@@ -5186,7 +5186,7 @@
                   <a:schemeClr val="tx2"/>
                 </a:solidFill>
               </a:rPr>
-              <a:t>Semana 2: menos de un tercio de los clics</a:t>
+              <a:t>Semana 2: −71% en clics con +31% de inversión</a:t>
             </a:r>
             <a:endParaRPr lang="en-US" sz="3000" dirty="0"/>
           </a:p>
@@ -5510,7 +5510,7 @@
                           <a:ea typeface="Calibri" pitchFamily="34" charset="-122"/>
                           <a:cs typeface="Calibri" pitchFamily="34" charset="-120"/>
                         </a:rPr>
-                        <a:t>Costo por mil impresiones</a:t>
+                        <a:t>CPM</a:t>
                       </a:r>
                       <a:endParaRPr lang="en-US" sz="1200" dirty="0">
                         <a:latin typeface="Calibri" charset="0"/>
@@ -5644,7 +5644,7 @@
                           <a:ea typeface="Calibri" pitchFamily="34" charset="-122"/>
                           <a:cs typeface="Calibri" pitchFamily="34" charset="-120"/>
                         </a:rPr>
-                        <a:t>% que hace clic (CTR)</a:t>
+                        <a:t>CTR (enlace)</a:t>
                       </a:r>
                       <a:endParaRPr lang="en-US" sz="1200" dirty="0">
                         <a:latin typeface="Calibri" charset="0"/>
@@ -5778,7 +5778,7 @@
                           <a:ea typeface="Calibri" pitchFamily="34" charset="-122"/>
                           <a:cs typeface="Calibri" pitchFamily="34" charset="-120"/>
                         </a:rPr>
-                        <a:t>Leads según Meta</a:t>
+                        <a:t>Leads (Meta)</a:t>
                       </a:r>
                       <a:endParaRPr lang="en-US" sz="1200" dirty="0">
                         <a:latin typeface="Calibri" charset="0"/>
@@ -5912,7 +5912,7 @@
                           <a:ea typeface="Calibri" pitchFamily="34" charset="-122"/>
                           <a:cs typeface="Calibri" pitchFamily="34" charset="-120"/>
                         </a:rPr>
-                        <a:t>Quieren contratar (GHL)</a:t>
+                        <a:t>Leads calificados (GHL)</a:t>
                       </a:r>
                       <a:endParaRPr lang="en-US" sz="1200" dirty="0">
                         <a:latin typeface="Calibri" charset="0"/>
@@ -6046,7 +6046,7 @@
                           <a:ea typeface="Calibri" pitchFamily="34" charset="-122"/>
                           <a:cs typeface="Calibri" pitchFamily="34" charset="-120"/>
                         </a:rPr>
-                        <a:t>Buscan trabajo (GHL)</a:t>
+                        <a:t>Leads no calificados (GHL)</a:t>
                       </a:r>
                       <a:endParaRPr lang="en-US" sz="1200" dirty="0">
                         <a:latin typeface="Calibri" charset="0"/>
@@ -6196,7 +6196,7 @@
                   <a:schemeClr val="accent6"/>
                 </a:solidFill>
               </a:rPr>
-              <a:t>La semana 1 tuvo 6 días con anuncios: la campaña arrancó el martes 29.</a:t>
+              <a:t>Semana 1: 6 días de delivery (inicio 29 sep).</a:t>
             </a:r>
             <a:endParaRPr lang="en-US" sz="1000" dirty="0"/>
           </a:p>
@@ -6304,7 +6304,7 @@
                   <a:schemeClr val="tx2"/>
                 </a:solidFill>
               </a:rPr>
-              <a:t>3 de cada 4 leads de anuncios buscaban trabajo</a:t>
+              <a:t>Calidad de leads: 75% no calificados</a:t>
             </a:r>
             <a:endParaRPr lang="en-US" sz="3000" dirty="0"/>
           </a:p>
@@ -6455,7 +6455,7 @@
                   <a:schemeClr val="accent4"/>
                 </a:solidFill>
               </a:rPr>
-              <a:t>Quiere contratar · agendó</a:t>
+              <a:t>Calificado · agendado</a:t>
             </a:r>
             <a:endParaRPr lang="en-US" sz="1200" dirty="0"/>
           </a:p>
@@ -6590,7 +6590,7 @@
                   <a:schemeClr val="accent5"/>
                 </a:solidFill>
               </a:rPr>
-              <a:t>Busca trabajo</a:t>
+              <a:t>No calificado</a:t>
             </a:r>
             <a:endParaRPr lang="en-US" sz="1200" dirty="0"/>
           </a:p>
@@ -6725,7 +6725,7 @@
                   <a:schemeClr val="accent5"/>
                 </a:solidFill>
               </a:rPr>
-              <a:t>Busca trabajo</a:t>
+              <a:t>No calificado</a:t>
             </a:r>
             <a:endParaRPr lang="en-US" sz="1200" dirty="0"/>
           </a:p>
@@ -6860,7 +6860,7 @@
                   <a:schemeClr val="accent5"/>
                 </a:solidFill>
               </a:rPr>
-              <a:t>Busca trabajo</a:t>
+              <a:t>No calificado</a:t>
             </a:r>
             <a:endParaRPr lang="en-US" sz="1200" dirty="0"/>
           </a:p>
@@ -6896,7 +6896,7 @@
                   <a:schemeClr val="tx1"/>
                 </a:solidFill>
               </a:rPr>
-              <a:t>Por confirmar: </a:t>
+              <a:t>Pendiente: </a:t>
             </a:r>
             <a:pPr indent="0" marL="0">
               <a:buNone/>
@@ -6907,7 +6907,7 @@
                   <a:schemeClr val="tx1"/>
                 </a:solidFill>
               </a:rPr>
-              <a:t>la noche del 11 de octubre entraron 3 contactos que quieren contratar y agendaron, pero GHL no registra que vinieran de un anuncio.</a:t>
+              <a:t>3 leads calificados del 11 oct sin atribución (tráfico directo, sin UTM).</a:t>
             </a:r>
             <a:endParaRPr lang="en-US" sz="1200" dirty="0"/>
           </a:p>
@@ -7015,7 +7015,7 @@
                   <a:schemeClr val="tx2"/>
                 </a:solidFill>
               </a:rPr>
-              <a:t>Qué pasó en la cuenta, día por día</a:t>
+              <a:t>Cronología de cambios</a:t>
             </a:r>
             <a:endParaRPr lang="en-US" sz="3000" dirty="0"/>
           </a:p>
@@ -7210,7 +7210,7 @@
                   <a:schemeClr val="tx1"/>
                 </a:solidFill>
               </a:rPr>
-              <a:t>4 videos y 2 carruseles hacia go.orchidpros.com/hire.</a:t>
+              <a:t>Campaña ABO, objetivo Leads. 4 videos y 2 carruseles.</a:t>
             </a:r>
             <a:endParaRPr lang="en-US" sz="1300" dirty="0"/>
           </a:p>
@@ -7346,7 +7346,7 @@
                 <a:ea typeface="Cambria" pitchFamily="34" charset="-122"/>
                 <a:cs typeface="Cambria" pitchFamily="34" charset="-120"/>
               </a:rPr>
-              <a:t>Más variedad</a:t>
+              <a:t>Expansión creativa</a:t>
             </a:r>
             <a:endParaRPr lang="en-US" sz="1700" dirty="0"/>
           </a:p>
@@ -7382,7 +7382,7 @@
                   <a:schemeClr val="tx1"/>
                 </a:solidFill>
               </a:rPr>
-              <a:t>Se suman 8 anuncios estáticos (S1–S8).</a:t>
+              <a:t>+8 estáticos (S1–S8).</a:t>
             </a:r>
             <a:endParaRPr lang="en-US" sz="1300" dirty="0"/>
           </a:p>
@@ -7554,7 +7554,7 @@
                   <a:schemeClr val="tx1"/>
                 </a:solidFill>
               </a:rPr>
-              <a:t>El equipo pausa los videos y deja solo 3 estáticos activos.</a:t>
+              <a:t>Pausa de videos y carruseles; activos solo S1, S6 y S8.</a:t>
             </a:r>
             <a:endParaRPr lang="en-US" sz="1300" dirty="0"/>
           </a:p>
@@ -7690,7 +7690,7 @@
                 <a:ea typeface="Cambria" pitchFamily="34" charset="-122"/>
                 <a:cs typeface="Cambria" pitchFamily="34" charset="-120"/>
               </a:rPr>
-              <a:t>Correcciones</a:t>
+              <a:t>Optimización</a:t>
             </a:r>
             <a:endParaRPr lang="en-US" sz="1700" dirty="0"/>
           </a:p>
@@ -7726,7 +7726,7 @@
                   <a:schemeClr val="tx1"/>
                 </a:solidFill>
               </a:rPr>
-              <a:t>Medimos con GHL y corregimos audiencia, anuncios y textos.</a:t>
+              <a:t>Integración con GHL; ajustes de segmentación, creativos y copy.</a:t>
             </a:r>
             <a:endParaRPr lang="en-US" sz="1300" dirty="0"/>
           </a:p>
@@ -7834,7 +7834,7 @@
                   <a:schemeClr val="tx2"/>
                 </a:solidFill>
               </a:rPr>
-              <a:t>Las correcciones del 12 de octubre</a:t>
+              <a:t>Optimización del 12 oct</a:t>
             </a:r>
             <a:endParaRPr lang="en-US" sz="3000" dirty="0"/>
           </a:p>
@@ -8001,7 +8001,7 @@
                   <a:schemeClr val="tx1"/>
                 </a:solidFill>
               </a:rPr>
-              <a:t>Apagamos Advantage+ Audience: Meta estaba llegando a personas de 18–34 años.</a:t>
+              <a:t>Advantage+ Audience desactivado (gasto en 18–34).</a:t>
             </a:r>
             <a:endParaRPr lang="en-US" sz="1300" dirty="0"/>
           </a:p>
@@ -8019,7 +8019,7 @@
                   <a:schemeClr val="tx1"/>
                 </a:solidFill>
               </a:rPr>
-              <a:t>Edad fija de 30 a 65 años.</a:t>
+              <a:t>Edad 30–65 como límite estricto.</a:t>
             </a:r>
             <a:endParaRPr lang="en-US" sz="1300" dirty="0"/>
           </a:p>
@@ -8037,7 +8037,7 @@
                   <a:schemeClr val="tx1"/>
                 </a:solidFill>
               </a:rPr>
-              <a:t>Solo personas que viven en EE. UU.</a:t>
+              <a:t>Ubicación: residentes en EE. UU.</a:t>
             </a:r>
             <a:endParaRPr lang="en-US" sz="1300" dirty="0"/>
           </a:p>
@@ -8204,7 +8204,7 @@
                   <a:schemeClr val="tx1"/>
                 </a:solidFill>
               </a:rPr>
-              <a:t>Reactivamos V2, el único que trajo un cliente real.</a:t>
+              <a:t>V2 reactivado (único con lead calificado).</a:t>
             </a:r>
             <a:endParaRPr lang="en-US" sz="1300" dirty="0"/>
           </a:p>
@@ -8222,7 +8222,7 @@
                   <a:schemeClr val="tx1"/>
                 </a:solidFill>
               </a:rPr>
-              <a:t>Reactivamos V1, el de mejor tasa de clics.</a:t>
+              <a:t>V1 reactivado (CTR 28%).</a:t>
             </a:r>
             <a:endParaRPr lang="en-US" sz="1300" dirty="0"/>
           </a:p>
@@ -8240,7 +8240,7 @@
                   <a:schemeClr val="tx1"/>
                 </a:solidFill>
               </a:rPr>
-              <a:t>Pausamos S1 y S6; S8 sigue activo.</a:t>
+              <a:t>S1 y S6 pausados; S8 activo.</a:t>
             </a:r>
             <a:endParaRPr lang="en-US" sz="1300" dirty="0"/>
           </a:p>
@@ -8367,7 +8367,7 @@
                 <a:ea typeface="Cambria" pitchFamily="34" charset="-122"/>
                 <a:cs typeface="Cambria" pitchFamily="34" charset="-120"/>
               </a:rPr>
-              <a:t>Textos</a:t>
+              <a:t>Copy</a:t>
             </a:r>
             <a:endParaRPr lang="en-US" sz="1800" dirty="0"/>
           </a:p>
@@ -8407,7 +8407,7 @@
                   <a:schemeClr val="tx1"/>
                 </a:solidFill>
               </a:rPr>
-              <a:t>La primera línea le habla a quien contrata: "Law firm owners:", "Business owners:".</a:t>
+              <a:t>Hook dirigido al comprador ("Law firm owners:").</a:t>
             </a:r>
             <a:endParaRPr lang="en-US" sz="1300" dirty="0"/>
           </a:p>
@@ -8443,7 +8443,7 @@
                   <a:schemeClr val="tx1"/>
                 </a:solidFill>
               </a:rPr>
-              <a:t>Sin palabras de empleo.</a:t>
+              <a:t>Sin términos asociados a empleo.</a:t>
             </a:r>
             <a:endParaRPr lang="en-US" sz="1300" dirty="0"/>
           </a:p>
@@ -8479,7 +8479,7 @@
                   <a:schemeClr val="accent6"/>
                 </a:solidFill>
               </a:rPr>
-              <a:t>También intentamos excluir intereses de empleo (Indeed, Job hunting): Meta ya no lo permite.</a:t>
+              <a:t>Exclusión de intereses de empleo no disponible: Meta retiró las exclusiones de segmentación detallada.</a:t>
             </a:r>
             <a:endParaRPr lang="en-US" sz="1100" dirty="0"/>
           </a:p>
@@ -8587,7 +8587,7 @@
                   <a:schemeClr val="tx2"/>
                 </a:solidFill>
               </a:rPr>
-              <a:t>Qué aprendimos</a:t>
+              <a:t>Hallazgos</a:t>
             </a:r>
             <a:endParaRPr lang="en-US" sz="3000" dirty="0"/>
           </a:p>
@@ -8684,7 +8684,7 @@
                   <a:schemeClr val="tx2"/>
                 </a:solidFill>
               </a:rPr>
-              <a:t>El video para abogados (V2) es el único anuncio que trajo un cliente real.</a:t>
+              <a:t>V2 es el único creativo con lead calificado.</a:t>
             </a:r>
             <a:endParaRPr lang="en-US" sz="1600" dirty="0"/>
           </a:p>
@@ -8720,7 +8720,7 @@
                   <a:schemeClr val="tx1"/>
                 </a:solidFill>
               </a:rPr>
-              <a:t>Recibió el 82% del presupuesto en la semana 1 y solo el 21% en la semana 2.</a:t>
+              <a:t>Share de gasto: 82% en semana 1, 21% en semana 2.</a:t>
             </a:r>
             <a:endParaRPr lang="en-US" sz="1300" dirty="0"/>
           </a:p>
@@ -8817,7 +8817,7 @@
                   <a:schemeClr val="tx2"/>
                 </a:solidFill>
               </a:rPr>
-              <a:t>El estático S3 atrajo a quien busca trabajo.</a:t>
+              <a:t>S3 genera tráfico de baja intención.</a:t>
             </a:r>
             <a:endParaRPr lang="en-US" sz="1600" dirty="0"/>
           </a:p>
@@ -8853,7 +8853,7 @@
                   <a:schemeClr val="tx1"/>
                 </a:solidFill>
               </a:rPr>
-              <a:t>Gastó $207.45 en la semana 2, con CTR de 1.6%; sus 2 leads buscaban empleo.</a:t>
+              <a:t>$207.45 en semana 2, CTR 1.6%, 2 leads no calificados.</a:t>
             </a:r>
             <a:endParaRPr lang="en-US" sz="1300" dirty="0"/>
           </a:p>
@@ -8950,7 +8950,7 @@
                   <a:schemeClr val="tx2"/>
                 </a:solidFill>
               </a:rPr>
-              <a:t>El "lead" que reporta Meta no mide el éxito.</a:t>
+              <a:t>El evento Lead de Meta no refleja calidad.</a:t>
             </a:r>
             <a:endParaRPr lang="en-US" sz="1600" dirty="0"/>
           </a:p>
@@ -8986,7 +8986,7 @@
                   <a:schemeClr val="tx1"/>
                 </a:solidFill>
               </a:rPr>
-              <a:t>Desde ahora medimos con GHL: leads que quieren contratar y su costo.</a:t>
+              <a:t>3 de 4 leads atribuidos no calificados. KPI: CPL calificado (GHL).</a:t>
             </a:r>
             <a:endParaRPr lang="en-US" sz="1300" dirty="0"/>
           </a:p>
@@ -9083,7 +9083,7 @@
                   <a:schemeClr val="tx2"/>
                 </a:solidFill>
               </a:rPr>
-              <a:t>V1 y V4 tienen las mejores tasas de clic (23–29%), pero casi no recibieron presupuesto.</a:t>
+              <a:t>V1 y V4: CTR de 23–29% con gasto marginal.</a:t>
             </a:r>
             <a:endParaRPr lang="en-US" sz="1600" dirty="0"/>
           </a:p>
@@ -9119,7 +9119,7 @@
                   <a:schemeClr val="tx1"/>
                 </a:solidFill>
               </a:rPr>
-              <a:t>Todavía no sabemos si traen clientes; V1 vuelve a estar activo para probarlo.</a:t>
+              <a:t>Sin volumen para evaluar conversión; V1 reactivado en prueba.</a:t>
             </a:r>
             <a:endParaRPr lang="en-US" sz="1300" dirty="0"/>
           </a:p>
@@ -9227,7 +9227,7 @@
                   <a:schemeClr val="tx2"/>
                 </a:solidFill>
               </a:rPr>
-              <a:t>Los 3 anuncios activos, con el texto nuevo</a:t>
+              <a:t>Creativos activos (copy v3)</a:t>
             </a:r>
             <a:endParaRPr lang="en-US" sz="3000" dirty="0"/>
           </a:p>
@@ -9366,7 +9366,7 @@
                   <a:schemeClr val="accent4"/>
                 </a:solidFill>
               </a:rPr>
-              <a:t>1 quiere contratar (agendó)</a:t>
+              <a:t>1 lead calificado (agendado)</a:t>
             </a:r>
             <a:endParaRPr lang="en-US" sz="1200" dirty="0"/>
           </a:p>
@@ -9505,7 +9505,7 @@
                   <a:schemeClr val="accent6"/>
                 </a:solidFill>
               </a:rPr>
-              <a:t>Sin leads aún; a prueba</a:t>
+              <a:t>Sin leads · en prueba</a:t>
             </a:r>
             <a:endParaRPr lang="en-US" sz="1200" dirty="0"/>
           </a:p>
@@ -9644,7 +9644,7 @@
                   <a:schemeClr val="accent6"/>
                 </a:solidFill>
               </a:rPr>
-              <a:t>Sin leads aún</a:t>
+              <a:t>Sin leads</a:t>
             </a:r>
             <a:endParaRPr lang="en-US" sz="1200" dirty="0"/>
           </a:p>
@@ -9680,7 +9680,7 @@
                   <a:schemeClr val="accent6"/>
                 </a:solidFill>
               </a:rPr>
-              <a:t>Cifras acumuladas del 29 sep al 11 oct. En los videos se ve la portada.</a:t>
+              <a:t>Acumulado 29 sep – 11 oct. En videos se muestra la miniatura.</a:t>
             </a:r>
             <a:endParaRPr lang="en-US" sz="1000" dirty="0"/>
           </a:p>
@@ -9788,7 +9788,7 @@
                   <a:schemeClr val="tx2"/>
                 </a:solidFill>
               </a:rPr>
-              <a:t>Los que trajeron buscadores de empleo</a:t>
+              <a:t>Creativos con leads no calificados</a:t>
             </a:r>
             <a:endParaRPr lang="en-US" sz="3000" dirty="0"/>
           </a:p>
@@ -9927,7 +9927,7 @@
                   <a:schemeClr val="accent5"/>
                 </a:solidFill>
               </a:rPr>
-              <a:t>2 buscan trabajo</a:t>
+              <a:t>2 leads no calificados</a:t>
             </a:r>
             <a:endParaRPr lang="en-US" sz="1300" dirty="0"/>
           </a:p>
@@ -9963,7 +9963,7 @@
                   <a:schemeClr val="tx1"/>
                 </a:solidFill>
               </a:rPr>
-              <a:t>Se llevó el 75% del presupuesto de la semana 2.</a:t>
+              <a:t>75% del gasto de la semana 2.</a:t>
             </a:r>
             <a:endParaRPr lang="en-US" sz="1200" dirty="0"/>
           </a:p>
@@ -10138,7 +10138,7 @@
                   <a:schemeClr val="accent5"/>
                 </a:solidFill>
               </a:rPr>
-              <a:t>1 busca trabajo</a:t>
+              <a:t>1 lead no calificado</a:t>
             </a:r>
             <a:endParaRPr lang="en-US" sz="1300" dirty="0"/>
           </a:p>
@@ -10174,7 +10174,7 @@
                   <a:schemeClr val="tx1"/>
                 </a:solidFill>
               </a:rPr>
-              <a:t>Promete un "regalo" que atrae curiosos.</a:t>
+              <a:t>Oferta tipo "regalo": tráfico de baja intención.</a:t>
             </a:r>
             <a:endParaRPr lang="en-US" sz="1200" dirty="0"/>
           </a:p>

--- a/build/reports/informes/Informe_Meta_Ads_Orchid_2026-10-12.pptx
+++ b/build/reports/informes/Informe_Meta_Ads_Orchid_2026-10-12.pptx
@@ -17,9 +17,12 @@
     <p:sldId id="265" r:id="rId11"/>
     <p:sldId id="266" r:id="rId12"/>
     <p:sldId id="267" r:id="rId13"/>
+    <p:sldId id="268" r:id="rId14"/>
+    <p:sldId id="269" r:id="rId15"/>
+    <p:sldId id="270" r:id="rId16"/>
   </p:sldIdLst>
   <p:notesMasterIdLst>
-    <p:notesMasterId r:id="rId14"/>
+    <p:notesMasterId r:id="rId17"/>
   </p:notesMasterIdLst>
   <p:sldSz cx="9144000" cy="5143500"/>
   <p:notesSz cx="5143500" cy="9144000"/>
@@ -118,40 +121,51 @@
   <p:extLst>
     <p:ext uri="{521415D9-36F7-43E2-AB2F-B90AF26B5E84}">
       <p14:sectionLst xmlns:p14="http://schemas.microsoft.com/office/powerpoint/2010/main">
-        <p14:section name="Resumen" id="{6f914353-7174-81ba-764e-f7d819d33f31}">
+        <p14:section name="Resumen" id="{765464df-ac27-9c9e-f64d-4cbb2f9cf899}">
           <p14:sldIdLst>
             <p14:sldId id="256"/>
             <p14:sldId id="257"/>
           </p14:sldIdLst>
         </p14:section>
-        <p14:section name="Resultados" id="{6f7e0170-f4ad-aead-fbfb-670bdf5efb98}">
+        <p14:section name="Resultados" id="{029e079f-9926-7554-a210-69061ed23bb4}">
           <p14:sldIdLst>
             <p14:sldId id="258"/>
             <p14:sldId id="259"/>
           </p14:sldIdLst>
         </p14:section>
-        <p14:section name="Qué hicimos" id="{6c6e38f4-c2a2-4fe7-cda8-78467961f165}">
+        <p14:section name="Qué hicimos" id="{f8f72467-dbee-bc9f-af92-a76ae057d15f}">
           <p14:sldIdLst>
             <p14:sldId id="260"/>
             <p14:sldId id="261"/>
           </p14:sldIdLst>
         </p14:section>
-        <p14:section name="Aprendizajes" id="{7536cfe1-3e4b-48e4-bdc1-5ac35f2912bd}">
+        <p14:section name="Aprendizajes" id="{d34b9754-f943-b75c-dcb8-be1011817d95}">
           <p14:sldIdLst>
             <p14:sldId id="262"/>
           </p14:sldIdLst>
         </p14:section>
-        <p14:section name="Anuncios" id="{47484183-e717-cd62-f9c1-460b1534cd9f}">
+        <p14:section name="Anuncios" id="{c0f33074-4b7e-fe65-4f94-0c23948f03e8}">
           <p14:sldIdLst>
             <p14:sldId id="263"/>
             <p14:sldId id="264"/>
             <p14:sldId id="265"/>
           </p14:sldIdLst>
         </p14:section>
-        <p14:section name="Próximos pasos" id="{576c564e-d721-b2ae-26e3-8cb41c738ff5}">
+        <p14:section name="Conclusiones" id="{a04ced2c-26e1-e8f3-4575-df758f99f0a0}">
           <p14:sldIdLst>
             <p14:sldId id="266"/>
+          </p14:sldIdLst>
+        </p14:section>
+        <p14:section name="Estrategia creativa" id="{941135be-87d1-a5d0-4d54-e28aef9b3f50}">
+          <p14:sldIdLst>
             <p14:sldId id="267"/>
+            <p14:sldId id="268"/>
+          </p14:sldIdLst>
+        </p14:section>
+        <p14:section name="Próximos pasos" id="{13afc691-e0c5-fe7b-048d-d8e379ef58ff}">
+          <p14:sldIdLst>
+            <p14:sldId id="269"/>
+            <p14:sldId id="270"/>
           </p14:sldIdLst>
         </p14:section>
       </p14:sectionLst>
@@ -1261,7 +1275,7 @@
           <a:p>
             <a:r>
               <a:rPr lang="en-US" dirty="0"/>
-              <a:t>Próximo reporte: lunes 19 oct (semana 12–18 oct).</a:t>
+              <a:t>Prioridad: aumentar volumen y diversidad creativa por segmento, y optimizar por lead calificado en lugar del evento Lead genérico.</a:t>
             </a:r>
             <a:endParaRPr lang="en-US" dirty="0"/>
           </a:p>
@@ -1349,7 +1363,7 @@
           <a:p>
             <a:r>
               <a:rPr lang="en-US" dirty="0"/>
-              <a:t>Insumos necesarios para fijar metas de las próximas semanas.</a:t>
+              <a:t>El volumen recomendado (8–10 conceptos) es un rango operativo, no una cifra oficial de Meta. La clave es que cada concepto sea realmente distinto: segmento, ángulo o formato.</a:t>
             </a:r>
             <a:endParaRPr lang="en-US" dirty="0"/>
           </a:p>
@@ -1373,6 +1387,270 @@
             <a:fld id="{F7021451-1387-4CA6-816F-3879F97B5CBC}" type="slidenum">
               <a:rPr lang="en-US"/>
               <a:t>12</a:t>
+            </a:fld>
+            <a:endParaRPr lang="en-US"/>
+          </a:p>
+        </p:txBody>
+      </p:sp>
+    </p:spTree>
+    <p:extLst>
+      <p:ext uri="{BB962C8B-B14F-4D97-AF65-F5344CB8AC3E}">
+        <p14:creationId xmlns:p14="http://schemas.microsoft.com/office/powerpoint/2010/main" val="1024086991"/>
+      </p:ext>
+    </p:extLst>
+  </p:cSld>
+  <p:clrMapOvr>
+    <a:masterClrMapping/>
+  </p:clrMapOvr>
+</p:notes>
+</file>
+
+<file path=ppt/notesSlides/notesSlide13.xml><?xml version="1.0" encoding="utf-8"?>
+<p:notes xmlns:a="http://schemas.openxmlformats.org/drawingml/2006/main" xmlns:r="http://schemas.openxmlformats.org/officeDocument/2006/relationships" xmlns:p="http://schemas.openxmlformats.org/presentationml/2006/main">
+  <p:cSld>
+    <p:spTree>
+      <p:nvGrpSpPr>
+        <p:cNvPr id="1" name=""/>
+        <p:cNvGrpSpPr/>
+        <p:nvPr/>
+      </p:nvGrpSpPr>
+      <p:grpSpPr>
+        <a:xfrm>
+          <a:off x="0" y="0"/>
+          <a:ext cx="0" cy="0"/>
+          <a:chOff x="0" y="0"/>
+          <a:chExt cx="0" cy="0"/>
+        </a:xfrm>
+      </p:grpSpPr>
+      <p:sp>
+        <p:nvSpPr>
+          <p:cNvPr id="2" name="Slide Image Placeholder 1"/>
+          <p:cNvSpPr>
+            <a:spLocks noGrp="1" noRot="1" noChangeAspect="1"/>
+          </p:cNvSpPr>
+          <p:nvPr>
+            <p:ph type="sldImg"/>
+          </p:nvPr>
+        </p:nvSpPr>
+        <p:spPr/>
+      </p:sp>
+      <p:sp>
+        <p:nvSpPr>
+          <p:cNvPr id="3" name="Notes Placeholder 2"/>
+          <p:cNvSpPr>
+            <a:spLocks noGrp="1"/>
+          </p:cNvSpPr>
+          <p:nvPr>
+            <p:ph type="body" idx="1"/>
+          </p:nvPr>
+        </p:nvSpPr>
+        <p:spPr/>
+        <p:txBody>
+          <a:bodyPr/>
+          <a:lstStyle/>
+          <a:p>
+            <a:r>
+              <a:rPr lang="en-US" dirty="0"/>
+              <a:t>Prioridad de producción: conceptos 1, 3 y 6. Los conceptos 4 y 5 pueden reutilizar S8 y S1 con el hook corregido.</a:t>
+            </a:r>
+            <a:endParaRPr lang="en-US" dirty="0"/>
+          </a:p>
+        </p:txBody>
+      </p:sp>
+      <p:sp>
+        <p:nvSpPr>
+          <p:cNvPr id="4" name="Slide Number Placeholder 3"/>
+          <p:cNvSpPr>
+            <a:spLocks noGrp="1"/>
+          </p:cNvSpPr>
+          <p:nvPr>
+            <p:ph type="sldNum" sz="quarter" idx="10"/>
+          </p:nvPr>
+        </p:nvSpPr>
+        <p:spPr/>
+        <p:txBody>
+          <a:bodyPr/>
+          <a:lstStyle/>
+          <a:p>
+            <a:fld id="{F7021451-1387-4CA6-816F-3879F97B5CBC}" type="slidenum">
+              <a:rPr lang="en-US"/>
+              <a:t>13</a:t>
+            </a:fld>
+            <a:endParaRPr lang="en-US"/>
+          </a:p>
+        </p:txBody>
+      </p:sp>
+    </p:spTree>
+    <p:extLst>
+      <p:ext uri="{BB962C8B-B14F-4D97-AF65-F5344CB8AC3E}">
+        <p14:creationId xmlns:p14="http://schemas.microsoft.com/office/powerpoint/2010/main" val="1024086991"/>
+      </p:ext>
+    </p:extLst>
+  </p:cSld>
+  <p:clrMapOvr>
+    <a:masterClrMapping/>
+  </p:clrMapOvr>
+</p:notes>
+</file>
+
+<file path=ppt/notesSlides/notesSlide14.xml><?xml version="1.0" encoding="utf-8"?>
+<p:notes xmlns:a="http://schemas.openxmlformats.org/drawingml/2006/main" xmlns:r="http://schemas.openxmlformats.org/officeDocument/2006/relationships" xmlns:p="http://schemas.openxmlformats.org/presentationml/2006/main">
+  <p:cSld>
+    <p:spTree>
+      <p:nvGrpSpPr>
+        <p:cNvPr id="1" name=""/>
+        <p:cNvGrpSpPr/>
+        <p:nvPr/>
+      </p:nvGrpSpPr>
+      <p:grpSpPr>
+        <a:xfrm>
+          <a:off x="0" y="0"/>
+          <a:ext cx="0" cy="0"/>
+          <a:chOff x="0" y="0"/>
+          <a:chExt cx="0" cy="0"/>
+        </a:xfrm>
+      </p:grpSpPr>
+      <p:sp>
+        <p:nvSpPr>
+          <p:cNvPr id="2" name="Slide Image Placeholder 1"/>
+          <p:cNvSpPr>
+            <a:spLocks noGrp="1" noRot="1" noChangeAspect="1"/>
+          </p:cNvSpPr>
+          <p:nvPr>
+            <p:ph type="sldImg"/>
+          </p:nvPr>
+        </p:nvSpPr>
+        <p:spPr/>
+      </p:sp>
+      <p:sp>
+        <p:nvSpPr>
+          <p:cNvPr id="3" name="Notes Placeholder 2"/>
+          <p:cNvSpPr>
+            <a:spLocks noGrp="1"/>
+          </p:cNvSpPr>
+          <p:nvPr>
+            <p:ph type="body" idx="1"/>
+          </p:nvPr>
+        </p:nvSpPr>
+        <p:spPr/>
+        <p:txBody>
+          <a:bodyPr/>
+          <a:lstStyle/>
+          <a:p>
+            <a:r>
+              <a:rPr lang="en-US" dirty="0"/>
+              <a:t>Próximo reporte: lunes 19 oct (semana 12–18 oct).</a:t>
+            </a:r>
+            <a:endParaRPr lang="en-US" dirty="0"/>
+          </a:p>
+        </p:txBody>
+      </p:sp>
+      <p:sp>
+        <p:nvSpPr>
+          <p:cNvPr id="4" name="Slide Number Placeholder 3"/>
+          <p:cNvSpPr>
+            <a:spLocks noGrp="1"/>
+          </p:cNvSpPr>
+          <p:nvPr>
+            <p:ph type="sldNum" sz="quarter" idx="10"/>
+          </p:nvPr>
+        </p:nvSpPr>
+        <p:spPr/>
+        <p:txBody>
+          <a:bodyPr/>
+          <a:lstStyle/>
+          <a:p>
+            <a:fld id="{F7021451-1387-4CA6-816F-3879F97B5CBC}" type="slidenum">
+              <a:rPr lang="en-US"/>
+              <a:t>14</a:t>
+            </a:fld>
+            <a:endParaRPr lang="en-US"/>
+          </a:p>
+        </p:txBody>
+      </p:sp>
+    </p:spTree>
+    <p:extLst>
+      <p:ext uri="{BB962C8B-B14F-4D97-AF65-F5344CB8AC3E}">
+        <p14:creationId xmlns:p14="http://schemas.microsoft.com/office/powerpoint/2010/main" val="1024086991"/>
+      </p:ext>
+    </p:extLst>
+  </p:cSld>
+  <p:clrMapOvr>
+    <a:masterClrMapping/>
+  </p:clrMapOvr>
+</p:notes>
+</file>
+
+<file path=ppt/notesSlides/notesSlide15.xml><?xml version="1.0" encoding="utf-8"?>
+<p:notes xmlns:a="http://schemas.openxmlformats.org/drawingml/2006/main" xmlns:r="http://schemas.openxmlformats.org/officeDocument/2006/relationships" xmlns:p="http://schemas.openxmlformats.org/presentationml/2006/main">
+  <p:cSld>
+    <p:spTree>
+      <p:nvGrpSpPr>
+        <p:cNvPr id="1" name=""/>
+        <p:cNvGrpSpPr/>
+        <p:nvPr/>
+      </p:nvGrpSpPr>
+      <p:grpSpPr>
+        <a:xfrm>
+          <a:off x="0" y="0"/>
+          <a:ext cx="0" cy="0"/>
+          <a:chOff x="0" y="0"/>
+          <a:chExt cx="0" cy="0"/>
+        </a:xfrm>
+      </p:grpSpPr>
+      <p:sp>
+        <p:nvSpPr>
+          <p:cNvPr id="2" name="Slide Image Placeholder 1"/>
+          <p:cNvSpPr>
+            <a:spLocks noGrp="1" noRot="1" noChangeAspect="1"/>
+          </p:cNvSpPr>
+          <p:nvPr>
+            <p:ph type="sldImg"/>
+          </p:nvPr>
+        </p:nvSpPr>
+        <p:spPr/>
+      </p:sp>
+      <p:sp>
+        <p:nvSpPr>
+          <p:cNvPr id="3" name="Notes Placeholder 2"/>
+          <p:cNvSpPr>
+            <a:spLocks noGrp="1"/>
+          </p:cNvSpPr>
+          <p:nvPr>
+            <p:ph type="body" idx="1"/>
+          </p:nvPr>
+        </p:nvSpPr>
+        <p:spPr/>
+        <p:txBody>
+          <a:bodyPr/>
+          <a:lstStyle/>
+          <a:p>
+            <a:r>
+              <a:rPr lang="en-US" dirty="0"/>
+              <a:t>Insumos necesarios para fijar metas de las próximas semanas.</a:t>
+            </a:r>
+            <a:endParaRPr lang="en-US" dirty="0"/>
+          </a:p>
+        </p:txBody>
+      </p:sp>
+      <p:sp>
+        <p:nvSpPr>
+          <p:cNvPr id="4" name="Slide Number Placeholder 3"/>
+          <p:cNvSpPr>
+            <a:spLocks noGrp="1"/>
+          </p:cNvSpPr>
+          <p:nvPr>
+            <p:ph type="sldNum" sz="quarter" idx="10"/>
+          </p:nvPr>
+        </p:nvSpPr>
+        <p:spPr/>
+        <p:txBody>
+          <a:bodyPr/>
+          <a:lstStyle/>
+          <a:p>
+            <a:fld id="{F7021451-1387-4CA6-816F-3879F97B5CBC}" type="slidenum">
+              <a:rPr lang="en-US"/>
+              <a:t>15</a:t>
             </a:fld>
             <a:endParaRPr lang="en-US"/>
           </a:p>
@@ -3615,7 +3893,7 @@
                   <a:schemeClr val="tx2"/>
                 </a:solidFill>
               </a:rPr>
-              <a:t>Plan · 12 – 18 oct</a:t>
+              <a:t>Conclusiones: qué funciona y qué no</a:t>
             </a:r>
             <a:endParaRPr lang="en-US" sz="3000" dirty="0"/>
           </a:p>
@@ -3623,18 +3901,57 @@
       </p:sp>
       <p:sp>
         <p:nvSpPr>
-          <p:cNvPr id="3" name="Plan card 1"/>
+          <p:cNvPr id="3" name="Conclusion head 1"/>
+          <p:cNvSpPr txBox="1"/>
+          <p:nvPr/>
+        </p:nvSpPr>
+        <p:spPr>
+          <a:xfrm>
+            <a:off x="457200" y="1051560"/>
+            <a:ext cx="4023360" cy="365760"/>
+          </a:xfrm>
+          <a:prstGeom prst="rect">
+            <a:avLst/>
+          </a:prstGeom>
+          <a:noFill/>
+          <a:ln/>
+        </p:spPr>
+        <p:txBody>
+          <a:bodyPr wrap="square" lIns="0" tIns="0" rIns="0" bIns="0" rtlCol="0" anchor="ctr"/>
+          <a:lstStyle/>
+          <a:p>
+            <a:pPr indent="0" marL="0">
+              <a:buNone/>
+            </a:pPr>
+            <a:r>
+              <a:rPr lang="en-US" sz="1800" b="1" dirty="0">
+                <a:solidFill>
+                  <a:schemeClr val="accent4"/>
+                </a:solidFill>
+                <a:latin typeface="Cambria" pitchFamily="34" charset="0"/>
+                <a:ea typeface="Cambria" pitchFamily="34" charset="-122"/>
+                <a:cs typeface="Cambria" pitchFamily="34" charset="-120"/>
+              </a:rPr>
+              <a:t>Funciona</a:t>
+            </a:r>
+            <a:endParaRPr lang="en-US" sz="1800" dirty="0"/>
+          </a:p>
+        </p:txBody>
+      </p:sp>
+      <p:sp>
+        <p:nvSpPr>
+          <p:cNvPr id="4" name="Conclusion card 1.1"/>
           <p:cNvSpPr/>
           <p:nvPr/>
         </p:nvSpPr>
         <p:spPr>
           <a:xfrm>
-            <a:off x="457200" y="1097280"/>
-            <a:ext cx="2615184" cy="3017520"/>
+            <a:off x="457200" y="1508760"/>
+            <a:ext cx="4023360" cy="685800"/>
           </a:xfrm>
           <a:prstGeom prst="roundRect">
             <a:avLst>
-              <a:gd name="adj" fmla="val 4196"/>
+              <a:gd name="adj" fmla="val 16000"/>
             </a:avLst>
           </a:prstGeom>
           <a:solidFill>
@@ -3650,24 +3967,24 @@
       </p:sp>
       <p:sp>
         <p:nvSpPr>
-          <p:cNvPr id="4" name="Plan dot 1"/>
+          <p:cNvPr id="5" name="Conclusion dot 1.1"/>
           <p:cNvSpPr/>
           <p:nvPr/>
         </p:nvSpPr>
         <p:spPr>
           <a:xfrm>
-            <a:off x="685800" y="1325880"/>
-            <a:ext cx="457200" cy="457200"/>
+            <a:off x="594360" y="1755648"/>
+            <a:ext cx="182880" cy="182880"/>
           </a:xfrm>
           <a:prstGeom prst="ellipse">
             <a:avLst/>
           </a:prstGeom>
           <a:solidFill>
-            <a:schemeClr val="tx2"/>
+            <a:schemeClr val="accent4"/>
           </a:solidFill>
           <a:ln w="12700">
             <a:solidFill>
-              <a:schemeClr val="tx2"/>
+              <a:schemeClr val="accent4"/>
             </a:solidFill>
             <a:prstDash val="solid"/>
           </a:ln>
@@ -3675,14 +3992,14 @@
       </p:sp>
       <p:sp>
         <p:nvSpPr>
-          <p:cNvPr id="5" name="Plan dot 1 label"/>
+          <p:cNvPr id="6" name="Conclusion title 1.1"/>
           <p:cNvSpPr txBox="1"/>
           <p:nvPr/>
         </p:nvSpPr>
         <p:spPr>
           <a:xfrm>
-            <a:off x="685800" y="1325880"/>
-            <a:ext cx="457200" cy="457200"/>
+            <a:off x="914400" y="1563624"/>
+            <a:ext cx="3474720" cy="274320"/>
           </a:xfrm>
           <a:prstGeom prst="rect">
             <a:avLst/>
@@ -3694,31 +4011,31 @@
           <a:bodyPr wrap="square" lIns="0" tIns="0" rIns="0" bIns="0" rtlCol="0" anchor="ctr"/>
           <a:lstStyle/>
           <a:p>
-            <a:pPr algn="ctr" indent="0" marL="0">
-              <a:buNone/>
-            </a:pPr>
-            <a:r>
-              <a:rPr lang="en-US" sz="1400" b="1" dirty="0">
-                <a:solidFill>
-                  <a:schemeClr val="bg1"/>
-                </a:solidFill>
-              </a:rPr>
-              <a:t>1</a:t>
-            </a:r>
-            <a:endParaRPr lang="en-US" sz="1400" dirty="0"/>
-          </a:p>
-        </p:txBody>
-      </p:sp>
-      <p:sp>
-        <p:nvSpPr>
-          <p:cNvPr id="6" name="Plan head 1"/>
+            <a:pPr indent="0" marL="0">
+              <a:buNone/>
+            </a:pPr>
+            <a:r>
+              <a:rPr lang="en-US" sz="1300" b="1" dirty="0">
+                <a:solidFill>
+                  <a:schemeClr val="tx2"/>
+                </a:solidFill>
+              </a:rPr>
+              <a:t>Video vertical por segmento</a:t>
+            </a:r>
+            <a:endParaRPr lang="en-US" sz="1300" dirty="0"/>
+          </a:p>
+        </p:txBody>
+      </p:sp>
+      <p:sp>
+        <p:nvSpPr>
+          <p:cNvPr id="7" name="Conclusion body 1.1"/>
           <p:cNvSpPr txBox="1"/>
           <p:nvPr/>
         </p:nvSpPr>
         <p:spPr>
           <a:xfrm>
-            <a:off x="685800" y="1965960"/>
-            <a:ext cx="2194560" cy="548640"/>
+            <a:off x="914400" y="1837944"/>
+            <a:ext cx="3474720" cy="329184"/>
           </a:xfrm>
           <a:prstGeom prst="rect">
             <a:avLst/>
@@ -3734,70 +4051,31 @@
               <a:buNone/>
             </a:pPr>
             <a:r>
-              <a:rPr lang="en-US" sz="1700" b="1" dirty="0">
-                <a:solidFill>
-                  <a:schemeClr val="tx2"/>
-                </a:solidFill>
-                <a:latin typeface="Cambria" pitchFamily="34" charset="0"/>
-                <a:ea typeface="Cambria" pitchFamily="34" charset="-122"/>
-                <a:cs typeface="Cambria" pitchFamily="34" charset="-120"/>
-              </a:rPr>
-              <a:t>Fase de aprendizaje</a:t>
-            </a:r>
-            <a:endParaRPr lang="en-US" sz="1700" dirty="0"/>
-          </a:p>
-        </p:txBody>
-      </p:sp>
-      <p:sp>
-        <p:nvSpPr>
-          <p:cNvPr id="7" name="Plan body 1"/>
-          <p:cNvSpPr txBox="1"/>
-          <p:nvPr/>
-        </p:nvSpPr>
-        <p:spPr>
-          <a:xfrm>
-            <a:off x="685800" y="2560320"/>
-            <a:ext cx="2194560" cy="1463040"/>
-          </a:xfrm>
-          <a:prstGeom prst="rect">
-            <a:avLst/>
-          </a:prstGeom>
-          <a:noFill/>
-          <a:ln/>
-        </p:spPr>
-        <p:txBody>
-          <a:bodyPr wrap="square" lIns="0" tIns="0" rIns="0" bIns="0" rtlCol="0" anchor="t"/>
-          <a:lstStyle/>
-          <a:p>
-            <a:pPr indent="0" marL="0">
-              <a:buNone/>
-            </a:pPr>
-            <a:r>
-              <a:rPr lang="en-US" sz="1300" dirty="0">
+              <a:rPr lang="en-US" sz="1100" dirty="0">
                 <a:solidFill>
                   <a:schemeClr val="tx1"/>
                 </a:solidFill>
               </a:rPr>
-              <a:t>Sin cambios durante 5 días. Criterio de pausa: ~$120 de gasto sin lead calificado.</a:t>
-            </a:r>
-            <a:endParaRPr lang="en-US" sz="1300" dirty="0"/>
-          </a:p>
-        </p:txBody>
-      </p:sp>
-      <p:sp>
-        <p:nvSpPr>
-          <p:cNvPr id="8" name="Plan card 2"/>
+              <a:t>CTR 6.2% (video) vs. 1.9% (estático). V2 (legal) genera el único lead calificado.</a:t>
+            </a:r>
+            <a:endParaRPr lang="en-US" sz="1100" dirty="0"/>
+          </a:p>
+        </p:txBody>
+      </p:sp>
+      <p:sp>
+        <p:nvSpPr>
+          <p:cNvPr id="8" name="Conclusion card 1.2"/>
           <p:cNvSpPr/>
           <p:nvPr/>
         </p:nvSpPr>
         <p:spPr>
           <a:xfrm>
-            <a:off x="3264408" y="1097280"/>
-            <a:ext cx="2615184" cy="3017520"/>
+            <a:off x="457200" y="2286000"/>
+            <a:ext cx="4023360" cy="685800"/>
           </a:xfrm>
           <a:prstGeom prst="roundRect">
             <a:avLst>
-              <a:gd name="adj" fmla="val 4196"/>
+              <a:gd name="adj" fmla="val 16000"/>
             </a:avLst>
           </a:prstGeom>
           <a:solidFill>
@@ -3813,24 +4091,24 @@
       </p:sp>
       <p:sp>
         <p:nvSpPr>
-          <p:cNvPr id="9" name="Plan dot 2"/>
+          <p:cNvPr id="9" name="Conclusion dot 1.2"/>
           <p:cNvSpPr/>
           <p:nvPr/>
         </p:nvSpPr>
         <p:spPr>
           <a:xfrm>
-            <a:off x="3493008" y="1325880"/>
-            <a:ext cx="457200" cy="457200"/>
+            <a:off x="594360" y="2532888"/>
+            <a:ext cx="182880" cy="182880"/>
           </a:xfrm>
           <a:prstGeom prst="ellipse">
             <a:avLst/>
           </a:prstGeom>
           <a:solidFill>
-            <a:schemeClr val="tx2"/>
+            <a:schemeClr val="accent4"/>
           </a:solidFill>
           <a:ln w="12700">
             <a:solidFill>
-              <a:schemeClr val="tx2"/>
+              <a:schemeClr val="accent4"/>
             </a:solidFill>
             <a:prstDash val="solid"/>
           </a:ln>
@@ -3838,14 +4116,14 @@
       </p:sp>
       <p:sp>
         <p:nvSpPr>
-          <p:cNvPr id="10" name="Plan dot 2 label"/>
+          <p:cNvPr id="10" name="Conclusion title 1.2"/>
           <p:cNvSpPr txBox="1"/>
           <p:nvPr/>
         </p:nvSpPr>
         <p:spPr>
           <a:xfrm>
-            <a:off x="3493008" y="1325880"/>
-            <a:ext cx="457200" cy="457200"/>
+            <a:off x="914400" y="2340864"/>
+            <a:ext cx="3474720" cy="274320"/>
           </a:xfrm>
           <a:prstGeom prst="rect">
             <a:avLst/>
@@ -3857,31 +4135,31 @@
           <a:bodyPr wrap="square" lIns="0" tIns="0" rIns="0" bIns="0" rtlCol="0" anchor="ctr"/>
           <a:lstStyle/>
           <a:p>
-            <a:pPr algn="ctr" indent="0" marL="0">
-              <a:buNone/>
-            </a:pPr>
-            <a:r>
-              <a:rPr lang="en-US" sz="1400" b="1" dirty="0">
-                <a:solidFill>
-                  <a:schemeClr val="bg1"/>
-                </a:solidFill>
-              </a:rPr>
-              <a:t>2</a:t>
-            </a:r>
-            <a:endParaRPr lang="en-US" sz="1400" dirty="0"/>
-          </a:p>
-        </p:txBody>
-      </p:sp>
-      <p:sp>
-        <p:nvSpPr>
-          <p:cNvPr id="11" name="Plan head 2"/>
+            <a:pPr indent="0" marL="0">
+              <a:buNone/>
+            </a:pPr>
+            <a:r>
+              <a:rPr lang="en-US" sz="1300" b="1" dirty="0">
+                <a:solidFill>
+                  <a:schemeClr val="tx2"/>
+                </a:solidFill>
+              </a:rPr>
+              <a:t>Filtro de calificación</a:t>
+            </a:r>
+            <a:endParaRPr lang="en-US" sz="1300" dirty="0"/>
+          </a:p>
+        </p:txBody>
+      </p:sp>
+      <p:sp>
+        <p:nvSpPr>
+          <p:cNvPr id="11" name="Conclusion body 1.2"/>
           <p:cNvSpPr txBox="1"/>
           <p:nvPr/>
         </p:nvSpPr>
         <p:spPr>
           <a:xfrm>
-            <a:off x="3493008" y="1965960"/>
-            <a:ext cx="2194560" cy="548640"/>
+            <a:off x="914400" y="2615184"/>
+            <a:ext cx="3474720" cy="329184"/>
           </a:xfrm>
           <a:prstGeom prst="rect">
             <a:avLst/>
@@ -3897,70 +4175,31 @@
               <a:buNone/>
             </a:pPr>
             <a:r>
-              <a:rPr lang="en-US" sz="1700" b="1" dirty="0">
-                <a:solidFill>
-                  <a:schemeClr val="tx2"/>
-                </a:solidFill>
-                <a:latin typeface="Cambria" pitchFamily="34" charset="0"/>
-                <a:ea typeface="Cambria" pitchFamily="34" charset="-122"/>
-                <a:cs typeface="Cambria" pitchFamily="34" charset="-120"/>
-              </a:rPr>
-              <a:t>Medición en GHL</a:t>
-            </a:r>
-            <a:endParaRPr lang="en-US" sz="1700" dirty="0"/>
-          </a:p>
-        </p:txBody>
-      </p:sp>
-      <p:sp>
-        <p:nvSpPr>
-          <p:cNvPr id="12" name="Plan body 2"/>
-          <p:cNvSpPr txBox="1"/>
-          <p:nvPr/>
-        </p:nvSpPr>
-        <p:spPr>
-          <a:xfrm>
-            <a:off x="3493008" y="2560320"/>
-            <a:ext cx="2194560" cy="1463040"/>
-          </a:xfrm>
-          <a:prstGeom prst="rect">
-            <a:avLst/>
-          </a:prstGeom>
-          <a:noFill/>
-          <a:ln/>
-        </p:spPr>
-        <p:txBody>
-          <a:bodyPr wrap="square" lIns="0" tIns="0" rIns="0" bIns="0" rtlCol="0" anchor="t"/>
-          <a:lstStyle/>
-          <a:p>
-            <a:pPr indent="0" marL="0">
-              <a:buNone/>
-            </a:pPr>
-            <a:r>
-              <a:rPr lang="en-US" sz="1300" dirty="0">
+              <a:rPr lang="en-US" sz="1100" dirty="0">
                 <a:solidFill>
                   <a:schemeClr val="tx1"/>
                 </a:solidFill>
               </a:rPr>
-              <a:t>Reporte diario de leads calificados vs. no calificados por anuncio.</a:t>
-            </a:r>
-            <a:endParaRPr lang="en-US" sz="1300" dirty="0"/>
-          </a:p>
-        </p:txBody>
-      </p:sp>
-      <p:sp>
-        <p:nvSpPr>
-          <p:cNvPr id="13" name="Plan card 3"/>
+              <a:t>"Hiring or job seeking" identificó los 3 leads no calificados.</a:t>
+            </a:r>
+            <a:endParaRPr lang="en-US" sz="1100" dirty="0"/>
+          </a:p>
+        </p:txBody>
+      </p:sp>
+      <p:sp>
+        <p:nvSpPr>
+          <p:cNvPr id="12" name="Conclusion card 1.3"/>
           <p:cNvSpPr/>
           <p:nvPr/>
         </p:nvSpPr>
         <p:spPr>
           <a:xfrm>
-            <a:off x="6071616" y="1097280"/>
-            <a:ext cx="2615184" cy="3017520"/>
+            <a:off x="457200" y="3063240"/>
+            <a:ext cx="4023360" cy="685800"/>
           </a:xfrm>
           <a:prstGeom prst="roundRect">
             <a:avLst>
-              <a:gd name="adj" fmla="val 4196"/>
+              <a:gd name="adj" fmla="val 16000"/>
             </a:avLst>
           </a:prstGeom>
           <a:solidFill>
@@ -3976,24 +4215,24 @@
       </p:sp>
       <p:sp>
         <p:nvSpPr>
-          <p:cNvPr id="14" name="Plan dot 3"/>
+          <p:cNvPr id="13" name="Conclusion dot 1.3"/>
           <p:cNvSpPr/>
           <p:nvPr/>
         </p:nvSpPr>
         <p:spPr>
           <a:xfrm>
-            <a:off x="6300216" y="1325880"/>
-            <a:ext cx="457200" cy="457200"/>
+            <a:off x="594360" y="3310128"/>
+            <a:ext cx="182880" cy="182880"/>
           </a:xfrm>
           <a:prstGeom prst="ellipse">
             <a:avLst/>
           </a:prstGeom>
           <a:solidFill>
-            <a:schemeClr val="tx2"/>
+            <a:schemeClr val="accent4"/>
           </a:solidFill>
           <a:ln w="12700">
             <a:solidFill>
-              <a:schemeClr val="tx2"/>
+              <a:schemeClr val="accent4"/>
             </a:solidFill>
             <a:prstDash val="solid"/>
           </a:ln>
@@ -4001,14 +4240,14 @@
       </p:sp>
       <p:sp>
         <p:nvSpPr>
-          <p:cNvPr id="15" name="Plan dot 3 label"/>
+          <p:cNvPr id="14" name="Conclusion title 1.3"/>
           <p:cNvSpPr txBox="1"/>
           <p:nvPr/>
         </p:nvSpPr>
         <p:spPr>
           <a:xfrm>
-            <a:off x="6300216" y="1325880"/>
-            <a:ext cx="457200" cy="457200"/>
+            <a:off x="914400" y="3118104"/>
+            <a:ext cx="3474720" cy="274320"/>
           </a:xfrm>
           <a:prstGeom prst="rect">
             <a:avLst/>
@@ -4020,31 +4259,31 @@
           <a:bodyPr wrap="square" lIns="0" tIns="0" rIns="0" bIns="0" rtlCol="0" anchor="ctr"/>
           <a:lstStyle/>
           <a:p>
-            <a:pPr algn="ctr" indent="0" marL="0">
-              <a:buNone/>
-            </a:pPr>
-            <a:r>
-              <a:rPr lang="en-US" sz="1400" b="1" dirty="0">
-                <a:solidFill>
-                  <a:schemeClr val="bg1"/>
-                </a:solidFill>
-              </a:rPr>
-              <a:t>3</a:t>
-            </a:r>
-            <a:endParaRPr lang="en-US" sz="1400" dirty="0"/>
-          </a:p>
-        </p:txBody>
-      </p:sp>
-      <p:sp>
-        <p:nvSpPr>
-          <p:cNvPr id="16" name="Plan head 3"/>
+            <a:pPr indent="0" marL="0">
+              <a:buNone/>
+            </a:pPr>
+            <a:r>
+              <a:rPr lang="en-US" sz="1300" b="1" dirty="0">
+                <a:solidFill>
+                  <a:schemeClr val="tx2"/>
+                </a:solidFill>
+              </a:rPr>
+              <a:t>Medición con GHL</a:t>
+            </a:r>
+            <a:endParaRPr lang="en-US" sz="1300" dirty="0"/>
+          </a:p>
+        </p:txBody>
+      </p:sp>
+      <p:sp>
+        <p:nvSpPr>
+          <p:cNvPr id="15" name="Conclusion body 1.3"/>
           <p:cNvSpPr txBox="1"/>
           <p:nvPr/>
         </p:nvSpPr>
         <p:spPr>
           <a:xfrm>
-            <a:off x="6300216" y="1965960"/>
-            <a:ext cx="2194560" cy="548640"/>
+            <a:off x="914400" y="3392424"/>
+            <a:ext cx="3474720" cy="329184"/>
           </a:xfrm>
           <a:prstGeom prst="rect">
             <a:avLst/>
@@ -4060,30 +4299,278 @@
               <a:buNone/>
             </a:pPr>
             <a:r>
-              <a:rPr lang="en-US" sz="1700" b="1" dirty="0">
+              <a:rPr lang="en-US" sz="1100" dirty="0">
+                <a:solidFill>
+                  <a:schemeClr val="tx1"/>
+                </a:solidFill>
+              </a:rPr>
+              <a:t>KPI de calidad por anuncio; reemplaza al evento Lead de Meta.</a:t>
+            </a:r>
+            <a:endParaRPr lang="en-US" sz="1100" dirty="0"/>
+          </a:p>
+        </p:txBody>
+      </p:sp>
+      <p:sp>
+        <p:nvSpPr>
+          <p:cNvPr id="16" name="Conclusion card 1.4"/>
+          <p:cNvSpPr/>
+          <p:nvPr/>
+        </p:nvSpPr>
+        <p:spPr>
+          <a:xfrm>
+            <a:off x="457200" y="3840480"/>
+            <a:ext cx="4023360" cy="685800"/>
+          </a:xfrm>
+          <a:prstGeom prst="roundRect">
+            <a:avLst>
+              <a:gd name="adj" fmla="val 16000"/>
+            </a:avLst>
+          </a:prstGeom>
+          <a:solidFill>
+            <a:schemeClr val="bg2"/>
+          </a:solidFill>
+          <a:ln w="12700">
+            <a:solidFill>
+              <a:schemeClr val="bg2"/>
+            </a:solidFill>
+            <a:prstDash val="solid"/>
+          </a:ln>
+        </p:spPr>
+      </p:sp>
+      <p:sp>
+        <p:nvSpPr>
+          <p:cNvPr id="17" name="Conclusion dot 1.4"/>
+          <p:cNvSpPr/>
+          <p:nvPr/>
+        </p:nvSpPr>
+        <p:spPr>
+          <a:xfrm>
+            <a:off x="594360" y="4087368"/>
+            <a:ext cx="182880" cy="182880"/>
+          </a:xfrm>
+          <a:prstGeom prst="ellipse">
+            <a:avLst/>
+          </a:prstGeom>
+          <a:solidFill>
+            <a:schemeClr val="accent4"/>
+          </a:solidFill>
+          <a:ln w="12700">
+            <a:solidFill>
+              <a:schemeClr val="accent4"/>
+            </a:solidFill>
+            <a:prstDash val="solid"/>
+          </a:ln>
+        </p:spPr>
+      </p:sp>
+      <p:sp>
+        <p:nvSpPr>
+          <p:cNvPr id="18" name="Conclusion title 1.4"/>
+          <p:cNvSpPr txBox="1"/>
+          <p:nvPr/>
+        </p:nvSpPr>
+        <p:spPr>
+          <a:xfrm>
+            <a:off x="914400" y="3895344"/>
+            <a:ext cx="3474720" cy="274320"/>
+          </a:xfrm>
+          <a:prstGeom prst="rect">
+            <a:avLst/>
+          </a:prstGeom>
+          <a:noFill/>
+          <a:ln/>
+        </p:spPr>
+        <p:txBody>
+          <a:bodyPr wrap="square" lIns="0" tIns="0" rIns="0" bIns="0" rtlCol="0" anchor="ctr"/>
+          <a:lstStyle/>
+          <a:p>
+            <a:pPr indent="0" marL="0">
+              <a:buNone/>
+            </a:pPr>
+            <a:r>
+              <a:rPr lang="en-US" sz="1300" b="1" dirty="0">
                 <a:solidFill>
                   <a:schemeClr val="tx2"/>
+                </a:solidFill>
+              </a:rPr>
+              <a:t>Segmentación estricta</a:t>
+            </a:r>
+            <a:endParaRPr lang="en-US" sz="1300" dirty="0"/>
+          </a:p>
+        </p:txBody>
+      </p:sp>
+      <p:sp>
+        <p:nvSpPr>
+          <p:cNvPr id="19" name="Conclusion body 1.4"/>
+          <p:cNvSpPr txBox="1"/>
+          <p:nvPr/>
+        </p:nvSpPr>
+        <p:spPr>
+          <a:xfrm>
+            <a:off x="914400" y="4169664"/>
+            <a:ext cx="3474720" cy="329184"/>
+          </a:xfrm>
+          <a:prstGeom prst="rect">
+            <a:avLst/>
+          </a:prstGeom>
+          <a:noFill/>
+          <a:ln/>
+        </p:spPr>
+        <p:txBody>
+          <a:bodyPr wrap="square" lIns="0" tIns="0" rIns="0" bIns="0" rtlCol="0" anchor="t"/>
+          <a:lstStyle/>
+          <a:p>
+            <a:pPr indent="0" marL="0">
+              <a:buNone/>
+            </a:pPr>
+            <a:r>
+              <a:rPr lang="en-US" sz="1100" dirty="0">
+                <a:solidFill>
+                  <a:schemeClr val="tx1"/>
+                </a:solidFill>
+              </a:rPr>
+              <a:t>30–65, residentes en EE. UU., sin expansión de Advantage+.</a:t>
+            </a:r>
+            <a:endParaRPr lang="en-US" sz="1100" dirty="0"/>
+          </a:p>
+        </p:txBody>
+      </p:sp>
+      <p:sp>
+        <p:nvSpPr>
+          <p:cNvPr id="20" name="Conclusion head 2"/>
+          <p:cNvSpPr txBox="1"/>
+          <p:nvPr/>
+        </p:nvSpPr>
+        <p:spPr>
+          <a:xfrm>
+            <a:off x="4663440" y="1051560"/>
+            <a:ext cx="4023360" cy="365760"/>
+          </a:xfrm>
+          <a:prstGeom prst="rect">
+            <a:avLst/>
+          </a:prstGeom>
+          <a:noFill/>
+          <a:ln/>
+        </p:spPr>
+        <p:txBody>
+          <a:bodyPr wrap="square" lIns="0" tIns="0" rIns="0" bIns="0" rtlCol="0" anchor="ctr"/>
+          <a:lstStyle/>
+          <a:p>
+            <a:pPr indent="0" marL="0">
+              <a:buNone/>
+            </a:pPr>
+            <a:r>
+              <a:rPr lang="en-US" sz="1800" b="1" dirty="0">
+                <a:solidFill>
+                  <a:schemeClr val="accent5"/>
                 </a:solidFill>
                 <a:latin typeface="Cambria" pitchFamily="34" charset="0"/>
                 <a:ea typeface="Cambria" pitchFamily="34" charset="-122"/>
                 <a:cs typeface="Cambria" pitchFamily="34" charset="-120"/>
               </a:rPr>
-              <a:t>Nuevos creativos</a:t>
-            </a:r>
-            <a:endParaRPr lang="en-US" sz="1700" dirty="0"/>
-          </a:p>
-        </p:txBody>
-      </p:sp>
-      <p:sp>
-        <p:nvSpPr>
-          <p:cNvPr id="17" name="Plan body 3"/>
+              <a:t>No funciona</a:t>
+            </a:r>
+            <a:endParaRPr lang="en-US" sz="1800" dirty="0"/>
+          </a:p>
+        </p:txBody>
+      </p:sp>
+      <p:sp>
+        <p:nvSpPr>
+          <p:cNvPr id="21" name="Conclusion card 2.1"/>
+          <p:cNvSpPr/>
+          <p:nvPr/>
+        </p:nvSpPr>
+        <p:spPr>
+          <a:xfrm>
+            <a:off x="4663440" y="1508760"/>
+            <a:ext cx="4023360" cy="685800"/>
+          </a:xfrm>
+          <a:prstGeom prst="roundRect">
+            <a:avLst>
+              <a:gd name="adj" fmla="val 16000"/>
+            </a:avLst>
+          </a:prstGeom>
+          <a:solidFill>
+            <a:schemeClr val="bg2"/>
+          </a:solidFill>
+          <a:ln w="12700">
+            <a:solidFill>
+              <a:schemeClr val="bg2"/>
+            </a:solidFill>
+            <a:prstDash val="solid"/>
+          </a:ln>
+        </p:spPr>
+      </p:sp>
+      <p:sp>
+        <p:nvSpPr>
+          <p:cNvPr id="22" name="Conclusion dot 2.1"/>
+          <p:cNvSpPr/>
+          <p:nvPr/>
+        </p:nvSpPr>
+        <p:spPr>
+          <a:xfrm>
+            <a:off x="4800600" y="1755648"/>
+            <a:ext cx="182880" cy="182880"/>
+          </a:xfrm>
+          <a:prstGeom prst="ellipse">
+            <a:avLst/>
+          </a:prstGeom>
+          <a:solidFill>
+            <a:schemeClr val="accent5"/>
+          </a:solidFill>
+          <a:ln w="12700">
+            <a:solidFill>
+              <a:schemeClr val="accent5"/>
+            </a:solidFill>
+            <a:prstDash val="solid"/>
+          </a:ln>
+        </p:spPr>
+      </p:sp>
+      <p:sp>
+        <p:nvSpPr>
+          <p:cNvPr id="23" name="Conclusion title 2.1"/>
           <p:cNvSpPr txBox="1"/>
           <p:nvPr/>
         </p:nvSpPr>
         <p:spPr>
           <a:xfrm>
-            <a:off x="6300216" y="2560320"/>
-            <a:ext cx="2194560" cy="1463040"/>
+            <a:off x="5120640" y="1563624"/>
+            <a:ext cx="3474720" cy="274320"/>
+          </a:xfrm>
+          <a:prstGeom prst="rect">
+            <a:avLst/>
+          </a:prstGeom>
+          <a:noFill/>
+          <a:ln/>
+        </p:spPr>
+        <p:txBody>
+          <a:bodyPr wrap="square" lIns="0" tIns="0" rIns="0" bIns="0" rtlCol="0" anchor="ctr"/>
+          <a:lstStyle/>
+          <a:p>
+            <a:pPr indent="0" marL="0">
+              <a:buNone/>
+            </a:pPr>
+            <a:r>
+              <a:rPr lang="en-US" sz="1300" b="1" dirty="0">
+                <a:solidFill>
+                  <a:schemeClr val="tx2"/>
+                </a:solidFill>
+              </a:rPr>
+              <a:t>Estáticos genéricos de "VA"</a:t>
+            </a:r>
+            <a:endParaRPr lang="en-US" sz="1300" dirty="0"/>
+          </a:p>
+        </p:txBody>
+      </p:sp>
+      <p:sp>
+        <p:nvSpPr>
+          <p:cNvPr id="24" name="Conclusion body 2.1"/>
+          <p:cNvSpPr txBox="1"/>
+          <p:nvPr/>
+        </p:nvSpPr>
+        <p:spPr>
+          <a:xfrm>
+            <a:off x="5120640" y="1837944"/>
+            <a:ext cx="3474720" cy="329184"/>
           </a:xfrm>
           <a:prstGeom prst="rect">
             <a:avLst/>
@@ -4099,14 +4586,386 @@
               <a:buNone/>
             </a:pPr>
             <a:r>
-              <a:rPr lang="en-US" sz="1300" dirty="0">
+              <a:rPr lang="en-US" sz="1100" dirty="0">
                 <a:solidFill>
                   <a:schemeClr val="tx1"/>
                 </a:solidFill>
               </a:rPr>
-              <a:t>Texto en imagen dirigido al comprador ("For Law Firm Owners"). V2: reemplazar "19 jobs" por "19 roles".</a:t>
+              <a:t>S3: 45% del gasto total, 0 leads calificados.</a:t>
+            </a:r>
+            <a:endParaRPr lang="en-US" sz="1100" dirty="0"/>
+          </a:p>
+        </p:txBody>
+      </p:sp>
+      <p:sp>
+        <p:nvSpPr>
+          <p:cNvPr id="25" name="Conclusion card 2.2"/>
+          <p:cNvSpPr/>
+          <p:nvPr/>
+        </p:nvSpPr>
+        <p:spPr>
+          <a:xfrm>
+            <a:off x="4663440" y="2286000"/>
+            <a:ext cx="4023360" cy="685800"/>
+          </a:xfrm>
+          <a:prstGeom prst="roundRect">
+            <a:avLst>
+              <a:gd name="adj" fmla="val 16000"/>
+            </a:avLst>
+          </a:prstGeom>
+          <a:solidFill>
+            <a:schemeClr val="bg2"/>
+          </a:solidFill>
+          <a:ln w="12700">
+            <a:solidFill>
+              <a:schemeClr val="bg2"/>
+            </a:solidFill>
+            <a:prstDash val="solid"/>
+          </a:ln>
+        </p:spPr>
+      </p:sp>
+      <p:sp>
+        <p:nvSpPr>
+          <p:cNvPr id="26" name="Conclusion dot 2.2"/>
+          <p:cNvSpPr/>
+          <p:nvPr/>
+        </p:nvSpPr>
+        <p:spPr>
+          <a:xfrm>
+            <a:off x="4800600" y="2532888"/>
+            <a:ext cx="182880" cy="182880"/>
+          </a:xfrm>
+          <a:prstGeom prst="ellipse">
+            <a:avLst/>
+          </a:prstGeom>
+          <a:solidFill>
+            <a:schemeClr val="accent5"/>
+          </a:solidFill>
+          <a:ln w="12700">
+            <a:solidFill>
+              <a:schemeClr val="accent5"/>
+            </a:solidFill>
+            <a:prstDash val="solid"/>
+          </a:ln>
+        </p:spPr>
+      </p:sp>
+      <p:sp>
+        <p:nvSpPr>
+          <p:cNvPr id="27" name="Conclusion title 2.2"/>
+          <p:cNvSpPr txBox="1"/>
+          <p:nvPr/>
+        </p:nvSpPr>
+        <p:spPr>
+          <a:xfrm>
+            <a:off x="5120640" y="2340864"/>
+            <a:ext cx="3474720" cy="274320"/>
+          </a:xfrm>
+          <a:prstGeom prst="rect">
+            <a:avLst/>
+          </a:prstGeom>
+          <a:noFill/>
+          <a:ln/>
+        </p:spPr>
+        <p:txBody>
+          <a:bodyPr wrap="square" lIns="0" tIns="0" rIns="0" bIns="0" rtlCol="0" anchor="ctr"/>
+          <a:lstStyle/>
+          <a:p>
+            <a:pPr indent="0" marL="0">
+              <a:buNone/>
+            </a:pPr>
+            <a:r>
+              <a:rPr lang="en-US" sz="1300" b="1" dirty="0">
+                <a:solidFill>
+                  <a:schemeClr val="tx2"/>
+                </a:solidFill>
+              </a:rPr>
+              <a:t>Optimización por evento Lead</a:t>
             </a:r>
             <a:endParaRPr lang="en-US" sz="1300" dirty="0"/>
+          </a:p>
+        </p:txBody>
+      </p:sp>
+      <p:sp>
+        <p:nvSpPr>
+          <p:cNvPr id="28" name="Conclusion body 2.2"/>
+          <p:cNvSpPr txBox="1"/>
+          <p:nvPr/>
+        </p:nvSpPr>
+        <p:spPr>
+          <a:xfrm>
+            <a:off x="5120640" y="2615184"/>
+            <a:ext cx="3474720" cy="329184"/>
+          </a:xfrm>
+          <a:prstGeom prst="rect">
+            <a:avLst/>
+          </a:prstGeom>
+          <a:noFill/>
+          <a:ln/>
+        </p:spPr>
+        <p:txBody>
+          <a:bodyPr wrap="square" lIns="0" tIns="0" rIns="0" bIns="0" rtlCol="0" anchor="t"/>
+          <a:lstStyle/>
+          <a:p>
+            <a:pPr indent="0" marL="0">
+              <a:buNone/>
+            </a:pPr>
+            <a:r>
+              <a:rPr lang="en-US" sz="1100" dirty="0">
+                <a:solidFill>
+                  <a:schemeClr val="tx1"/>
+                </a:solidFill>
+              </a:rPr>
+              <a:t>Meta optimiza hacia quien completa el formulario, calificado o no.</a:t>
+            </a:r>
+            <a:endParaRPr lang="en-US" sz="1100" dirty="0"/>
+          </a:p>
+        </p:txBody>
+      </p:sp>
+      <p:sp>
+        <p:nvSpPr>
+          <p:cNvPr id="29" name="Conclusion card 2.3"/>
+          <p:cNvSpPr/>
+          <p:nvPr/>
+        </p:nvSpPr>
+        <p:spPr>
+          <a:xfrm>
+            <a:off x="4663440" y="3063240"/>
+            <a:ext cx="4023360" cy="685800"/>
+          </a:xfrm>
+          <a:prstGeom prst="roundRect">
+            <a:avLst>
+              <a:gd name="adj" fmla="val 16000"/>
+            </a:avLst>
+          </a:prstGeom>
+          <a:solidFill>
+            <a:schemeClr val="bg2"/>
+          </a:solidFill>
+          <a:ln w="12700">
+            <a:solidFill>
+              <a:schemeClr val="bg2"/>
+            </a:solidFill>
+            <a:prstDash val="solid"/>
+          </a:ln>
+        </p:spPr>
+      </p:sp>
+      <p:sp>
+        <p:nvSpPr>
+          <p:cNvPr id="30" name="Conclusion dot 2.3"/>
+          <p:cNvSpPr/>
+          <p:nvPr/>
+        </p:nvSpPr>
+        <p:spPr>
+          <a:xfrm>
+            <a:off x="4800600" y="3310128"/>
+            <a:ext cx="182880" cy="182880"/>
+          </a:xfrm>
+          <a:prstGeom prst="ellipse">
+            <a:avLst/>
+          </a:prstGeom>
+          <a:solidFill>
+            <a:schemeClr val="accent5"/>
+          </a:solidFill>
+          <a:ln w="12700">
+            <a:solidFill>
+              <a:schemeClr val="accent5"/>
+            </a:solidFill>
+            <a:prstDash val="solid"/>
+          </a:ln>
+        </p:spPr>
+      </p:sp>
+      <p:sp>
+        <p:nvSpPr>
+          <p:cNvPr id="31" name="Conclusion title 2.3"/>
+          <p:cNvSpPr txBox="1"/>
+          <p:nvPr/>
+        </p:nvSpPr>
+        <p:spPr>
+          <a:xfrm>
+            <a:off x="5120640" y="3118104"/>
+            <a:ext cx="3474720" cy="274320"/>
+          </a:xfrm>
+          <a:prstGeom prst="rect">
+            <a:avLst/>
+          </a:prstGeom>
+          <a:noFill/>
+          <a:ln/>
+        </p:spPr>
+        <p:txBody>
+          <a:bodyPr wrap="square" lIns="0" tIns="0" rIns="0" bIns="0" rtlCol="0" anchor="ctr"/>
+          <a:lstStyle/>
+          <a:p>
+            <a:pPr indent="0" marL="0">
+              <a:buNone/>
+            </a:pPr>
+            <a:r>
+              <a:rPr lang="en-US" sz="1300" b="1" dirty="0">
+                <a:solidFill>
+                  <a:schemeClr val="tx2"/>
+                </a:solidFill>
+              </a:rPr>
+              <a:t>Volumen creativo insuficiente</a:t>
+            </a:r>
+            <a:endParaRPr lang="en-US" sz="1300" dirty="0"/>
+          </a:p>
+        </p:txBody>
+      </p:sp>
+      <p:sp>
+        <p:nvSpPr>
+          <p:cNvPr id="32" name="Conclusion body 2.3"/>
+          <p:cNvSpPr txBox="1"/>
+          <p:nvPr/>
+        </p:nvSpPr>
+        <p:spPr>
+          <a:xfrm>
+            <a:off x="5120640" y="3392424"/>
+            <a:ext cx="3474720" cy="329184"/>
+          </a:xfrm>
+          <a:prstGeom prst="rect">
+            <a:avLst/>
+          </a:prstGeom>
+          <a:noFill/>
+          <a:ln/>
+        </p:spPr>
+        <p:txBody>
+          <a:bodyPr wrap="square" lIns="0" tIns="0" rIns="0" bIns="0" rtlCol="0" anchor="t"/>
+          <a:lstStyle/>
+          <a:p>
+            <a:pPr indent="0" marL="0">
+              <a:buNone/>
+            </a:pPr>
+            <a:r>
+              <a:rPr lang="en-US" sz="1100" dirty="0">
+                <a:solidFill>
+                  <a:schemeClr val="tx1"/>
+                </a:solidFill>
+              </a:rPr>
+              <a:t>3 creativos activos y 2 segmentos: sin margen para Andromeda.</a:t>
+            </a:r>
+            <a:endParaRPr lang="en-US" sz="1100" dirty="0"/>
+          </a:p>
+        </p:txBody>
+      </p:sp>
+      <p:sp>
+        <p:nvSpPr>
+          <p:cNvPr id="33" name="Conclusion card 2.4"/>
+          <p:cNvSpPr/>
+          <p:nvPr/>
+        </p:nvSpPr>
+        <p:spPr>
+          <a:xfrm>
+            <a:off x="4663440" y="3840480"/>
+            <a:ext cx="4023360" cy="685800"/>
+          </a:xfrm>
+          <a:prstGeom prst="roundRect">
+            <a:avLst>
+              <a:gd name="adj" fmla="val 16000"/>
+            </a:avLst>
+          </a:prstGeom>
+          <a:solidFill>
+            <a:schemeClr val="bg2"/>
+          </a:solidFill>
+          <a:ln w="12700">
+            <a:solidFill>
+              <a:schemeClr val="bg2"/>
+            </a:solidFill>
+            <a:prstDash val="solid"/>
+          </a:ln>
+        </p:spPr>
+      </p:sp>
+      <p:sp>
+        <p:nvSpPr>
+          <p:cNvPr id="34" name="Conclusion dot 2.4"/>
+          <p:cNvSpPr/>
+          <p:nvPr/>
+        </p:nvSpPr>
+        <p:spPr>
+          <a:xfrm>
+            <a:off x="4800600" y="4087368"/>
+            <a:ext cx="182880" cy="182880"/>
+          </a:xfrm>
+          <a:prstGeom prst="ellipse">
+            <a:avLst/>
+          </a:prstGeom>
+          <a:solidFill>
+            <a:schemeClr val="accent5"/>
+          </a:solidFill>
+          <a:ln w="12700">
+            <a:solidFill>
+              <a:schemeClr val="accent5"/>
+            </a:solidFill>
+            <a:prstDash val="solid"/>
+          </a:ln>
+        </p:spPr>
+      </p:sp>
+      <p:sp>
+        <p:nvSpPr>
+          <p:cNvPr id="35" name="Conclusion title 2.4"/>
+          <p:cNvSpPr txBox="1"/>
+          <p:nvPr/>
+        </p:nvSpPr>
+        <p:spPr>
+          <a:xfrm>
+            <a:off x="5120640" y="3895344"/>
+            <a:ext cx="3474720" cy="274320"/>
+          </a:xfrm>
+          <a:prstGeom prst="rect">
+            <a:avLst/>
+          </a:prstGeom>
+          <a:noFill/>
+          <a:ln/>
+        </p:spPr>
+        <p:txBody>
+          <a:bodyPr wrap="square" lIns="0" tIns="0" rIns="0" bIns="0" rtlCol="0" anchor="ctr"/>
+          <a:lstStyle/>
+          <a:p>
+            <a:pPr indent="0" marL="0">
+              <a:buNone/>
+            </a:pPr>
+            <a:r>
+              <a:rPr lang="en-US" sz="1300" b="1" dirty="0">
+                <a:solidFill>
+                  <a:schemeClr val="tx2"/>
+                </a:solidFill>
+              </a:rPr>
+              <a:t>Conversión de landing</a:t>
+            </a:r>
+            <a:endParaRPr lang="en-US" sz="1300" dirty="0"/>
+          </a:p>
+        </p:txBody>
+      </p:sp>
+      <p:sp>
+        <p:nvSpPr>
+          <p:cNvPr id="36" name="Conclusion body 2.4"/>
+          <p:cNvSpPr txBox="1"/>
+          <p:nvPr/>
+        </p:nvSpPr>
+        <p:spPr>
+          <a:xfrm>
+            <a:off x="5120640" y="4169664"/>
+            <a:ext cx="3474720" cy="329184"/>
+          </a:xfrm>
+          <a:prstGeom prst="rect">
+            <a:avLst/>
+          </a:prstGeom>
+          <a:noFill/>
+          <a:ln/>
+        </p:spPr>
+        <p:txBody>
+          <a:bodyPr wrap="square" lIns="0" tIns="0" rIns="0" bIns="0" rtlCol="0" anchor="t"/>
+          <a:lstStyle/>
+          <a:p>
+            <a:pPr indent="0" marL="0">
+              <a:buNone/>
+            </a:pPr>
+            <a:r>
+              <a:rPr lang="en-US" sz="1100" dirty="0">
+                <a:solidFill>
+                  <a:schemeClr val="tx1"/>
+                </a:solidFill>
+              </a:rPr>
+              <a:t>2.2% de landing page views a lead. Cambios manuales sin registro (11 oct).</a:t>
+            </a:r>
+            <a:endParaRPr lang="en-US" sz="1100" dirty="0"/>
           </a:p>
         </p:txBody>
       </p:sp>
@@ -4209,6 +5068,3534 @@
             <a:r>
               <a:rPr lang="en-US" sz="3000" b="1" dirty="0">
                 <a:solidFill>
+                  <a:schemeClr val="tx2"/>
+                </a:solidFill>
+              </a:rPr>
+              <a:t>Andromeda: el creativo define la audiencia</a:t>
+            </a:r>
+            <a:endParaRPr lang="en-US" sz="3000" dirty="0"/>
+          </a:p>
+        </p:txBody>
+      </p:sp>
+      <p:sp>
+        <p:nvSpPr>
+          <p:cNvPr id="3" name="Andromeda dot 1"/>
+          <p:cNvSpPr/>
+          <p:nvPr/>
+        </p:nvSpPr>
+        <p:spPr>
+          <a:xfrm>
+            <a:off x="457200" y="1115568"/>
+            <a:ext cx="384048" cy="384048"/>
+          </a:xfrm>
+          <a:prstGeom prst="ellipse">
+            <a:avLst/>
+          </a:prstGeom>
+          <a:solidFill>
+            <a:schemeClr val="accent1"/>
+          </a:solidFill>
+          <a:ln w="12700">
+            <a:solidFill>
+              <a:schemeClr val="accent1"/>
+            </a:solidFill>
+            <a:prstDash val="solid"/>
+          </a:ln>
+        </p:spPr>
+      </p:sp>
+      <p:sp>
+        <p:nvSpPr>
+          <p:cNvPr id="4" name="Andromeda dot 1 label"/>
+          <p:cNvSpPr txBox="1"/>
+          <p:nvPr/>
+        </p:nvSpPr>
+        <p:spPr>
+          <a:xfrm>
+            <a:off x="457200" y="1115568"/>
+            <a:ext cx="384048" cy="384048"/>
+          </a:xfrm>
+          <a:prstGeom prst="rect">
+            <a:avLst/>
+          </a:prstGeom>
+          <a:noFill/>
+          <a:ln/>
+        </p:spPr>
+        <p:txBody>
+          <a:bodyPr wrap="square" lIns="0" tIns="0" rIns="0" bIns="0" rtlCol="0" anchor="ctr"/>
+          <a:lstStyle/>
+          <a:p>
+            <a:pPr algn="ctr" indent="0" marL="0">
+              <a:buNone/>
+            </a:pPr>
+            <a:r>
+              <a:rPr lang="en-US" sz="1400" b="1" dirty="0">
+                <a:solidFill>
+                  <a:schemeClr val="tx2"/>
+                </a:solidFill>
+              </a:rPr>
+              <a:t>1</a:t>
+            </a:r>
+            <a:endParaRPr lang="en-US" sz="1400" dirty="0"/>
+          </a:p>
+        </p:txBody>
+      </p:sp>
+      <p:sp>
+        <p:nvSpPr>
+          <p:cNvPr id="5" name="Andromeda head 1"/>
+          <p:cNvSpPr txBox="1"/>
+          <p:nvPr/>
+        </p:nvSpPr>
+        <p:spPr>
+          <a:xfrm>
+            <a:off x="1005840" y="1097280"/>
+            <a:ext cx="4480560" cy="365760"/>
+          </a:xfrm>
+          <a:prstGeom prst="rect">
+            <a:avLst/>
+          </a:prstGeom>
+          <a:noFill/>
+          <a:ln/>
+        </p:spPr>
+        <p:txBody>
+          <a:bodyPr wrap="square" lIns="0" tIns="0" rIns="0" bIns="0" rtlCol="0" anchor="ctr"/>
+          <a:lstStyle/>
+          <a:p>
+            <a:pPr indent="0" marL="0">
+              <a:buNone/>
+            </a:pPr>
+            <a:r>
+              <a:rPr lang="en-US" sz="1600" b="1" dirty="0">
+                <a:solidFill>
+                  <a:schemeClr val="tx2"/>
+                </a:solidFill>
+              </a:rPr>
+              <a:t>Selección por creativo</a:t>
+            </a:r>
+            <a:endParaRPr lang="en-US" sz="1600" dirty="0"/>
+          </a:p>
+        </p:txBody>
+      </p:sp>
+      <p:sp>
+        <p:nvSpPr>
+          <p:cNvPr id="6" name="Andromeda body 1"/>
+          <p:cNvSpPr txBox="1"/>
+          <p:nvPr/>
+        </p:nvSpPr>
+        <p:spPr>
+          <a:xfrm>
+            <a:off x="1005840" y="1463040"/>
+            <a:ext cx="4480560" cy="594360"/>
+          </a:xfrm>
+          <a:prstGeom prst="rect">
+            <a:avLst/>
+          </a:prstGeom>
+          <a:noFill/>
+          <a:ln/>
+        </p:spPr>
+        <p:txBody>
+          <a:bodyPr wrap="square" lIns="0" tIns="0" rIns="0" bIns="0" rtlCol="0" anchor="t"/>
+          <a:lstStyle/>
+          <a:p>
+            <a:pPr indent="0" marL="0">
+              <a:buNone/>
+            </a:pPr>
+            <a:r>
+              <a:rPr lang="en-US" sz="1200" dirty="0">
+                <a:solidFill>
+                  <a:schemeClr val="tx1"/>
+                </a:solidFill>
+              </a:rPr>
+              <a:t>Andromeda, el sistema de recuperación de anuncios de Meta, decide a quién mostrar cada anuncio según su contenido: texto, imagen y audio.</a:t>
+            </a:r>
+            <a:endParaRPr lang="en-US" sz="1200" dirty="0"/>
+          </a:p>
+        </p:txBody>
+      </p:sp>
+      <p:sp>
+        <p:nvSpPr>
+          <p:cNvPr id="7" name="Andromeda dot 2"/>
+          <p:cNvSpPr/>
+          <p:nvPr/>
+        </p:nvSpPr>
+        <p:spPr>
+          <a:xfrm>
+            <a:off x="457200" y="2139696"/>
+            <a:ext cx="384048" cy="384048"/>
+          </a:xfrm>
+          <a:prstGeom prst="ellipse">
+            <a:avLst/>
+          </a:prstGeom>
+          <a:solidFill>
+            <a:schemeClr val="accent1"/>
+          </a:solidFill>
+          <a:ln w="12700">
+            <a:solidFill>
+              <a:schemeClr val="accent1"/>
+            </a:solidFill>
+            <a:prstDash val="solid"/>
+          </a:ln>
+        </p:spPr>
+      </p:sp>
+      <p:sp>
+        <p:nvSpPr>
+          <p:cNvPr id="8" name="Andromeda dot 2 label"/>
+          <p:cNvSpPr txBox="1"/>
+          <p:nvPr/>
+        </p:nvSpPr>
+        <p:spPr>
+          <a:xfrm>
+            <a:off x="457200" y="2139696"/>
+            <a:ext cx="384048" cy="384048"/>
+          </a:xfrm>
+          <a:prstGeom prst="rect">
+            <a:avLst/>
+          </a:prstGeom>
+          <a:noFill/>
+          <a:ln/>
+        </p:spPr>
+        <p:txBody>
+          <a:bodyPr wrap="square" lIns="0" tIns="0" rIns="0" bIns="0" rtlCol="0" anchor="ctr"/>
+          <a:lstStyle/>
+          <a:p>
+            <a:pPr algn="ctr" indent="0" marL="0">
+              <a:buNone/>
+            </a:pPr>
+            <a:r>
+              <a:rPr lang="en-US" sz="1400" b="1" dirty="0">
+                <a:solidFill>
+                  <a:schemeClr val="tx2"/>
+                </a:solidFill>
+              </a:rPr>
+              <a:t>2</a:t>
+            </a:r>
+            <a:endParaRPr lang="en-US" sz="1400" dirty="0"/>
+          </a:p>
+        </p:txBody>
+      </p:sp>
+      <p:sp>
+        <p:nvSpPr>
+          <p:cNvPr id="9" name="Andromeda head 2"/>
+          <p:cNvSpPr txBox="1"/>
+          <p:nvPr/>
+        </p:nvSpPr>
+        <p:spPr>
+          <a:xfrm>
+            <a:off x="1005840" y="2121408"/>
+            <a:ext cx="4480560" cy="365760"/>
+          </a:xfrm>
+          <a:prstGeom prst="rect">
+            <a:avLst/>
+          </a:prstGeom>
+          <a:noFill/>
+          <a:ln/>
+        </p:spPr>
+        <p:txBody>
+          <a:bodyPr wrap="square" lIns="0" tIns="0" rIns="0" bIns="0" rtlCol="0" anchor="ctr"/>
+          <a:lstStyle/>
+          <a:p>
+            <a:pPr indent="0" marL="0">
+              <a:buNone/>
+            </a:pPr>
+            <a:r>
+              <a:rPr lang="en-US" sz="1600" b="1" dirty="0">
+                <a:solidFill>
+                  <a:schemeClr val="tx2"/>
+                </a:solidFill>
+              </a:rPr>
+              <a:t>Agrupación de similares</a:t>
+            </a:r>
+            <a:endParaRPr lang="en-US" sz="1600" dirty="0"/>
+          </a:p>
+        </p:txBody>
+      </p:sp>
+      <p:sp>
+        <p:nvSpPr>
+          <p:cNvPr id="10" name="Andromeda body 2"/>
+          <p:cNvSpPr txBox="1"/>
+          <p:nvPr/>
+        </p:nvSpPr>
+        <p:spPr>
+          <a:xfrm>
+            <a:off x="1005840" y="2487168"/>
+            <a:ext cx="4480560" cy="594360"/>
+          </a:xfrm>
+          <a:prstGeom prst="rect">
+            <a:avLst/>
+          </a:prstGeom>
+          <a:noFill/>
+          <a:ln/>
+        </p:spPr>
+        <p:txBody>
+          <a:bodyPr wrap="square" lIns="0" tIns="0" rIns="0" bIns="0" rtlCol="0" anchor="t"/>
+          <a:lstStyle/>
+          <a:p>
+            <a:pPr indent="0" marL="0">
+              <a:buNone/>
+            </a:pPr>
+            <a:r>
+              <a:rPr lang="en-US" sz="1200" dirty="0">
+                <a:solidFill>
+                  <a:schemeClr val="tx1"/>
+                </a:solidFill>
+              </a:rPr>
+              <a:t>Creativos parecidos se agrupan y compiten como uno solo. Variaciones menores no amplían el alcance.</a:t>
+            </a:r>
+            <a:endParaRPr lang="en-US" sz="1200" dirty="0"/>
+          </a:p>
+        </p:txBody>
+      </p:sp>
+      <p:sp>
+        <p:nvSpPr>
+          <p:cNvPr id="11" name="Andromeda dot 3"/>
+          <p:cNvSpPr/>
+          <p:nvPr/>
+        </p:nvSpPr>
+        <p:spPr>
+          <a:xfrm>
+            <a:off x="457200" y="3163824"/>
+            <a:ext cx="384048" cy="384048"/>
+          </a:xfrm>
+          <a:prstGeom prst="ellipse">
+            <a:avLst/>
+          </a:prstGeom>
+          <a:solidFill>
+            <a:schemeClr val="accent1"/>
+          </a:solidFill>
+          <a:ln w="12700">
+            <a:solidFill>
+              <a:schemeClr val="accent1"/>
+            </a:solidFill>
+            <a:prstDash val="solid"/>
+          </a:ln>
+        </p:spPr>
+      </p:sp>
+      <p:sp>
+        <p:nvSpPr>
+          <p:cNvPr id="12" name="Andromeda dot 3 label"/>
+          <p:cNvSpPr txBox="1"/>
+          <p:nvPr/>
+        </p:nvSpPr>
+        <p:spPr>
+          <a:xfrm>
+            <a:off x="457200" y="3163824"/>
+            <a:ext cx="384048" cy="384048"/>
+          </a:xfrm>
+          <a:prstGeom prst="rect">
+            <a:avLst/>
+          </a:prstGeom>
+          <a:noFill/>
+          <a:ln/>
+        </p:spPr>
+        <p:txBody>
+          <a:bodyPr wrap="square" lIns="0" tIns="0" rIns="0" bIns="0" rtlCol="0" anchor="ctr"/>
+          <a:lstStyle/>
+          <a:p>
+            <a:pPr algn="ctr" indent="0" marL="0">
+              <a:buNone/>
+            </a:pPr>
+            <a:r>
+              <a:rPr lang="en-US" sz="1400" b="1" dirty="0">
+                <a:solidFill>
+                  <a:schemeClr val="tx2"/>
+                </a:solidFill>
+              </a:rPr>
+              <a:t>3</a:t>
+            </a:r>
+            <a:endParaRPr lang="en-US" sz="1400" dirty="0"/>
+          </a:p>
+        </p:txBody>
+      </p:sp>
+      <p:sp>
+        <p:nvSpPr>
+          <p:cNvPr id="13" name="Andromeda head 3"/>
+          <p:cNvSpPr txBox="1"/>
+          <p:nvPr/>
+        </p:nvSpPr>
+        <p:spPr>
+          <a:xfrm>
+            <a:off x="1005840" y="3145536"/>
+            <a:ext cx="4480560" cy="365760"/>
+          </a:xfrm>
+          <a:prstGeom prst="rect">
+            <a:avLst/>
+          </a:prstGeom>
+          <a:noFill/>
+          <a:ln/>
+        </p:spPr>
+        <p:txBody>
+          <a:bodyPr wrap="square" lIns="0" tIns="0" rIns="0" bIns="0" rtlCol="0" anchor="ctr"/>
+          <a:lstStyle/>
+          <a:p>
+            <a:pPr indent="0" marL="0">
+              <a:buNone/>
+            </a:pPr>
+            <a:r>
+              <a:rPr lang="en-US" sz="1600" b="1" dirty="0">
+                <a:solidFill>
+                  <a:schemeClr val="tx2"/>
+                </a:solidFill>
+              </a:rPr>
+              <a:t>Diversidad = exploración</a:t>
+            </a:r>
+            <a:endParaRPr lang="en-US" sz="1600" dirty="0"/>
+          </a:p>
+        </p:txBody>
+      </p:sp>
+      <p:sp>
+        <p:nvSpPr>
+          <p:cNvPr id="14" name="Andromeda body 3"/>
+          <p:cNvSpPr txBox="1"/>
+          <p:nvPr/>
+        </p:nvSpPr>
+        <p:spPr>
+          <a:xfrm>
+            <a:off x="1005840" y="3511296"/>
+            <a:ext cx="4480560" cy="594360"/>
+          </a:xfrm>
+          <a:prstGeom prst="rect">
+            <a:avLst/>
+          </a:prstGeom>
+          <a:noFill/>
+          <a:ln/>
+        </p:spPr>
+        <p:txBody>
+          <a:bodyPr wrap="square" lIns="0" tIns="0" rIns="0" bIns="0" rtlCol="0" anchor="t"/>
+          <a:lstStyle/>
+          <a:p>
+            <a:pPr indent="0" marL="0">
+              <a:buNone/>
+            </a:pPr>
+            <a:r>
+              <a:rPr lang="en-US" sz="1200" dirty="0">
+                <a:solidFill>
+                  <a:schemeClr val="tx1"/>
+                </a:solidFill>
+              </a:rPr>
+              <a:t>Cada concepto distinto abre un segmento nuevo. Con pocos conceptos, el sistema concentra el gasto en uno (caso S3).</a:t>
+            </a:r>
+            <a:endParaRPr lang="en-US" sz="1200" dirty="0"/>
+          </a:p>
+        </p:txBody>
+      </p:sp>
+      <p:sp>
+        <p:nvSpPr>
+          <p:cNvPr id="15" name="Creative gap card"/>
+          <p:cNvSpPr/>
+          <p:nvPr/>
+        </p:nvSpPr>
+        <p:spPr>
+          <a:xfrm>
+            <a:off x="5852160" y="1097280"/>
+            <a:ext cx="2834640" cy="3063240"/>
+          </a:xfrm>
+          <a:prstGeom prst="roundRect">
+            <a:avLst>
+              <a:gd name="adj" fmla="val 3871"/>
+            </a:avLst>
+          </a:prstGeom>
+          <a:solidFill>
+            <a:schemeClr val="tx2"/>
+          </a:solidFill>
+          <a:ln w="12700">
+            <a:solidFill>
+              <a:schemeClr val="tx2"/>
+            </a:solidFill>
+            <a:prstDash val="solid"/>
+          </a:ln>
+        </p:spPr>
+      </p:sp>
+      <p:sp>
+        <p:nvSpPr>
+          <p:cNvPr id="16" name="Gap label 1"/>
+          <p:cNvSpPr txBox="1"/>
+          <p:nvPr/>
+        </p:nvSpPr>
+        <p:spPr>
+          <a:xfrm>
+            <a:off x="6080760" y="1280160"/>
+            <a:ext cx="2377440" cy="274320"/>
+          </a:xfrm>
+          <a:prstGeom prst="rect">
+            <a:avLst/>
+          </a:prstGeom>
+          <a:noFill/>
+          <a:ln/>
+        </p:spPr>
+        <p:txBody>
+          <a:bodyPr wrap="square" lIns="0" tIns="0" rIns="0" bIns="0" rtlCol="0" anchor="ctr"/>
+          <a:lstStyle/>
+          <a:p>
+            <a:pPr indent="0" marL="0">
+              <a:buNone/>
+            </a:pPr>
+            <a:r>
+              <a:rPr lang="en-US" sz="1200" b="1" dirty="0">
+                <a:solidFill>
+                  <a:schemeClr val="accent1"/>
+                </a:solidFill>
+              </a:rPr>
+              <a:t>Situación actual</a:t>
+            </a:r>
+            <a:endParaRPr lang="en-US" sz="1200" dirty="0"/>
+          </a:p>
+        </p:txBody>
+      </p:sp>
+      <p:sp>
+        <p:nvSpPr>
+          <p:cNvPr id="17" name="Gap now"/>
+          <p:cNvSpPr txBox="1"/>
+          <p:nvPr/>
+        </p:nvSpPr>
+        <p:spPr>
+          <a:xfrm>
+            <a:off x="6080760" y="1554480"/>
+            <a:ext cx="2377440" cy="685800"/>
+          </a:xfrm>
+          <a:prstGeom prst="rect">
+            <a:avLst/>
+          </a:prstGeom>
+          <a:noFill/>
+          <a:ln/>
+        </p:spPr>
+        <p:txBody>
+          <a:bodyPr wrap="square" lIns="0" tIns="0" rIns="0" bIns="0" rtlCol="0" anchor="ctr"/>
+          <a:lstStyle/>
+          <a:p>
+            <a:pPr indent="0" marL="0">
+              <a:buNone/>
+            </a:pPr>
+            <a:r>
+              <a:rPr lang="en-US" sz="4800" b="1" dirty="0">
+                <a:solidFill>
+                  <a:schemeClr val="bg1"/>
+                </a:solidFill>
+                <a:latin typeface="Cambria" pitchFamily="34" charset="0"/>
+                <a:ea typeface="Cambria" pitchFamily="34" charset="-122"/>
+                <a:cs typeface="Cambria" pitchFamily="34" charset="-120"/>
+              </a:rPr>
+              <a:t>3</a:t>
+            </a:r>
+            <a:endParaRPr lang="en-US" sz="4800" dirty="0"/>
+          </a:p>
+        </p:txBody>
+      </p:sp>
+      <p:sp>
+        <p:nvSpPr>
+          <p:cNvPr id="18" name="Gap now label"/>
+          <p:cNvSpPr txBox="1"/>
+          <p:nvPr/>
+        </p:nvSpPr>
+        <p:spPr>
+          <a:xfrm>
+            <a:off x="6080760" y="2240280"/>
+            <a:ext cx="2377440" cy="274320"/>
+          </a:xfrm>
+          <a:prstGeom prst="rect">
+            <a:avLst/>
+          </a:prstGeom>
+          <a:noFill/>
+          <a:ln/>
+        </p:spPr>
+        <p:txBody>
+          <a:bodyPr wrap="square" lIns="0" tIns="0" rIns="0" bIns="0" rtlCol="0" anchor="ctr"/>
+          <a:lstStyle/>
+          <a:p>
+            <a:pPr indent="0" marL="0">
+              <a:buNone/>
+            </a:pPr>
+            <a:r>
+              <a:rPr lang="en-US" sz="1200" dirty="0">
+                <a:solidFill>
+                  <a:schemeClr val="bg1"/>
+                </a:solidFill>
+              </a:rPr>
+              <a:t>creativos activos · 2 segmentos</a:t>
+            </a:r>
+            <a:endParaRPr lang="en-US" sz="1200" dirty="0"/>
+          </a:p>
+        </p:txBody>
+      </p:sp>
+      <p:sp>
+        <p:nvSpPr>
+          <p:cNvPr id="19" name="Gap label 2"/>
+          <p:cNvSpPr txBox="1"/>
+          <p:nvPr/>
+        </p:nvSpPr>
+        <p:spPr>
+          <a:xfrm>
+            <a:off x="6080760" y="2697480"/>
+            <a:ext cx="2377440" cy="274320"/>
+          </a:xfrm>
+          <a:prstGeom prst="rect">
+            <a:avLst/>
+          </a:prstGeom>
+          <a:noFill/>
+          <a:ln/>
+        </p:spPr>
+        <p:txBody>
+          <a:bodyPr wrap="square" lIns="0" tIns="0" rIns="0" bIns="0" rtlCol="0" anchor="ctr"/>
+          <a:lstStyle/>
+          <a:p>
+            <a:pPr indent="0" marL="0">
+              <a:buNone/>
+            </a:pPr>
+            <a:r>
+              <a:rPr lang="en-US" sz="1200" b="1" dirty="0">
+                <a:solidFill>
+                  <a:schemeClr val="accent1"/>
+                </a:solidFill>
+              </a:rPr>
+              <a:t>Requerido</a:t>
+            </a:r>
+            <a:endParaRPr lang="en-US" sz="1200" dirty="0"/>
+          </a:p>
+        </p:txBody>
+      </p:sp>
+      <p:sp>
+        <p:nvSpPr>
+          <p:cNvPr id="20" name="Gap target"/>
+          <p:cNvSpPr txBox="1"/>
+          <p:nvPr/>
+        </p:nvSpPr>
+        <p:spPr>
+          <a:xfrm>
+            <a:off x="6080760" y="2971800"/>
+            <a:ext cx="2377440" cy="685800"/>
+          </a:xfrm>
+          <a:prstGeom prst="rect">
+            <a:avLst/>
+          </a:prstGeom>
+          <a:noFill/>
+          <a:ln/>
+        </p:spPr>
+        <p:txBody>
+          <a:bodyPr wrap="square" lIns="0" tIns="0" rIns="0" bIns="0" rtlCol="0" anchor="ctr"/>
+          <a:lstStyle/>
+          <a:p>
+            <a:pPr indent="0" marL="0">
+              <a:buNone/>
+            </a:pPr>
+            <a:r>
+              <a:rPr lang="en-US" sz="4800" b="1" dirty="0">
+                <a:solidFill>
+                  <a:schemeClr val="bg1"/>
+                </a:solidFill>
+                <a:latin typeface="Cambria" pitchFamily="34" charset="0"/>
+                <a:ea typeface="Cambria" pitchFamily="34" charset="-122"/>
+                <a:cs typeface="Cambria" pitchFamily="34" charset="-120"/>
+              </a:rPr>
+              <a:t>8–10</a:t>
+            </a:r>
+            <a:endParaRPr lang="en-US" sz="4800" dirty="0"/>
+          </a:p>
+        </p:txBody>
+      </p:sp>
+      <p:sp>
+        <p:nvSpPr>
+          <p:cNvPr id="21" name="Gap target label"/>
+          <p:cNvSpPr txBox="1"/>
+          <p:nvPr/>
+        </p:nvSpPr>
+        <p:spPr>
+          <a:xfrm>
+            <a:off x="6080760" y="3657600"/>
+            <a:ext cx="2377440" cy="274320"/>
+          </a:xfrm>
+          <a:prstGeom prst="rect">
+            <a:avLst/>
+          </a:prstGeom>
+          <a:noFill/>
+          <a:ln/>
+        </p:spPr>
+        <p:txBody>
+          <a:bodyPr wrap="square" lIns="0" tIns="0" rIns="0" bIns="0" rtlCol="0" anchor="ctr"/>
+          <a:lstStyle/>
+          <a:p>
+            <a:pPr indent="0" marL="0">
+              <a:buNone/>
+            </a:pPr>
+            <a:r>
+              <a:rPr lang="en-US" sz="1200" dirty="0">
+                <a:solidFill>
+                  <a:schemeClr val="bg1"/>
+                </a:solidFill>
+              </a:rPr>
+              <a:t>conceptos distintos, en 9:16 y 4:5</a:t>
+            </a:r>
+            <a:endParaRPr lang="en-US" sz="1200" dirty="0"/>
+          </a:p>
+        </p:txBody>
+      </p:sp>
+      <p:sp>
+        <p:nvSpPr>
+          <p:cNvPr id="25" name="Slide Number Placeholder 0"/>
+          <p:cNvSpPr>
+            <a:spLocks noGrp="1"/>
+          </p:cNvSpPr>
+          <p:nvPr>
+            <p:ph type="sldNum" sz="quarter" idx="4294967295"/>
+          </p:nvPr>
+        </p:nvSpPr>
+        <p:spPr>
+          <a:xfrm>
+            <a:off x="8321040" y="4800600"/>
+            <a:ext cx="365760" cy="228600"/>
+          </a:xfrm>
+          <a:prstGeom prst="rect">
+            <a:avLst/>
+          </a:prstGeom>
+          <a:extLst>
+            <a:ext uri="{C572A759-6A51-4108-AA02-DFA0A04FC94B}">
+              <ma14:wrappingTextBoxFlag xmlns:ma14="http://schemas.microsoft.com/office/mac/drawingml/2011/main" val="0"/>
+            </a:ext>
+          </a:extLst>
+        </p:spPr>
+        <p:txBody>
+          <a:bodyPr/>
+          <a:lstStyle>
+            <a:lvl1pPr>
+              <a:defRPr sz="900">
+                <a:solidFill>
+                  <a:schemeClr val="accent6"/>
+                </a:solidFill>
+              </a:defRPr>
+            </a:lvl1pPr>
+          </a:lstStyle>
+          <a:p>
+            <a:pPr algn="r"/>
+            <a:fld id="{F7021451-1387-4CA6-816F-3879F97B5CBC}" type="slidenum">
+              <a:rPr b="0" lang="en-US"/>
+              <a:t>12</a:t>
+            </a:fld>
+            <a:endParaRPr lang="en-US"/>
+          </a:p>
+        </p:txBody>
+      </p:sp>
+    </p:spTree>
+  </p:cSld>
+  <p:clrMapOvr>
+    <a:masterClrMapping/>
+  </p:clrMapOvr>
+</p:sld>
+</file>
+
+<file path=ppt/slides/slide13.xml><?xml version="1.0" encoding="utf-8"?>
+<p:sld xmlns:a="http://schemas.openxmlformats.org/drawingml/2006/main" xmlns:r="http://schemas.openxmlformats.org/officeDocument/2006/relationships" xmlns:p="http://schemas.openxmlformats.org/presentationml/2006/main">
+  <p:cSld name="Slide 13">
+    <p:spTree>
+      <p:nvGrpSpPr>
+        <p:cNvPr id="1" name=""/>
+        <p:cNvGrpSpPr/>
+        <p:nvPr/>
+      </p:nvGrpSpPr>
+      <p:grpSpPr>
+        <a:xfrm>
+          <a:off x="0" y="0"/>
+          <a:ext cx="0" cy="0"/>
+          <a:chOff x="0" y="0"/>
+          <a:chExt cx="0" cy="0"/>
+        </a:xfrm>
+      </p:grpSpPr>
+      <p:sp>
+        <p:nvSpPr>
+          <p:cNvPr id="2" name="Text 0"/>
+          <p:cNvSpPr/>
+          <p:nvPr>
+            <p:ph idx="100" type="title" hasCustomPrompt="1"/>
+          </p:nvPr>
+        </p:nvSpPr>
+        <p:spPr>
+          <a:xfrm>
+            <a:off x="457200" y="274320"/>
+            <a:ext cx="8229600" cy="685800"/>
+          </a:xfrm>
+          <a:prstGeom prst="rect">
+            <a:avLst/>
+          </a:prstGeom>
+          <a:noFill/>
+          <a:ln/>
+        </p:spPr>
+        <p:txBody>
+          <a:bodyPr wrap="square" lIns="0" tIns="0" rIns="0" bIns="0" rtlCol="0" anchor="ctr"/>
+          <a:lstStyle/>
+          <a:p>
+            <a:pPr algn="l" indent="0" marL="0">
+              <a:buNone/>
+            </a:pPr>
+            <a:r>
+              <a:rPr lang="en-US" sz="3000" b="1" dirty="0">
+                <a:solidFill>
+                  <a:schemeClr val="tx2"/>
+                </a:solidFill>
+              </a:rPr>
+              <a:t>Estructura creativa requerida</a:t>
+            </a:r>
+            <a:endParaRPr lang="en-US" sz="3000" dirty="0"/>
+          </a:p>
+        </p:txBody>
+      </p:sp>
+      <p:graphicFrame>
+        <p:nvGraphicFramePr>
+          <p:cNvPr id="14" name="Creative matrix"/>
+          <p:cNvGraphicFramePr>
+            <a:graphicFrameLocks noGrp="1"/>
+          </p:cNvGraphicFramePr>
+          <p:nvPr>
+            <p:extLst>
+              <p:ext uri="{D42A27DB-BD31-4B8C-83A1-F6EECF244321}">
+                <p14:modId xmlns:p14="http://schemas.microsoft.com/office/powerpoint/2010/main" val="1579011935"/>
+              </p:ext>
+            </p:extLst>
+          </p:nvPr>
+        </p:nvGraphicFramePr>
+        <p:xfrm>
+          <a:off x="457200" y="1005840"/>
+          <a:ext cx="8229600" cy="914400"/>
+        </p:xfrm>
+        <a:graphic>
+          <a:graphicData uri="http://schemas.openxmlformats.org/drawingml/2006/table">
+            <a:tbl>
+              <a:tblPr/>
+              <a:tblGrid>
+                <a:gridCol w="320040"/>
+                <a:gridCol w="1554480"/>
+                <a:gridCol w="2788920"/>
+                <a:gridCol w="1371600"/>
+                <a:gridCol w="2194560"/>
+              </a:tblGrid>
+              <a:tr h="329184">
+                <a:tc>
+                  <a:txBody>
+                    <a:bodyPr/>
+                    <a:lstStyle/>
+                    <a:p>
+                      <a:pPr algn="ctr" indent="0" marL="0">
+                        <a:buNone/>
+                      </a:pPr>
+                      <a:endParaRPr lang="en-US" sz="1050" dirty="0">
+                        <a:latin typeface="Calibri" charset="0"/>
+                        <a:ea typeface="Calibri" charset="0"/>
+                        <a:cs typeface="Calibri" charset="0"/>
+                      </a:endParaRPr>
+                    </a:p>
+                  </a:txBody>
+                  <a:tcPr marL="54864" marR="54864" marT="0" marB="0" anchor="ctr">
+                    <a:lnL w="0" cap="flat" cmpd="sng" algn="ctr">
+                      <a:noFill/>
+                    </a:lnL>
+                    <a:lnR w="0" cap="flat" cmpd="sng" algn="ctr">
+                      <a:noFill/>
+                    </a:lnR>
+                    <a:lnT w="0" cap="flat" cmpd="sng" algn="ctr">
+                      <a:noFill/>
+                    </a:lnT>
+                    <a:lnB w="0" cap="flat" cmpd="sng" algn="ctr">
+                      <a:noFill/>
+                    </a:lnB>
+                    <a:solidFill>
+                      <a:srgbClr val="3B1C78"/>
+                    </a:solidFill>
+                  </a:tcPr>
+                </a:tc>
+                <a:tc>
+                  <a:txBody>
+                    <a:bodyPr/>
+                    <a:lstStyle/>
+                    <a:p>
+                      <a:pPr algn="l" indent="0" marL="0">
+                        <a:buNone/>
+                      </a:pPr>
+                      <a:r>
+                        <a:rPr lang="en-US" sz="1050" b="1" dirty="0">
+                          <a:solidFill>
+                            <a:srgbClr val="FFFFFF"/>
+                          </a:solidFill>
+                          <a:latin typeface="Calibri" pitchFamily="34" charset="0"/>
+                          <a:ea typeface="Calibri" pitchFamily="34" charset="-122"/>
+                          <a:cs typeface="Calibri" pitchFamily="34" charset="-120"/>
+                        </a:rPr>
+                        <a:t>Segmento</a:t>
+                      </a:r>
+                      <a:endParaRPr lang="en-US" sz="1050" dirty="0">
+                        <a:latin typeface="Calibri" charset="0"/>
+                        <a:ea typeface="Calibri" charset="0"/>
+                        <a:cs typeface="Calibri" charset="0"/>
+                      </a:endParaRPr>
+                    </a:p>
+                  </a:txBody>
+                  <a:tcPr marL="54864" marR="54864" marT="0" marB="0" anchor="ctr">
+                    <a:lnL w="0" cap="flat" cmpd="sng" algn="ctr">
+                      <a:noFill/>
+                    </a:lnL>
+                    <a:lnR w="0" cap="flat" cmpd="sng" algn="ctr">
+                      <a:noFill/>
+                    </a:lnR>
+                    <a:lnT w="0" cap="flat" cmpd="sng" algn="ctr">
+                      <a:noFill/>
+                    </a:lnT>
+                    <a:lnB w="0" cap="flat" cmpd="sng" algn="ctr">
+                      <a:noFill/>
+                    </a:lnB>
+                    <a:solidFill>
+                      <a:srgbClr val="3B1C78"/>
+                    </a:solidFill>
+                  </a:tcPr>
+                </a:tc>
+                <a:tc>
+                  <a:txBody>
+                    <a:bodyPr/>
+                    <a:lstStyle/>
+                    <a:p>
+                      <a:pPr algn="l" indent="0" marL="0">
+                        <a:buNone/>
+                      </a:pPr>
+                      <a:r>
+                        <a:rPr lang="en-US" sz="1050" b="1" dirty="0">
+                          <a:solidFill>
+                            <a:srgbClr val="FFFFFF"/>
+                          </a:solidFill>
+                          <a:latin typeface="Calibri" pitchFamily="34" charset="0"/>
+                          <a:ea typeface="Calibri" pitchFamily="34" charset="-122"/>
+                          <a:cs typeface="Calibri" pitchFamily="34" charset="-120"/>
+                        </a:rPr>
+                        <a:t>Ángulo</a:t>
+                      </a:r>
+                      <a:endParaRPr lang="en-US" sz="1050" dirty="0">
+                        <a:latin typeface="Calibri" charset="0"/>
+                        <a:ea typeface="Calibri" charset="0"/>
+                        <a:cs typeface="Calibri" charset="0"/>
+                      </a:endParaRPr>
+                    </a:p>
+                  </a:txBody>
+                  <a:tcPr marL="54864" marR="54864" marT="0" marB="0" anchor="ctr">
+                    <a:lnL w="0" cap="flat" cmpd="sng" algn="ctr">
+                      <a:noFill/>
+                    </a:lnL>
+                    <a:lnR w="0" cap="flat" cmpd="sng" algn="ctr">
+                      <a:noFill/>
+                    </a:lnR>
+                    <a:lnT w="0" cap="flat" cmpd="sng" algn="ctr">
+                      <a:noFill/>
+                    </a:lnT>
+                    <a:lnB w="0" cap="flat" cmpd="sng" algn="ctr">
+                      <a:noFill/>
+                    </a:lnB>
+                    <a:solidFill>
+                      <a:srgbClr val="3B1C78"/>
+                    </a:solidFill>
+                  </a:tcPr>
+                </a:tc>
+                <a:tc>
+                  <a:txBody>
+                    <a:bodyPr/>
+                    <a:lstStyle/>
+                    <a:p>
+                      <a:pPr algn="l" indent="0" marL="0">
+                        <a:buNone/>
+                      </a:pPr>
+                      <a:r>
+                        <a:rPr lang="en-US" sz="1050" b="1" dirty="0">
+                          <a:solidFill>
+                            <a:srgbClr val="FFFFFF"/>
+                          </a:solidFill>
+                          <a:latin typeface="Calibri" pitchFamily="34" charset="0"/>
+                          <a:ea typeface="Calibri" pitchFamily="34" charset="-122"/>
+                          <a:cs typeface="Calibri" pitchFamily="34" charset="-120"/>
+                        </a:rPr>
+                        <a:t>Formato</a:t>
+                      </a:r>
+                      <a:endParaRPr lang="en-US" sz="1050" dirty="0">
+                        <a:latin typeface="Calibri" charset="0"/>
+                        <a:ea typeface="Calibri" charset="0"/>
+                        <a:cs typeface="Calibri" charset="0"/>
+                      </a:endParaRPr>
+                    </a:p>
+                  </a:txBody>
+                  <a:tcPr marL="54864" marR="54864" marT="0" marB="0" anchor="ctr">
+                    <a:lnL w="0" cap="flat" cmpd="sng" algn="ctr">
+                      <a:noFill/>
+                    </a:lnL>
+                    <a:lnR w="0" cap="flat" cmpd="sng" algn="ctr">
+                      <a:noFill/>
+                    </a:lnR>
+                    <a:lnT w="0" cap="flat" cmpd="sng" algn="ctr">
+                      <a:noFill/>
+                    </a:lnT>
+                    <a:lnB w="0" cap="flat" cmpd="sng" algn="ctr">
+                      <a:noFill/>
+                    </a:lnB>
+                    <a:solidFill>
+                      <a:srgbClr val="3B1C78"/>
+                    </a:solidFill>
+                  </a:tcPr>
+                </a:tc>
+                <a:tc>
+                  <a:txBody>
+                    <a:bodyPr/>
+                    <a:lstStyle/>
+                    <a:p>
+                      <a:pPr algn="l" indent="0" marL="0">
+                        <a:buNone/>
+                      </a:pPr>
+                      <a:r>
+                        <a:rPr lang="en-US" sz="1050" b="1" dirty="0">
+                          <a:solidFill>
+                            <a:srgbClr val="FFFFFF"/>
+                          </a:solidFill>
+                          <a:latin typeface="Calibri" pitchFamily="34" charset="0"/>
+                          <a:ea typeface="Calibri" pitchFamily="34" charset="-122"/>
+                          <a:cs typeface="Calibri" pitchFamily="34" charset="-120"/>
+                        </a:rPr>
+                        <a:t>Hook (0–3 s / imagen)</a:t>
+                      </a:r>
+                      <a:endParaRPr lang="en-US" sz="1050" dirty="0">
+                        <a:latin typeface="Calibri" charset="0"/>
+                        <a:ea typeface="Calibri" charset="0"/>
+                        <a:cs typeface="Calibri" charset="0"/>
+                      </a:endParaRPr>
+                    </a:p>
+                  </a:txBody>
+                  <a:tcPr marL="54864" marR="54864" marT="0" marB="0" anchor="ctr">
+                    <a:lnL w="0" cap="flat" cmpd="sng" algn="ctr">
+                      <a:noFill/>
+                    </a:lnL>
+                    <a:lnR w="0" cap="flat" cmpd="sng" algn="ctr">
+                      <a:noFill/>
+                    </a:lnR>
+                    <a:lnT w="0" cap="flat" cmpd="sng" algn="ctr">
+                      <a:noFill/>
+                    </a:lnT>
+                    <a:lnB w="0" cap="flat" cmpd="sng" algn="ctr">
+                      <a:noFill/>
+                    </a:lnB>
+                    <a:solidFill>
+                      <a:srgbClr val="3B1C78"/>
+                    </a:solidFill>
+                  </a:tcPr>
+                </a:tc>
+              </a:tr>
+              <a:tr h="329184">
+                <a:tc>
+                  <a:txBody>
+                    <a:bodyPr/>
+                    <a:lstStyle/>
+                    <a:p>
+                      <a:pPr algn="ctr" indent="0" marL="0">
+                        <a:buNone/>
+                      </a:pPr>
+                      <a:r>
+                        <a:rPr lang="en-US" sz="1050" b="1" dirty="0">
+                          <a:solidFill>
+                            <a:srgbClr val="3B1C78"/>
+                          </a:solidFill>
+                          <a:latin typeface="Calibri" pitchFamily="34" charset="0"/>
+                          <a:ea typeface="Calibri" pitchFamily="34" charset="-122"/>
+                          <a:cs typeface="Calibri" pitchFamily="34" charset="-120"/>
+                        </a:rPr>
+                        <a:t>1</a:t>
+                      </a:r>
+                      <a:endParaRPr lang="en-US" sz="1050" dirty="0">
+                        <a:latin typeface="Calibri" charset="0"/>
+                        <a:ea typeface="Calibri" charset="0"/>
+                        <a:cs typeface="Calibri" charset="0"/>
+                      </a:endParaRPr>
+                    </a:p>
+                  </a:txBody>
+                  <a:tcPr marL="54864" marR="54864" marT="0" marB="0" anchor="ctr">
+                    <a:lnL w="0" cap="flat" cmpd="sng" algn="ctr">
+                      <a:noFill/>
+                    </a:lnL>
+                    <a:lnR w="0" cap="flat" cmpd="sng" algn="ctr">
+                      <a:noFill/>
+                    </a:lnR>
+                    <a:lnT w="0" cap="flat" cmpd="sng" algn="ctr">
+                      <a:noFill/>
+                    </a:lnT>
+                    <a:lnB w="0" cap="flat" cmpd="sng" algn="ctr">
+                      <a:noFill/>
+                    </a:lnB>
+                    <a:solidFill>
+                      <a:srgbClr val="FFFFFF"/>
+                    </a:solidFill>
+                  </a:tcPr>
+                </a:tc>
+                <a:tc>
+                  <a:txBody>
+                    <a:bodyPr/>
+                    <a:lstStyle/>
+                    <a:p>
+                      <a:pPr algn="l" indent="0" marL="0">
+                        <a:buNone/>
+                      </a:pPr>
+                      <a:r>
+                        <a:rPr lang="en-US" sz="1050" dirty="0">
+                          <a:solidFill>
+                            <a:srgbClr val="1F1235"/>
+                          </a:solidFill>
+                          <a:latin typeface="Calibri" pitchFamily="34" charset="0"/>
+                          <a:ea typeface="Calibri" pitchFamily="34" charset="-122"/>
+                          <a:cs typeface="Calibri" pitchFamily="34" charset="-120"/>
+                        </a:rPr>
+                        <a:t>Firmas legales</a:t>
+                      </a:r>
+                      <a:endParaRPr lang="en-US" sz="1050" dirty="0">
+                        <a:latin typeface="Calibri" charset="0"/>
+                        <a:ea typeface="Calibri" charset="0"/>
+                        <a:cs typeface="Calibri" charset="0"/>
+                      </a:endParaRPr>
+                    </a:p>
+                  </a:txBody>
+                  <a:tcPr marL="54864" marR="54864" marT="0" marB="0" anchor="ctr">
+                    <a:lnL w="0" cap="flat" cmpd="sng" algn="ctr">
+                      <a:noFill/>
+                    </a:lnL>
+                    <a:lnR w="0" cap="flat" cmpd="sng" algn="ctr">
+                      <a:noFill/>
+                    </a:lnR>
+                    <a:lnT w="0" cap="flat" cmpd="sng" algn="ctr">
+                      <a:noFill/>
+                    </a:lnT>
+                    <a:lnB w="0" cap="flat" cmpd="sng" algn="ctr">
+                      <a:noFill/>
+                    </a:lnB>
+                    <a:solidFill>
+                      <a:srgbClr val="FFFFFF"/>
+                    </a:solidFill>
+                  </a:tcPr>
+                </a:tc>
+                <a:tc>
+                  <a:txBody>
+                    <a:bodyPr/>
+                    <a:lstStyle/>
+                    <a:p>
+                      <a:pPr algn="l" indent="0" marL="0">
+                        <a:buNone/>
+                      </a:pPr>
+                      <a:r>
+                        <a:rPr lang="en-US" sz="1050" dirty="0">
+                          <a:solidFill>
+                            <a:srgbClr val="1F1235"/>
+                          </a:solidFill>
+                          <a:latin typeface="Calibri" pitchFamily="34" charset="0"/>
+                          <a:ea typeface="Calibri" pitchFamily="34" charset="-122"/>
+                          <a:cs typeface="Calibri" pitchFamily="34" charset="-120"/>
+                        </a:rPr>
+                        <a:t>Carga operativa: intake, agenda, seguimiento</a:t>
+                      </a:r>
+                      <a:endParaRPr lang="en-US" sz="1050" dirty="0">
+                        <a:latin typeface="Calibri" charset="0"/>
+                        <a:ea typeface="Calibri" charset="0"/>
+                        <a:cs typeface="Calibri" charset="0"/>
+                      </a:endParaRPr>
+                    </a:p>
+                  </a:txBody>
+                  <a:tcPr marL="54864" marR="54864" marT="0" marB="0" anchor="ctr">
+                    <a:lnL w="0" cap="flat" cmpd="sng" algn="ctr">
+                      <a:noFill/>
+                    </a:lnL>
+                    <a:lnR w="0" cap="flat" cmpd="sng" algn="ctr">
+                      <a:noFill/>
+                    </a:lnR>
+                    <a:lnT w="0" cap="flat" cmpd="sng" algn="ctr">
+                      <a:noFill/>
+                    </a:lnT>
+                    <a:lnB w="0" cap="flat" cmpd="sng" algn="ctr">
+                      <a:noFill/>
+                    </a:lnB>
+                    <a:solidFill>
+                      <a:srgbClr val="FFFFFF"/>
+                    </a:solidFill>
+                  </a:tcPr>
+                </a:tc>
+                <a:tc>
+                  <a:txBody>
+                    <a:bodyPr/>
+                    <a:lstStyle/>
+                    <a:p>
+                      <a:pPr algn="l" indent="0" marL="0">
+                        <a:buNone/>
+                      </a:pPr>
+                      <a:r>
+                        <a:rPr lang="en-US" sz="1050" dirty="0">
+                          <a:solidFill>
+                            <a:srgbClr val="1F1235"/>
+                          </a:solidFill>
+                          <a:latin typeface="Calibri" pitchFamily="34" charset="0"/>
+                          <a:ea typeface="Calibri" pitchFamily="34" charset="-122"/>
+                          <a:cs typeface="Calibri" pitchFamily="34" charset="-120"/>
+                        </a:rPr>
+                        <a:t>Video 9:16 + 4:5</a:t>
+                      </a:r>
+                      <a:endParaRPr lang="en-US" sz="1050" dirty="0">
+                        <a:latin typeface="Calibri" charset="0"/>
+                        <a:ea typeface="Calibri" charset="0"/>
+                        <a:cs typeface="Calibri" charset="0"/>
+                      </a:endParaRPr>
+                    </a:p>
+                  </a:txBody>
+                  <a:tcPr marL="54864" marR="54864" marT="0" marB="0" anchor="ctr">
+                    <a:lnL w="0" cap="flat" cmpd="sng" algn="ctr">
+                      <a:noFill/>
+                    </a:lnL>
+                    <a:lnR w="0" cap="flat" cmpd="sng" algn="ctr">
+                      <a:noFill/>
+                    </a:lnR>
+                    <a:lnT w="0" cap="flat" cmpd="sng" algn="ctr">
+                      <a:noFill/>
+                    </a:lnT>
+                    <a:lnB w="0" cap="flat" cmpd="sng" algn="ctr">
+                      <a:noFill/>
+                    </a:lnB>
+                    <a:solidFill>
+                      <a:srgbClr val="FFFFFF"/>
+                    </a:solidFill>
+                  </a:tcPr>
+                </a:tc>
+                <a:tc>
+                  <a:txBody>
+                    <a:bodyPr/>
+                    <a:lstStyle/>
+                    <a:p>
+                      <a:pPr algn="l" indent="0" marL="0">
+                        <a:buNone/>
+                      </a:pPr>
+                      <a:r>
+                        <a:rPr lang="en-US" sz="1050" dirty="0">
+                          <a:solidFill>
+                            <a:srgbClr val="1F1235"/>
+                          </a:solidFill>
+                          <a:latin typeface="Calibri" pitchFamily="34" charset="0"/>
+                          <a:ea typeface="Calibri" pitchFamily="34" charset="-122"/>
+                          <a:cs typeface="Calibri" pitchFamily="34" charset="-120"/>
+                        </a:rPr>
+                        <a:t>"For Law Firm Owners"</a:t>
+                      </a:r>
+                      <a:endParaRPr lang="en-US" sz="1050" dirty="0">
+                        <a:latin typeface="Calibri" charset="0"/>
+                        <a:ea typeface="Calibri" charset="0"/>
+                        <a:cs typeface="Calibri" charset="0"/>
+                      </a:endParaRPr>
+                    </a:p>
+                  </a:txBody>
+                  <a:tcPr marL="54864" marR="54864" marT="0" marB="0" anchor="ctr">
+                    <a:lnL w="0" cap="flat" cmpd="sng" algn="ctr">
+                      <a:noFill/>
+                    </a:lnL>
+                    <a:lnR w="0" cap="flat" cmpd="sng" algn="ctr">
+                      <a:noFill/>
+                    </a:lnR>
+                    <a:lnT w="0" cap="flat" cmpd="sng" algn="ctr">
+                      <a:noFill/>
+                    </a:lnT>
+                    <a:lnB w="0" cap="flat" cmpd="sng" algn="ctr">
+                      <a:noFill/>
+                    </a:lnB>
+                    <a:solidFill>
+                      <a:srgbClr val="FFFFFF"/>
+                    </a:solidFill>
+                  </a:tcPr>
+                </a:tc>
+              </a:tr>
+              <a:tr h="329184">
+                <a:tc>
+                  <a:txBody>
+                    <a:bodyPr/>
+                    <a:lstStyle/>
+                    <a:p>
+                      <a:pPr algn="ctr" indent="0" marL="0">
+                        <a:buNone/>
+                      </a:pPr>
+                      <a:r>
+                        <a:rPr lang="en-US" sz="1050" b="1" dirty="0">
+                          <a:solidFill>
+                            <a:srgbClr val="3B1C78"/>
+                          </a:solidFill>
+                          <a:latin typeface="Calibri" pitchFamily="34" charset="0"/>
+                          <a:ea typeface="Calibri" pitchFamily="34" charset="-122"/>
+                          <a:cs typeface="Calibri" pitchFamily="34" charset="-120"/>
+                        </a:rPr>
+                        <a:t>2</a:t>
+                      </a:r>
+                      <a:endParaRPr lang="en-US" sz="1050" dirty="0">
+                        <a:latin typeface="Calibri" charset="0"/>
+                        <a:ea typeface="Calibri" charset="0"/>
+                        <a:cs typeface="Calibri" charset="0"/>
+                      </a:endParaRPr>
+                    </a:p>
+                  </a:txBody>
+                  <a:tcPr marL="54864" marR="54864" marT="0" marB="0" anchor="ctr">
+                    <a:lnL w="0" cap="flat" cmpd="sng" algn="ctr">
+                      <a:noFill/>
+                    </a:lnL>
+                    <a:lnR w="0" cap="flat" cmpd="sng" algn="ctr">
+                      <a:noFill/>
+                    </a:lnR>
+                    <a:lnT w="0" cap="flat" cmpd="sng" algn="ctr">
+                      <a:noFill/>
+                    </a:lnT>
+                    <a:lnB w="0" cap="flat" cmpd="sng" algn="ctr">
+                      <a:noFill/>
+                    </a:lnB>
+                    <a:solidFill>
+                      <a:srgbClr val="F3F0FA"/>
+                    </a:solidFill>
+                  </a:tcPr>
+                </a:tc>
+                <a:tc>
+                  <a:txBody>
+                    <a:bodyPr/>
+                    <a:lstStyle/>
+                    <a:p>
+                      <a:pPr algn="l" indent="0" marL="0">
+                        <a:buNone/>
+                      </a:pPr>
+                      <a:r>
+                        <a:rPr lang="en-US" sz="1050" dirty="0">
+                          <a:solidFill>
+                            <a:srgbClr val="1F1235"/>
+                          </a:solidFill>
+                          <a:latin typeface="Calibri" pitchFamily="34" charset="0"/>
+                          <a:ea typeface="Calibri" pitchFamily="34" charset="-122"/>
+                          <a:cs typeface="Calibri" pitchFamily="34" charset="-120"/>
+                        </a:rPr>
+                        <a:t>Inmigración</a:t>
+                      </a:r>
+                      <a:endParaRPr lang="en-US" sz="1050" dirty="0">
+                        <a:latin typeface="Calibri" charset="0"/>
+                        <a:ea typeface="Calibri" charset="0"/>
+                        <a:cs typeface="Calibri" charset="0"/>
+                      </a:endParaRPr>
+                    </a:p>
+                  </a:txBody>
+                  <a:tcPr marL="54864" marR="54864" marT="0" marB="0" anchor="ctr">
+                    <a:lnL w="0" cap="flat" cmpd="sng" algn="ctr">
+                      <a:noFill/>
+                    </a:lnL>
+                    <a:lnR w="0" cap="flat" cmpd="sng" algn="ctr">
+                      <a:noFill/>
+                    </a:lnR>
+                    <a:lnT w="0" cap="flat" cmpd="sng" algn="ctr">
+                      <a:noFill/>
+                    </a:lnT>
+                    <a:lnB w="0" cap="flat" cmpd="sng" algn="ctr">
+                      <a:noFill/>
+                    </a:lnB>
+                    <a:solidFill>
+                      <a:srgbClr val="F3F0FA"/>
+                    </a:solidFill>
+                  </a:tcPr>
+                </a:tc>
+                <a:tc>
+                  <a:txBody>
+                    <a:bodyPr/>
+                    <a:lstStyle/>
+                    <a:p>
+                      <a:pPr algn="l" indent="0" marL="0">
+                        <a:buNone/>
+                      </a:pPr>
+                      <a:r>
+                        <a:rPr lang="en-US" sz="1050" dirty="0">
+                          <a:solidFill>
+                            <a:srgbClr val="1F1235"/>
+                          </a:solidFill>
+                          <a:latin typeface="Calibri" pitchFamily="34" charset="0"/>
+                          <a:ea typeface="Calibri" pitchFamily="34" charset="-122"/>
+                          <a:cs typeface="Calibri" pitchFamily="34" charset="-120"/>
+                        </a:rPr>
+                        <a:t>Case flow: armado de expedientes</a:t>
+                      </a:r>
+                      <a:endParaRPr lang="en-US" sz="1050" dirty="0">
+                        <a:latin typeface="Calibri" charset="0"/>
+                        <a:ea typeface="Calibri" charset="0"/>
+                        <a:cs typeface="Calibri" charset="0"/>
+                      </a:endParaRPr>
+                    </a:p>
+                  </a:txBody>
+                  <a:tcPr marL="54864" marR="54864" marT="0" marB="0" anchor="ctr">
+                    <a:lnL w="0" cap="flat" cmpd="sng" algn="ctr">
+                      <a:noFill/>
+                    </a:lnL>
+                    <a:lnR w="0" cap="flat" cmpd="sng" algn="ctr">
+                      <a:noFill/>
+                    </a:lnR>
+                    <a:lnT w="0" cap="flat" cmpd="sng" algn="ctr">
+                      <a:noFill/>
+                    </a:lnT>
+                    <a:lnB w="0" cap="flat" cmpd="sng" algn="ctr">
+                      <a:noFill/>
+                    </a:lnB>
+                    <a:solidFill>
+                      <a:srgbClr val="F3F0FA"/>
+                    </a:solidFill>
+                  </a:tcPr>
+                </a:tc>
+                <a:tc>
+                  <a:txBody>
+                    <a:bodyPr/>
+                    <a:lstStyle/>
+                    <a:p>
+                      <a:pPr algn="l" indent="0" marL="0">
+                        <a:buNone/>
+                      </a:pPr>
+                      <a:r>
+                        <a:rPr lang="en-US" sz="1050" dirty="0">
+                          <a:solidFill>
+                            <a:srgbClr val="1F1235"/>
+                          </a:solidFill>
+                          <a:latin typeface="Calibri" pitchFamily="34" charset="0"/>
+                          <a:ea typeface="Calibri" pitchFamily="34" charset="-122"/>
+                          <a:cs typeface="Calibri" pitchFamily="34" charset="-120"/>
+                        </a:rPr>
+                        <a:t>Video demo</a:t>
+                      </a:r>
+                      <a:endParaRPr lang="en-US" sz="1050" dirty="0">
+                        <a:latin typeface="Calibri" charset="0"/>
+                        <a:ea typeface="Calibri" charset="0"/>
+                        <a:cs typeface="Calibri" charset="0"/>
+                      </a:endParaRPr>
+                    </a:p>
+                  </a:txBody>
+                  <a:tcPr marL="54864" marR="54864" marT="0" marB="0" anchor="ctr">
+                    <a:lnL w="0" cap="flat" cmpd="sng" algn="ctr">
+                      <a:noFill/>
+                    </a:lnL>
+                    <a:lnR w="0" cap="flat" cmpd="sng" algn="ctr">
+                      <a:noFill/>
+                    </a:lnR>
+                    <a:lnT w="0" cap="flat" cmpd="sng" algn="ctr">
+                      <a:noFill/>
+                    </a:lnT>
+                    <a:lnB w="0" cap="flat" cmpd="sng" algn="ctr">
+                      <a:noFill/>
+                    </a:lnB>
+                    <a:solidFill>
+                      <a:srgbClr val="F3F0FA"/>
+                    </a:solidFill>
+                  </a:tcPr>
+                </a:tc>
+                <a:tc>
+                  <a:txBody>
+                    <a:bodyPr/>
+                    <a:lstStyle/>
+                    <a:p>
+                      <a:pPr algn="l" indent="0" marL="0">
+                        <a:buNone/>
+                      </a:pPr>
+                      <a:r>
+                        <a:rPr lang="en-US" sz="1050" dirty="0">
+                          <a:solidFill>
+                            <a:srgbClr val="1F1235"/>
+                          </a:solidFill>
+                          <a:latin typeface="Calibri" pitchFamily="34" charset="0"/>
+                          <a:ea typeface="Calibri" pitchFamily="34" charset="-122"/>
+                          <a:cs typeface="Calibri" pitchFamily="34" charset="-120"/>
+                        </a:rPr>
+                        <a:t>"Immigration attorneys:"</a:t>
+                      </a:r>
+                      <a:endParaRPr lang="en-US" sz="1050" dirty="0">
+                        <a:latin typeface="Calibri" charset="0"/>
+                        <a:ea typeface="Calibri" charset="0"/>
+                        <a:cs typeface="Calibri" charset="0"/>
+                      </a:endParaRPr>
+                    </a:p>
+                  </a:txBody>
+                  <a:tcPr marL="54864" marR="54864" marT="0" marB="0" anchor="ctr">
+                    <a:lnL w="0" cap="flat" cmpd="sng" algn="ctr">
+                      <a:noFill/>
+                    </a:lnL>
+                    <a:lnR w="0" cap="flat" cmpd="sng" algn="ctr">
+                      <a:noFill/>
+                    </a:lnR>
+                    <a:lnT w="0" cap="flat" cmpd="sng" algn="ctr">
+                      <a:noFill/>
+                    </a:lnT>
+                    <a:lnB w="0" cap="flat" cmpd="sng" algn="ctr">
+                      <a:noFill/>
+                    </a:lnB>
+                    <a:solidFill>
+                      <a:srgbClr val="F3F0FA"/>
+                    </a:solidFill>
+                  </a:tcPr>
+                </a:tc>
+              </a:tr>
+              <a:tr h="329184">
+                <a:tc>
+                  <a:txBody>
+                    <a:bodyPr/>
+                    <a:lstStyle/>
+                    <a:p>
+                      <a:pPr algn="ctr" indent="0" marL="0">
+                        <a:buNone/>
+                      </a:pPr>
+                      <a:r>
+                        <a:rPr lang="en-US" sz="1050" b="1" dirty="0">
+                          <a:solidFill>
+                            <a:srgbClr val="3B1C78"/>
+                          </a:solidFill>
+                          <a:latin typeface="Calibri" pitchFamily="34" charset="0"/>
+                          <a:ea typeface="Calibri" pitchFamily="34" charset="-122"/>
+                          <a:cs typeface="Calibri" pitchFamily="34" charset="-120"/>
+                        </a:rPr>
+                        <a:t>3</a:t>
+                      </a:r>
+                      <a:endParaRPr lang="en-US" sz="1050" dirty="0">
+                        <a:latin typeface="Calibri" charset="0"/>
+                        <a:ea typeface="Calibri" charset="0"/>
+                        <a:cs typeface="Calibri" charset="0"/>
+                      </a:endParaRPr>
+                    </a:p>
+                  </a:txBody>
+                  <a:tcPr marL="54864" marR="54864" marT="0" marB="0" anchor="ctr">
+                    <a:lnL w="0" cap="flat" cmpd="sng" algn="ctr">
+                      <a:noFill/>
+                    </a:lnL>
+                    <a:lnR w="0" cap="flat" cmpd="sng" algn="ctr">
+                      <a:noFill/>
+                    </a:lnR>
+                    <a:lnT w="0" cap="flat" cmpd="sng" algn="ctr">
+                      <a:noFill/>
+                    </a:lnT>
+                    <a:lnB w="0" cap="flat" cmpd="sng" algn="ctr">
+                      <a:noFill/>
+                    </a:lnB>
+                    <a:solidFill>
+                      <a:srgbClr val="FFFFFF"/>
+                    </a:solidFill>
+                  </a:tcPr>
+                </a:tc>
+                <a:tc>
+                  <a:txBody>
+                    <a:bodyPr/>
+                    <a:lstStyle/>
+                    <a:p>
+                      <a:pPr algn="l" indent="0" marL="0">
+                        <a:buNone/>
+                      </a:pPr>
+                      <a:r>
+                        <a:rPr lang="en-US" sz="1050" dirty="0">
+                          <a:solidFill>
+                            <a:srgbClr val="1F1235"/>
+                          </a:solidFill>
+                          <a:latin typeface="Calibri" pitchFamily="34" charset="0"/>
+                          <a:ea typeface="Calibri" pitchFamily="34" charset="-122"/>
+                          <a:cs typeface="Calibri" pitchFamily="34" charset="-120"/>
+                        </a:rPr>
+                        <a:t>Realtors / team leads</a:t>
+                      </a:r>
+                      <a:endParaRPr lang="en-US" sz="1050" dirty="0">
+                        <a:latin typeface="Calibri" charset="0"/>
+                        <a:ea typeface="Calibri" charset="0"/>
+                        <a:cs typeface="Calibri" charset="0"/>
+                      </a:endParaRPr>
+                    </a:p>
+                  </a:txBody>
+                  <a:tcPr marL="54864" marR="54864" marT="0" marB="0" anchor="ctr">
+                    <a:lnL w="0" cap="flat" cmpd="sng" algn="ctr">
+                      <a:noFill/>
+                    </a:lnL>
+                    <a:lnR w="0" cap="flat" cmpd="sng" algn="ctr">
+                      <a:noFill/>
+                    </a:lnR>
+                    <a:lnT w="0" cap="flat" cmpd="sng" algn="ctr">
+                      <a:noFill/>
+                    </a:lnT>
+                    <a:lnB w="0" cap="flat" cmpd="sng" algn="ctr">
+                      <a:noFill/>
+                    </a:lnB>
+                    <a:solidFill>
+                      <a:srgbClr val="FFFFFF"/>
+                    </a:solidFill>
+                  </a:tcPr>
+                </a:tc>
+                <a:tc>
+                  <a:txBody>
+                    <a:bodyPr/>
+                    <a:lstStyle/>
+                    <a:p>
+                      <a:pPr algn="l" indent="0" marL="0">
+                        <a:buNone/>
+                      </a:pPr>
+                      <a:r>
+                        <a:rPr lang="en-US" sz="1050" dirty="0">
+                          <a:solidFill>
+                            <a:srgbClr val="1F1235"/>
+                          </a:solidFill>
+                          <a:latin typeface="Calibri" pitchFamily="34" charset="0"/>
+                          <a:ea typeface="Calibri" pitchFamily="34" charset="-122"/>
+                          <a:cs typeface="Calibri" pitchFamily="34" charset="-120"/>
+                        </a:rPr>
+                        <a:t>ISA que llama leads a diario</a:t>
+                      </a:r>
+                      <a:endParaRPr lang="en-US" sz="1050" dirty="0">
+                        <a:latin typeface="Calibri" charset="0"/>
+                        <a:ea typeface="Calibri" charset="0"/>
+                        <a:cs typeface="Calibri" charset="0"/>
+                      </a:endParaRPr>
+                    </a:p>
+                  </a:txBody>
+                  <a:tcPr marL="54864" marR="54864" marT="0" marB="0" anchor="ctr">
+                    <a:lnL w="0" cap="flat" cmpd="sng" algn="ctr">
+                      <a:noFill/>
+                    </a:lnL>
+                    <a:lnR w="0" cap="flat" cmpd="sng" algn="ctr">
+                      <a:noFill/>
+                    </a:lnR>
+                    <a:lnT w="0" cap="flat" cmpd="sng" algn="ctr">
+                      <a:noFill/>
+                    </a:lnT>
+                    <a:lnB w="0" cap="flat" cmpd="sng" algn="ctr">
+                      <a:noFill/>
+                    </a:lnB>
+                    <a:solidFill>
+                      <a:srgbClr val="FFFFFF"/>
+                    </a:solidFill>
+                  </a:tcPr>
+                </a:tc>
+                <a:tc>
+                  <a:txBody>
+                    <a:bodyPr/>
+                    <a:lstStyle/>
+                    <a:p>
+                      <a:pPr algn="l" indent="0" marL="0">
+                        <a:buNone/>
+                      </a:pPr>
+                      <a:r>
+                        <a:rPr lang="en-US" sz="1050" dirty="0">
+                          <a:solidFill>
+                            <a:srgbClr val="1F1235"/>
+                          </a:solidFill>
+                          <a:latin typeface="Calibri" pitchFamily="34" charset="0"/>
+                          <a:ea typeface="Calibri" pitchFamily="34" charset="-122"/>
+                          <a:cs typeface="Calibri" pitchFamily="34" charset="-120"/>
+                        </a:rPr>
+                        <a:t>Video 9:16</a:t>
+                      </a:r>
+                      <a:endParaRPr lang="en-US" sz="1050" dirty="0">
+                        <a:latin typeface="Calibri" charset="0"/>
+                        <a:ea typeface="Calibri" charset="0"/>
+                        <a:cs typeface="Calibri" charset="0"/>
+                      </a:endParaRPr>
+                    </a:p>
+                  </a:txBody>
+                  <a:tcPr marL="54864" marR="54864" marT="0" marB="0" anchor="ctr">
+                    <a:lnL w="0" cap="flat" cmpd="sng" algn="ctr">
+                      <a:noFill/>
+                    </a:lnL>
+                    <a:lnR w="0" cap="flat" cmpd="sng" algn="ctr">
+                      <a:noFill/>
+                    </a:lnR>
+                    <a:lnT w="0" cap="flat" cmpd="sng" algn="ctr">
+                      <a:noFill/>
+                    </a:lnT>
+                    <a:lnB w="0" cap="flat" cmpd="sng" algn="ctr">
+                      <a:noFill/>
+                    </a:lnB>
+                    <a:solidFill>
+                      <a:srgbClr val="FFFFFF"/>
+                    </a:solidFill>
+                  </a:tcPr>
+                </a:tc>
+                <a:tc>
+                  <a:txBody>
+                    <a:bodyPr/>
+                    <a:lstStyle/>
+                    <a:p>
+                      <a:pPr algn="l" indent="0" marL="0">
+                        <a:buNone/>
+                      </a:pPr>
+                      <a:r>
+                        <a:rPr lang="en-US" sz="1050" dirty="0">
+                          <a:solidFill>
+                            <a:srgbClr val="1F1235"/>
+                          </a:solidFill>
+                          <a:latin typeface="Calibri" pitchFamily="34" charset="0"/>
+                          <a:ea typeface="Calibri" pitchFamily="34" charset="-122"/>
+                          <a:cs typeface="Calibri" pitchFamily="34" charset="-120"/>
+                        </a:rPr>
+                        <a:t>"For Realtors"</a:t>
+                      </a:r>
+                      <a:endParaRPr lang="en-US" sz="1050" dirty="0">
+                        <a:latin typeface="Calibri" charset="0"/>
+                        <a:ea typeface="Calibri" charset="0"/>
+                        <a:cs typeface="Calibri" charset="0"/>
+                      </a:endParaRPr>
+                    </a:p>
+                  </a:txBody>
+                  <a:tcPr marL="54864" marR="54864" marT="0" marB="0" anchor="ctr">
+                    <a:lnL w="0" cap="flat" cmpd="sng" algn="ctr">
+                      <a:noFill/>
+                    </a:lnL>
+                    <a:lnR w="0" cap="flat" cmpd="sng" algn="ctr">
+                      <a:noFill/>
+                    </a:lnR>
+                    <a:lnT w="0" cap="flat" cmpd="sng" algn="ctr">
+                      <a:noFill/>
+                    </a:lnT>
+                    <a:lnB w="0" cap="flat" cmpd="sng" algn="ctr">
+                      <a:noFill/>
+                    </a:lnB>
+                    <a:solidFill>
+                      <a:srgbClr val="FFFFFF"/>
+                    </a:solidFill>
+                  </a:tcPr>
+                </a:tc>
+              </a:tr>
+              <a:tr h="329184">
+                <a:tc>
+                  <a:txBody>
+                    <a:bodyPr/>
+                    <a:lstStyle/>
+                    <a:p>
+                      <a:pPr algn="ctr" indent="0" marL="0">
+                        <a:buNone/>
+                      </a:pPr>
+                      <a:r>
+                        <a:rPr lang="en-US" sz="1050" b="1" dirty="0">
+                          <a:solidFill>
+                            <a:srgbClr val="3B1C78"/>
+                          </a:solidFill>
+                          <a:latin typeface="Calibri" pitchFamily="34" charset="0"/>
+                          <a:ea typeface="Calibri" pitchFamily="34" charset="-122"/>
+                          <a:cs typeface="Calibri" pitchFamily="34" charset="-120"/>
+                        </a:rPr>
+                        <a:t>4</a:t>
+                      </a:r>
+                      <a:endParaRPr lang="en-US" sz="1050" dirty="0">
+                        <a:latin typeface="Calibri" charset="0"/>
+                        <a:ea typeface="Calibri" charset="0"/>
+                        <a:cs typeface="Calibri" charset="0"/>
+                      </a:endParaRPr>
+                    </a:p>
+                  </a:txBody>
+                  <a:tcPr marL="54864" marR="54864" marT="0" marB="0" anchor="ctr">
+                    <a:lnL w="0" cap="flat" cmpd="sng" algn="ctr">
+                      <a:noFill/>
+                    </a:lnL>
+                    <a:lnR w="0" cap="flat" cmpd="sng" algn="ctr">
+                      <a:noFill/>
+                    </a:lnR>
+                    <a:lnT w="0" cap="flat" cmpd="sng" algn="ctr">
+                      <a:noFill/>
+                    </a:lnT>
+                    <a:lnB w="0" cap="flat" cmpd="sng" algn="ctr">
+                      <a:noFill/>
+                    </a:lnB>
+                    <a:solidFill>
+                      <a:srgbClr val="F3F0FA"/>
+                    </a:solidFill>
+                  </a:tcPr>
+                </a:tc>
+                <a:tc>
+                  <a:txBody>
+                    <a:bodyPr/>
+                    <a:lstStyle/>
+                    <a:p>
+                      <a:pPr algn="l" indent="0" marL="0">
+                        <a:buNone/>
+                      </a:pPr>
+                      <a:r>
+                        <a:rPr lang="en-US" sz="1050" dirty="0">
+                          <a:solidFill>
+                            <a:srgbClr val="1F1235"/>
+                          </a:solidFill>
+                          <a:latin typeface="Calibri" pitchFamily="34" charset="0"/>
+                          <a:ea typeface="Calibri" pitchFamily="34" charset="-122"/>
+                          <a:cs typeface="Calibri" pitchFamily="34" charset="-120"/>
+                        </a:rPr>
+                        <a:t>Dueños de negocio</a:t>
+                      </a:r>
+                      <a:endParaRPr lang="en-US" sz="1050" dirty="0">
+                        <a:latin typeface="Calibri" charset="0"/>
+                        <a:ea typeface="Calibri" charset="0"/>
+                        <a:cs typeface="Calibri" charset="0"/>
+                      </a:endParaRPr>
+                    </a:p>
+                  </a:txBody>
+                  <a:tcPr marL="54864" marR="54864" marT="0" marB="0" anchor="ctr">
+                    <a:lnL w="0" cap="flat" cmpd="sng" algn="ctr">
+                      <a:noFill/>
+                    </a:lnL>
+                    <a:lnR w="0" cap="flat" cmpd="sng" algn="ctr">
+                      <a:noFill/>
+                    </a:lnR>
+                    <a:lnT w="0" cap="flat" cmpd="sng" algn="ctr">
+                      <a:noFill/>
+                    </a:lnT>
+                    <a:lnB w="0" cap="flat" cmpd="sng" algn="ctr">
+                      <a:noFill/>
+                    </a:lnB>
+                    <a:solidFill>
+                      <a:srgbClr val="F3F0FA"/>
+                    </a:solidFill>
+                  </a:tcPr>
+                </a:tc>
+                <a:tc>
+                  <a:txBody>
+                    <a:bodyPr/>
+                    <a:lstStyle/>
+                    <a:p>
+                      <a:pPr algn="l" indent="0" marL="0">
+                        <a:buNone/>
+                      </a:pPr>
+                      <a:r>
+                        <a:rPr lang="en-US" sz="1050" dirty="0">
+                          <a:solidFill>
+                            <a:srgbClr val="1F1235"/>
+                          </a:solidFill>
+                          <a:latin typeface="Calibri" pitchFamily="34" charset="0"/>
+                          <a:ea typeface="Calibri" pitchFamily="34" charset="-122"/>
+                          <a:cs typeface="Calibri" pitchFamily="34" charset="-120"/>
+                        </a:rPr>
+                        <a:t>Costo vs. contratación local (−60%)</a:t>
+                      </a:r>
+                      <a:endParaRPr lang="en-US" sz="1050" dirty="0">
+                        <a:latin typeface="Calibri" charset="0"/>
+                        <a:ea typeface="Calibri" charset="0"/>
+                        <a:cs typeface="Calibri" charset="0"/>
+                      </a:endParaRPr>
+                    </a:p>
+                  </a:txBody>
+                  <a:tcPr marL="54864" marR="54864" marT="0" marB="0" anchor="ctr">
+                    <a:lnL w="0" cap="flat" cmpd="sng" algn="ctr">
+                      <a:noFill/>
+                    </a:lnL>
+                    <a:lnR w="0" cap="flat" cmpd="sng" algn="ctr">
+                      <a:noFill/>
+                    </a:lnR>
+                    <a:lnT w="0" cap="flat" cmpd="sng" algn="ctr">
+                      <a:noFill/>
+                    </a:lnT>
+                    <a:lnB w="0" cap="flat" cmpd="sng" algn="ctr">
+                      <a:noFill/>
+                    </a:lnB>
+                    <a:solidFill>
+                      <a:srgbClr val="F3F0FA"/>
+                    </a:solidFill>
+                  </a:tcPr>
+                </a:tc>
+                <a:tc>
+                  <a:txBody>
+                    <a:bodyPr/>
+                    <a:lstStyle/>
+                    <a:p>
+                      <a:pPr algn="l" indent="0" marL="0">
+                        <a:buNone/>
+                      </a:pPr>
+                      <a:r>
+                        <a:rPr lang="en-US" sz="1050" dirty="0">
+                          <a:solidFill>
+                            <a:srgbClr val="1F1235"/>
+                          </a:solidFill>
+                          <a:latin typeface="Calibri" pitchFamily="34" charset="0"/>
+                          <a:ea typeface="Calibri" pitchFamily="34" charset="-122"/>
+                          <a:cs typeface="Calibri" pitchFamily="34" charset="-120"/>
+                        </a:rPr>
+                        <a:t>Estático 4:5</a:t>
+                      </a:r>
+                      <a:endParaRPr lang="en-US" sz="1050" dirty="0">
+                        <a:latin typeface="Calibri" charset="0"/>
+                        <a:ea typeface="Calibri" charset="0"/>
+                        <a:cs typeface="Calibri" charset="0"/>
+                      </a:endParaRPr>
+                    </a:p>
+                  </a:txBody>
+                  <a:tcPr marL="54864" marR="54864" marT="0" marB="0" anchor="ctr">
+                    <a:lnL w="0" cap="flat" cmpd="sng" algn="ctr">
+                      <a:noFill/>
+                    </a:lnL>
+                    <a:lnR w="0" cap="flat" cmpd="sng" algn="ctr">
+                      <a:noFill/>
+                    </a:lnR>
+                    <a:lnT w="0" cap="flat" cmpd="sng" algn="ctr">
+                      <a:noFill/>
+                    </a:lnT>
+                    <a:lnB w="0" cap="flat" cmpd="sng" algn="ctr">
+                      <a:noFill/>
+                    </a:lnB>
+                    <a:solidFill>
+                      <a:srgbClr val="F3F0FA"/>
+                    </a:solidFill>
+                  </a:tcPr>
+                </a:tc>
+                <a:tc>
+                  <a:txBody>
+                    <a:bodyPr/>
+                    <a:lstStyle/>
+                    <a:p>
+                      <a:pPr algn="l" indent="0" marL="0">
+                        <a:buNone/>
+                      </a:pPr>
+                      <a:r>
+                        <a:rPr lang="en-US" sz="1050" dirty="0">
+                          <a:solidFill>
+                            <a:srgbClr val="1F1235"/>
+                          </a:solidFill>
+                          <a:latin typeface="Calibri" pitchFamily="34" charset="0"/>
+                          <a:ea typeface="Calibri" pitchFamily="34" charset="-122"/>
+                          <a:cs typeface="Calibri" pitchFamily="34" charset="-120"/>
+                        </a:rPr>
+                        <a:t>"Local hire vs. Orchid"</a:t>
+                      </a:r>
+                      <a:endParaRPr lang="en-US" sz="1050" dirty="0">
+                        <a:latin typeface="Calibri" charset="0"/>
+                        <a:ea typeface="Calibri" charset="0"/>
+                        <a:cs typeface="Calibri" charset="0"/>
+                      </a:endParaRPr>
+                    </a:p>
+                  </a:txBody>
+                  <a:tcPr marL="54864" marR="54864" marT="0" marB="0" anchor="ctr">
+                    <a:lnL w="0" cap="flat" cmpd="sng" algn="ctr">
+                      <a:noFill/>
+                    </a:lnL>
+                    <a:lnR w="0" cap="flat" cmpd="sng" algn="ctr">
+                      <a:noFill/>
+                    </a:lnR>
+                    <a:lnT w="0" cap="flat" cmpd="sng" algn="ctr">
+                      <a:noFill/>
+                    </a:lnT>
+                    <a:lnB w="0" cap="flat" cmpd="sng" algn="ctr">
+                      <a:noFill/>
+                    </a:lnB>
+                    <a:solidFill>
+                      <a:srgbClr val="F3F0FA"/>
+                    </a:solidFill>
+                  </a:tcPr>
+                </a:tc>
+              </a:tr>
+              <a:tr h="329184">
+                <a:tc>
+                  <a:txBody>
+                    <a:bodyPr/>
+                    <a:lstStyle/>
+                    <a:p>
+                      <a:pPr algn="ctr" indent="0" marL="0">
+                        <a:buNone/>
+                      </a:pPr>
+                      <a:r>
+                        <a:rPr lang="en-US" sz="1050" b="1" dirty="0">
+                          <a:solidFill>
+                            <a:srgbClr val="3B1C78"/>
+                          </a:solidFill>
+                          <a:latin typeface="Calibri" pitchFamily="34" charset="0"/>
+                          <a:ea typeface="Calibri" pitchFamily="34" charset="-122"/>
+                          <a:cs typeface="Calibri" pitchFamily="34" charset="-120"/>
+                        </a:rPr>
+                        <a:t>5</a:t>
+                      </a:r>
+                      <a:endParaRPr lang="en-US" sz="1050" dirty="0">
+                        <a:latin typeface="Calibri" charset="0"/>
+                        <a:ea typeface="Calibri" charset="0"/>
+                        <a:cs typeface="Calibri" charset="0"/>
+                      </a:endParaRPr>
+                    </a:p>
+                  </a:txBody>
+                  <a:tcPr marL="54864" marR="54864" marT="0" marB="0" anchor="ctr">
+                    <a:lnL w="0" cap="flat" cmpd="sng" algn="ctr">
+                      <a:noFill/>
+                    </a:lnL>
+                    <a:lnR w="0" cap="flat" cmpd="sng" algn="ctr">
+                      <a:noFill/>
+                    </a:lnR>
+                    <a:lnT w="0" cap="flat" cmpd="sng" algn="ctr">
+                      <a:noFill/>
+                    </a:lnT>
+                    <a:lnB w="0" cap="flat" cmpd="sng" algn="ctr">
+                      <a:noFill/>
+                    </a:lnB>
+                    <a:solidFill>
+                      <a:srgbClr val="FFFFFF"/>
+                    </a:solidFill>
+                  </a:tcPr>
+                </a:tc>
+                <a:tc>
+                  <a:txBody>
+                    <a:bodyPr/>
+                    <a:lstStyle/>
+                    <a:p>
+                      <a:pPr algn="l" indent="0" marL="0">
+                        <a:buNone/>
+                      </a:pPr>
+                      <a:r>
+                        <a:rPr lang="en-US" sz="1050" dirty="0">
+                          <a:solidFill>
+                            <a:srgbClr val="1F1235"/>
+                          </a:solidFill>
+                          <a:latin typeface="Calibri" pitchFamily="34" charset="0"/>
+                          <a:ea typeface="Calibri" pitchFamily="34" charset="-122"/>
+                          <a:cs typeface="Calibri" pitchFamily="34" charset="-120"/>
+                        </a:rPr>
+                        <a:t>Dueños de negocio</a:t>
+                      </a:r>
+                      <a:endParaRPr lang="en-US" sz="1050" dirty="0">
+                        <a:latin typeface="Calibri" charset="0"/>
+                        <a:ea typeface="Calibri" charset="0"/>
+                        <a:cs typeface="Calibri" charset="0"/>
+                      </a:endParaRPr>
+                    </a:p>
+                  </a:txBody>
+                  <a:tcPr marL="54864" marR="54864" marT="0" marB="0" anchor="ctr">
+                    <a:lnL w="0" cap="flat" cmpd="sng" algn="ctr">
+                      <a:noFill/>
+                    </a:lnL>
+                    <a:lnR w="0" cap="flat" cmpd="sng" algn="ctr">
+                      <a:noFill/>
+                    </a:lnR>
+                    <a:lnT w="0" cap="flat" cmpd="sng" algn="ctr">
+                      <a:noFill/>
+                    </a:lnT>
+                    <a:lnB w="0" cap="flat" cmpd="sng" algn="ctr">
+                      <a:noFill/>
+                    </a:lnB>
+                    <a:solidFill>
+                      <a:srgbClr val="FFFFFF"/>
+                    </a:solidFill>
+                  </a:tcPr>
+                </a:tc>
+                <a:tc>
+                  <a:txBody>
+                    <a:bodyPr/>
+                    <a:lstStyle/>
+                    <a:p>
+                      <a:pPr algn="l" indent="0" marL="0">
+                        <a:buNone/>
+                      </a:pPr>
+                      <a:r>
+                        <a:rPr lang="en-US" sz="1050" dirty="0">
+                          <a:solidFill>
+                            <a:srgbClr val="1F1235"/>
+                          </a:solidFill>
+                          <a:latin typeface="Calibri" pitchFamily="34" charset="0"/>
+                          <a:ea typeface="Calibri" pitchFamily="34" charset="-122"/>
+                          <a:cs typeface="Calibri" pitchFamily="34" charset="-120"/>
+                        </a:rPr>
+                        <a:t>Precio: $1,450 setup + desde $1,000/mes</a:t>
+                      </a:r>
+                      <a:endParaRPr lang="en-US" sz="1050" dirty="0">
+                        <a:latin typeface="Calibri" charset="0"/>
+                        <a:ea typeface="Calibri" charset="0"/>
+                        <a:cs typeface="Calibri" charset="0"/>
+                      </a:endParaRPr>
+                    </a:p>
+                  </a:txBody>
+                  <a:tcPr marL="54864" marR="54864" marT="0" marB="0" anchor="ctr">
+                    <a:lnL w="0" cap="flat" cmpd="sng" algn="ctr">
+                      <a:noFill/>
+                    </a:lnL>
+                    <a:lnR w="0" cap="flat" cmpd="sng" algn="ctr">
+                      <a:noFill/>
+                    </a:lnR>
+                    <a:lnT w="0" cap="flat" cmpd="sng" algn="ctr">
+                      <a:noFill/>
+                    </a:lnT>
+                    <a:lnB w="0" cap="flat" cmpd="sng" algn="ctr">
+                      <a:noFill/>
+                    </a:lnB>
+                    <a:solidFill>
+                      <a:srgbClr val="FFFFFF"/>
+                    </a:solidFill>
+                  </a:tcPr>
+                </a:tc>
+                <a:tc>
+                  <a:txBody>
+                    <a:bodyPr/>
+                    <a:lstStyle/>
+                    <a:p>
+                      <a:pPr algn="l" indent="0" marL="0">
+                        <a:buNone/>
+                      </a:pPr>
+                      <a:r>
+                        <a:rPr lang="en-US" sz="1050" dirty="0">
+                          <a:solidFill>
+                            <a:srgbClr val="1F1235"/>
+                          </a:solidFill>
+                          <a:latin typeface="Calibri" pitchFamily="34" charset="0"/>
+                          <a:ea typeface="Calibri" pitchFamily="34" charset="-122"/>
+                          <a:cs typeface="Calibri" pitchFamily="34" charset="-120"/>
+                        </a:rPr>
+                        <a:t>Estático 1:1</a:t>
+                      </a:r>
+                      <a:endParaRPr lang="en-US" sz="1050" dirty="0">
+                        <a:latin typeface="Calibri" charset="0"/>
+                        <a:ea typeface="Calibri" charset="0"/>
+                        <a:cs typeface="Calibri" charset="0"/>
+                      </a:endParaRPr>
+                    </a:p>
+                  </a:txBody>
+                  <a:tcPr marL="54864" marR="54864" marT="0" marB="0" anchor="ctr">
+                    <a:lnL w="0" cap="flat" cmpd="sng" algn="ctr">
+                      <a:noFill/>
+                    </a:lnL>
+                    <a:lnR w="0" cap="flat" cmpd="sng" algn="ctr">
+                      <a:noFill/>
+                    </a:lnR>
+                    <a:lnT w="0" cap="flat" cmpd="sng" algn="ctr">
+                      <a:noFill/>
+                    </a:lnT>
+                    <a:lnB w="0" cap="flat" cmpd="sng" algn="ctr">
+                      <a:noFill/>
+                    </a:lnB>
+                    <a:solidFill>
+                      <a:srgbClr val="FFFFFF"/>
+                    </a:solidFill>
+                  </a:tcPr>
+                </a:tc>
+                <a:tc>
+                  <a:txBody>
+                    <a:bodyPr/>
+                    <a:lstStyle/>
+                    <a:p>
+                      <a:pPr algn="l" indent="0" marL="0">
+                        <a:buNone/>
+                      </a:pPr>
+                      <a:r>
+                        <a:rPr lang="en-US" sz="1050" dirty="0">
+                          <a:solidFill>
+                            <a:srgbClr val="1F1235"/>
+                          </a:solidFill>
+                          <a:latin typeface="Calibri" pitchFamily="34" charset="0"/>
+                          <a:ea typeface="Calibri" pitchFamily="34" charset="-122"/>
+                          <a:cs typeface="Calibri" pitchFamily="34" charset="-120"/>
+                        </a:rPr>
+                        <a:t>"VA pricing, no surprises"</a:t>
+                      </a:r>
+                      <a:endParaRPr lang="en-US" sz="1050" dirty="0">
+                        <a:latin typeface="Calibri" charset="0"/>
+                        <a:ea typeface="Calibri" charset="0"/>
+                        <a:cs typeface="Calibri" charset="0"/>
+                      </a:endParaRPr>
+                    </a:p>
+                  </a:txBody>
+                  <a:tcPr marL="54864" marR="54864" marT="0" marB="0" anchor="ctr">
+                    <a:lnL w="0" cap="flat" cmpd="sng" algn="ctr">
+                      <a:noFill/>
+                    </a:lnL>
+                    <a:lnR w="0" cap="flat" cmpd="sng" algn="ctr">
+                      <a:noFill/>
+                    </a:lnR>
+                    <a:lnT w="0" cap="flat" cmpd="sng" algn="ctr">
+                      <a:noFill/>
+                    </a:lnT>
+                    <a:lnB w="0" cap="flat" cmpd="sng" algn="ctr">
+                      <a:noFill/>
+                    </a:lnB>
+                    <a:solidFill>
+                      <a:srgbClr val="FFFFFF"/>
+                    </a:solidFill>
+                  </a:tcPr>
+                </a:tc>
+              </a:tr>
+              <a:tr h="329184">
+                <a:tc>
+                  <a:txBody>
+                    <a:bodyPr/>
+                    <a:lstStyle/>
+                    <a:p>
+                      <a:pPr algn="ctr" indent="0" marL="0">
+                        <a:buNone/>
+                      </a:pPr>
+                      <a:r>
+                        <a:rPr lang="en-US" sz="1050" b="1" dirty="0">
+                          <a:solidFill>
+                            <a:srgbClr val="3B1C78"/>
+                          </a:solidFill>
+                          <a:latin typeface="Calibri" pitchFamily="34" charset="0"/>
+                          <a:ea typeface="Calibri" pitchFamily="34" charset="-122"/>
+                          <a:cs typeface="Calibri" pitchFamily="34" charset="-120"/>
+                        </a:rPr>
+                        <a:t>6</a:t>
+                      </a:r>
+                      <a:endParaRPr lang="en-US" sz="1050" dirty="0">
+                        <a:latin typeface="Calibri" charset="0"/>
+                        <a:ea typeface="Calibri" charset="0"/>
+                        <a:cs typeface="Calibri" charset="0"/>
+                      </a:endParaRPr>
+                    </a:p>
+                  </a:txBody>
+                  <a:tcPr marL="54864" marR="54864" marT="0" marB="0" anchor="ctr">
+                    <a:lnL w="0" cap="flat" cmpd="sng" algn="ctr">
+                      <a:noFill/>
+                    </a:lnL>
+                    <a:lnR w="0" cap="flat" cmpd="sng" algn="ctr">
+                      <a:noFill/>
+                    </a:lnR>
+                    <a:lnT w="0" cap="flat" cmpd="sng" algn="ctr">
+                      <a:noFill/>
+                    </a:lnT>
+                    <a:lnB w="0" cap="flat" cmpd="sng" algn="ctr">
+                      <a:noFill/>
+                    </a:lnB>
+                    <a:solidFill>
+                      <a:srgbClr val="F3F0FA"/>
+                    </a:solidFill>
+                  </a:tcPr>
+                </a:tc>
+                <a:tc>
+                  <a:txBody>
+                    <a:bodyPr/>
+                    <a:lstStyle/>
+                    <a:p>
+                      <a:pPr algn="l" indent="0" marL="0">
+                        <a:buNone/>
+                      </a:pPr>
+                      <a:r>
+                        <a:rPr lang="en-US" sz="1050" dirty="0">
+                          <a:solidFill>
+                            <a:srgbClr val="1F1235"/>
+                          </a:solidFill>
+                          <a:latin typeface="Calibri" pitchFamily="34" charset="0"/>
+                          <a:ea typeface="Calibri" pitchFamily="34" charset="-122"/>
+                          <a:cs typeface="Calibri" pitchFamily="34" charset="-120"/>
+                        </a:rPr>
+                        <a:t>Todos</a:t>
+                      </a:r>
+                      <a:endParaRPr lang="en-US" sz="1050" dirty="0">
+                        <a:latin typeface="Calibri" charset="0"/>
+                        <a:ea typeface="Calibri" charset="0"/>
+                        <a:cs typeface="Calibri" charset="0"/>
+                      </a:endParaRPr>
+                    </a:p>
+                  </a:txBody>
+                  <a:tcPr marL="54864" marR="54864" marT="0" marB="0" anchor="ctr">
+                    <a:lnL w="0" cap="flat" cmpd="sng" algn="ctr">
+                      <a:noFill/>
+                    </a:lnL>
+                    <a:lnR w="0" cap="flat" cmpd="sng" algn="ctr">
+                      <a:noFill/>
+                    </a:lnR>
+                    <a:lnT w="0" cap="flat" cmpd="sng" algn="ctr">
+                      <a:noFill/>
+                    </a:lnT>
+                    <a:lnB w="0" cap="flat" cmpd="sng" algn="ctr">
+                      <a:noFill/>
+                    </a:lnB>
+                    <a:solidFill>
+                      <a:srgbClr val="F3F0FA"/>
+                    </a:solidFill>
+                  </a:tcPr>
+                </a:tc>
+                <a:tc>
+                  <a:txBody>
+                    <a:bodyPr/>
+                    <a:lstStyle/>
+                    <a:p>
+                      <a:pPr algn="l" indent="0" marL="0">
+                        <a:buNone/>
+                      </a:pPr>
+                      <a:r>
+                        <a:rPr lang="en-US" sz="1050" dirty="0">
+                          <a:solidFill>
+                            <a:srgbClr val="1F1235"/>
+                          </a:solidFill>
+                          <a:latin typeface="Calibri" pitchFamily="34" charset="0"/>
+                          <a:ea typeface="Calibri" pitchFamily="34" charset="-122"/>
+                          <a:cs typeface="Calibri" pitchFamily="34" charset="-120"/>
+                        </a:rPr>
+                        <a:t>Testimonio de cliente (KW)</a:t>
+                      </a:r>
+                      <a:endParaRPr lang="en-US" sz="1050" dirty="0">
+                        <a:latin typeface="Calibri" charset="0"/>
+                        <a:ea typeface="Calibri" charset="0"/>
+                        <a:cs typeface="Calibri" charset="0"/>
+                      </a:endParaRPr>
+                    </a:p>
+                  </a:txBody>
+                  <a:tcPr marL="54864" marR="54864" marT="0" marB="0" anchor="ctr">
+                    <a:lnL w="0" cap="flat" cmpd="sng" algn="ctr">
+                      <a:noFill/>
+                    </a:lnL>
+                    <a:lnR w="0" cap="flat" cmpd="sng" algn="ctr">
+                      <a:noFill/>
+                    </a:lnR>
+                    <a:lnT w="0" cap="flat" cmpd="sng" algn="ctr">
+                      <a:noFill/>
+                    </a:lnT>
+                    <a:lnB w="0" cap="flat" cmpd="sng" algn="ctr">
+                      <a:noFill/>
+                    </a:lnB>
+                    <a:solidFill>
+                      <a:srgbClr val="F3F0FA"/>
+                    </a:solidFill>
+                  </a:tcPr>
+                </a:tc>
+                <a:tc>
+                  <a:txBody>
+                    <a:bodyPr/>
+                    <a:lstStyle/>
+                    <a:p>
+                      <a:pPr algn="l" indent="0" marL="0">
+                        <a:buNone/>
+                      </a:pPr>
+                      <a:r>
+                        <a:rPr lang="en-US" sz="1050" dirty="0">
+                          <a:solidFill>
+                            <a:srgbClr val="1F1235"/>
+                          </a:solidFill>
+                          <a:latin typeface="Calibri" pitchFamily="34" charset="0"/>
+                          <a:ea typeface="Calibri" pitchFamily="34" charset="-122"/>
+                          <a:cs typeface="Calibri" pitchFamily="34" charset="-120"/>
+                        </a:rPr>
+                        <a:t>Video testimonial</a:t>
+                      </a:r>
+                      <a:endParaRPr lang="en-US" sz="1050" dirty="0">
+                        <a:latin typeface="Calibri" charset="0"/>
+                        <a:ea typeface="Calibri" charset="0"/>
+                        <a:cs typeface="Calibri" charset="0"/>
+                      </a:endParaRPr>
+                    </a:p>
+                  </a:txBody>
+                  <a:tcPr marL="54864" marR="54864" marT="0" marB="0" anchor="ctr">
+                    <a:lnL w="0" cap="flat" cmpd="sng" algn="ctr">
+                      <a:noFill/>
+                    </a:lnL>
+                    <a:lnR w="0" cap="flat" cmpd="sng" algn="ctr">
+                      <a:noFill/>
+                    </a:lnR>
+                    <a:lnT w="0" cap="flat" cmpd="sng" algn="ctr">
+                      <a:noFill/>
+                    </a:lnT>
+                    <a:lnB w="0" cap="flat" cmpd="sng" algn="ctr">
+                      <a:noFill/>
+                    </a:lnB>
+                    <a:solidFill>
+                      <a:srgbClr val="F3F0FA"/>
+                    </a:solidFill>
+                  </a:tcPr>
+                </a:tc>
+                <a:tc>
+                  <a:txBody>
+                    <a:bodyPr/>
+                    <a:lstStyle/>
+                    <a:p>
+                      <a:pPr algn="l" indent="0" marL="0">
+                        <a:buNone/>
+                      </a:pPr>
+                      <a:r>
+                        <a:rPr lang="en-US" sz="1050" dirty="0">
+                          <a:solidFill>
+                            <a:srgbClr val="1F1235"/>
+                          </a:solidFill>
+                          <a:latin typeface="Calibri" pitchFamily="34" charset="0"/>
+                          <a:ea typeface="Calibri" pitchFamily="34" charset="-122"/>
+                          <a:cs typeface="Calibri" pitchFamily="34" charset="-120"/>
+                        </a:rPr>
+                        <a:t>Cliente en cámara, 1er segundo</a:t>
+                      </a:r>
+                      <a:endParaRPr lang="en-US" sz="1050" dirty="0">
+                        <a:latin typeface="Calibri" charset="0"/>
+                        <a:ea typeface="Calibri" charset="0"/>
+                        <a:cs typeface="Calibri" charset="0"/>
+                      </a:endParaRPr>
+                    </a:p>
+                  </a:txBody>
+                  <a:tcPr marL="54864" marR="54864" marT="0" marB="0" anchor="ctr">
+                    <a:lnL w="0" cap="flat" cmpd="sng" algn="ctr">
+                      <a:noFill/>
+                    </a:lnL>
+                    <a:lnR w="0" cap="flat" cmpd="sng" algn="ctr">
+                      <a:noFill/>
+                    </a:lnR>
+                    <a:lnT w="0" cap="flat" cmpd="sng" algn="ctr">
+                      <a:noFill/>
+                    </a:lnT>
+                    <a:lnB w="0" cap="flat" cmpd="sng" algn="ctr">
+                      <a:noFill/>
+                    </a:lnB>
+                    <a:solidFill>
+                      <a:srgbClr val="F3F0FA"/>
+                    </a:solidFill>
+                  </a:tcPr>
+                </a:tc>
+              </a:tr>
+              <a:tr h="329184">
+                <a:tc>
+                  <a:txBody>
+                    <a:bodyPr/>
+                    <a:lstStyle/>
+                    <a:p>
+                      <a:pPr algn="ctr" indent="0" marL="0">
+                        <a:buNone/>
+                      </a:pPr>
+                      <a:r>
+                        <a:rPr lang="en-US" sz="1050" b="1" dirty="0">
+                          <a:solidFill>
+                            <a:srgbClr val="3B1C78"/>
+                          </a:solidFill>
+                          <a:latin typeface="Calibri" pitchFamily="34" charset="0"/>
+                          <a:ea typeface="Calibri" pitchFamily="34" charset="-122"/>
+                          <a:cs typeface="Calibri" pitchFamily="34" charset="-120"/>
+                        </a:rPr>
+                        <a:t>7</a:t>
+                      </a:r>
+                      <a:endParaRPr lang="en-US" sz="1050" dirty="0">
+                        <a:latin typeface="Calibri" charset="0"/>
+                        <a:ea typeface="Calibri" charset="0"/>
+                        <a:cs typeface="Calibri" charset="0"/>
+                      </a:endParaRPr>
+                    </a:p>
+                  </a:txBody>
+                  <a:tcPr marL="54864" marR="54864" marT="0" marB="0" anchor="ctr">
+                    <a:lnL w="0" cap="flat" cmpd="sng" algn="ctr">
+                      <a:noFill/>
+                    </a:lnL>
+                    <a:lnR w="0" cap="flat" cmpd="sng" algn="ctr">
+                      <a:noFill/>
+                    </a:lnR>
+                    <a:lnT w="0" cap="flat" cmpd="sng" algn="ctr">
+                      <a:noFill/>
+                    </a:lnT>
+                    <a:lnB w="0" cap="flat" cmpd="sng" algn="ctr">
+                      <a:noFill/>
+                    </a:lnB>
+                    <a:solidFill>
+                      <a:srgbClr val="FFFFFF"/>
+                    </a:solidFill>
+                  </a:tcPr>
+                </a:tc>
+                <a:tc>
+                  <a:txBody>
+                    <a:bodyPr/>
+                    <a:lstStyle/>
+                    <a:p>
+                      <a:pPr algn="l" indent="0" marL="0">
+                        <a:buNone/>
+                      </a:pPr>
+                      <a:r>
+                        <a:rPr lang="en-US" sz="1050" dirty="0">
+                          <a:solidFill>
+                            <a:srgbClr val="1F1235"/>
+                          </a:solidFill>
+                          <a:latin typeface="Calibri" pitchFamily="34" charset="0"/>
+                          <a:ea typeface="Calibri" pitchFamily="34" charset="-122"/>
+                          <a:cs typeface="Calibri" pitchFamily="34" charset="-120"/>
+                        </a:rPr>
+                        <a:t>Todos</a:t>
+                      </a:r>
+                      <a:endParaRPr lang="en-US" sz="1050" dirty="0">
+                        <a:latin typeface="Calibri" charset="0"/>
+                        <a:ea typeface="Calibri" charset="0"/>
+                        <a:cs typeface="Calibri" charset="0"/>
+                      </a:endParaRPr>
+                    </a:p>
+                  </a:txBody>
+                  <a:tcPr marL="54864" marR="54864" marT="0" marB="0" anchor="ctr">
+                    <a:lnL w="0" cap="flat" cmpd="sng" algn="ctr">
+                      <a:noFill/>
+                    </a:lnL>
+                    <a:lnR w="0" cap="flat" cmpd="sng" algn="ctr">
+                      <a:noFill/>
+                    </a:lnR>
+                    <a:lnT w="0" cap="flat" cmpd="sng" algn="ctr">
+                      <a:noFill/>
+                    </a:lnT>
+                    <a:lnB w="0" cap="flat" cmpd="sng" algn="ctr">
+                      <a:noFill/>
+                    </a:lnB>
+                    <a:solidFill>
+                      <a:srgbClr val="FFFFFF"/>
+                    </a:solidFill>
+                  </a:tcPr>
+                </a:tc>
+                <a:tc>
+                  <a:txBody>
+                    <a:bodyPr/>
+                    <a:lstStyle/>
+                    <a:p>
+                      <a:pPr algn="l" indent="0" marL="0">
+                        <a:buNone/>
+                      </a:pPr>
+                      <a:r>
+                        <a:rPr lang="en-US" sz="1050" dirty="0">
+                          <a:solidFill>
+                            <a:srgbClr val="1F1235"/>
+                          </a:solidFill>
+                          <a:latin typeface="Calibri" pitchFamily="34" charset="0"/>
+                          <a:ea typeface="Calibri" pitchFamily="34" charset="-122"/>
+                          <a:cs typeface="Calibri" pitchFamily="34" charset="-120"/>
+                        </a:rPr>
+                        <a:t>Proceso de selección y garantía</a:t>
+                      </a:r>
+                      <a:endParaRPr lang="en-US" sz="1050" dirty="0">
+                        <a:latin typeface="Calibri" charset="0"/>
+                        <a:ea typeface="Calibri" charset="0"/>
+                        <a:cs typeface="Calibri" charset="0"/>
+                      </a:endParaRPr>
+                    </a:p>
+                  </a:txBody>
+                  <a:tcPr marL="54864" marR="54864" marT="0" marB="0" anchor="ctr">
+                    <a:lnL w="0" cap="flat" cmpd="sng" algn="ctr">
+                      <a:noFill/>
+                    </a:lnL>
+                    <a:lnR w="0" cap="flat" cmpd="sng" algn="ctr">
+                      <a:noFill/>
+                    </a:lnR>
+                    <a:lnT w="0" cap="flat" cmpd="sng" algn="ctr">
+                      <a:noFill/>
+                    </a:lnT>
+                    <a:lnB w="0" cap="flat" cmpd="sng" algn="ctr">
+                      <a:noFill/>
+                    </a:lnB>
+                    <a:solidFill>
+                      <a:srgbClr val="FFFFFF"/>
+                    </a:solidFill>
+                  </a:tcPr>
+                </a:tc>
+                <a:tc>
+                  <a:txBody>
+                    <a:bodyPr/>
+                    <a:lstStyle/>
+                    <a:p>
+                      <a:pPr algn="l" indent="0" marL="0">
+                        <a:buNone/>
+                      </a:pPr>
+                      <a:r>
+                        <a:rPr lang="en-US" sz="1050" dirty="0">
+                          <a:solidFill>
+                            <a:srgbClr val="1F1235"/>
+                          </a:solidFill>
+                          <a:latin typeface="Calibri" pitchFamily="34" charset="0"/>
+                          <a:ea typeface="Calibri" pitchFamily="34" charset="-122"/>
+                          <a:cs typeface="Calibri" pitchFamily="34" charset="-120"/>
+                        </a:rPr>
+                        <a:t>Video founder</a:t>
+                      </a:r>
+                      <a:endParaRPr lang="en-US" sz="1050" dirty="0">
+                        <a:latin typeface="Calibri" charset="0"/>
+                        <a:ea typeface="Calibri" charset="0"/>
+                        <a:cs typeface="Calibri" charset="0"/>
+                      </a:endParaRPr>
+                    </a:p>
+                  </a:txBody>
+                  <a:tcPr marL="54864" marR="54864" marT="0" marB="0" anchor="ctr">
+                    <a:lnL w="0" cap="flat" cmpd="sng" algn="ctr">
+                      <a:noFill/>
+                    </a:lnL>
+                    <a:lnR w="0" cap="flat" cmpd="sng" algn="ctr">
+                      <a:noFill/>
+                    </a:lnR>
+                    <a:lnT w="0" cap="flat" cmpd="sng" algn="ctr">
+                      <a:noFill/>
+                    </a:lnT>
+                    <a:lnB w="0" cap="flat" cmpd="sng" algn="ctr">
+                      <a:noFill/>
+                    </a:lnB>
+                    <a:solidFill>
+                      <a:srgbClr val="FFFFFF"/>
+                    </a:solidFill>
+                  </a:tcPr>
+                </a:tc>
+                <a:tc>
+                  <a:txBody>
+                    <a:bodyPr/>
+                    <a:lstStyle/>
+                    <a:p>
+                      <a:pPr algn="l" indent="0" marL="0">
+                        <a:buNone/>
+                      </a:pPr>
+                      <a:r>
+                        <a:rPr lang="en-US" sz="1050" dirty="0">
+                          <a:solidFill>
+                            <a:srgbClr val="1F1235"/>
+                          </a:solidFill>
+                          <a:latin typeface="Calibri" pitchFamily="34" charset="0"/>
+                          <a:ea typeface="Calibri" pitchFamily="34" charset="-122"/>
+                          <a:cs typeface="Calibri" pitchFamily="34" charset="-120"/>
+                        </a:rPr>
+                        <a:t>"How we vet your assistant"</a:t>
+                      </a:r>
+                      <a:endParaRPr lang="en-US" sz="1050" dirty="0">
+                        <a:latin typeface="Calibri" charset="0"/>
+                        <a:ea typeface="Calibri" charset="0"/>
+                        <a:cs typeface="Calibri" charset="0"/>
+                      </a:endParaRPr>
+                    </a:p>
+                  </a:txBody>
+                  <a:tcPr marL="54864" marR="54864" marT="0" marB="0" anchor="ctr">
+                    <a:lnL w="0" cap="flat" cmpd="sng" algn="ctr">
+                      <a:noFill/>
+                    </a:lnL>
+                    <a:lnR w="0" cap="flat" cmpd="sng" algn="ctr">
+                      <a:noFill/>
+                    </a:lnR>
+                    <a:lnT w="0" cap="flat" cmpd="sng" algn="ctr">
+                      <a:noFill/>
+                    </a:lnT>
+                    <a:lnB w="0" cap="flat" cmpd="sng" algn="ctr">
+                      <a:noFill/>
+                    </a:lnB>
+                    <a:solidFill>
+                      <a:srgbClr val="FFFFFF"/>
+                    </a:solidFill>
+                  </a:tcPr>
+                </a:tc>
+              </a:tr>
+              <a:tr h="329184">
+                <a:tc>
+                  <a:txBody>
+                    <a:bodyPr/>
+                    <a:lstStyle/>
+                    <a:p>
+                      <a:pPr algn="ctr" indent="0" marL="0">
+                        <a:buNone/>
+                      </a:pPr>
+                      <a:r>
+                        <a:rPr lang="en-US" sz="1050" b="1" dirty="0">
+                          <a:solidFill>
+                            <a:srgbClr val="3B1C78"/>
+                          </a:solidFill>
+                          <a:latin typeface="Calibri" pitchFamily="34" charset="0"/>
+                          <a:ea typeface="Calibri" pitchFamily="34" charset="-122"/>
+                          <a:cs typeface="Calibri" pitchFamily="34" charset="-120"/>
+                        </a:rPr>
+                        <a:t>8</a:t>
+                      </a:r>
+                      <a:endParaRPr lang="en-US" sz="1050" dirty="0">
+                        <a:latin typeface="Calibri" charset="0"/>
+                        <a:ea typeface="Calibri" charset="0"/>
+                        <a:cs typeface="Calibri" charset="0"/>
+                      </a:endParaRPr>
+                    </a:p>
+                  </a:txBody>
+                  <a:tcPr marL="54864" marR="54864" marT="0" marB="0" anchor="ctr">
+                    <a:lnL w="0" cap="flat" cmpd="sng" algn="ctr">
+                      <a:noFill/>
+                    </a:lnL>
+                    <a:lnR w="0" cap="flat" cmpd="sng" algn="ctr">
+                      <a:noFill/>
+                    </a:lnR>
+                    <a:lnT w="0" cap="flat" cmpd="sng" algn="ctr">
+                      <a:noFill/>
+                    </a:lnT>
+                    <a:lnB w="0" cap="flat" cmpd="sng" algn="ctr">
+                      <a:noFill/>
+                    </a:lnB>
+                    <a:solidFill>
+                      <a:srgbClr val="F3F0FA"/>
+                    </a:solidFill>
+                  </a:tcPr>
+                </a:tc>
+                <a:tc>
+                  <a:txBody>
+                    <a:bodyPr/>
+                    <a:lstStyle/>
+                    <a:p>
+                      <a:pPr algn="l" indent="0" marL="0">
+                        <a:buNone/>
+                      </a:pPr>
+                      <a:r>
+                        <a:rPr lang="en-US" sz="1050" dirty="0">
+                          <a:solidFill>
+                            <a:srgbClr val="1F1235"/>
+                          </a:solidFill>
+                          <a:latin typeface="Calibri" pitchFamily="34" charset="0"/>
+                          <a:ea typeface="Calibri" pitchFamily="34" charset="-122"/>
+                          <a:cs typeface="Calibri" pitchFamily="34" charset="-120"/>
+                        </a:rPr>
+                        <a:t>Healthcare / back office</a:t>
+                      </a:r>
+                      <a:endParaRPr lang="en-US" sz="1050" dirty="0">
+                        <a:latin typeface="Calibri" charset="0"/>
+                        <a:ea typeface="Calibri" charset="0"/>
+                        <a:cs typeface="Calibri" charset="0"/>
+                      </a:endParaRPr>
+                    </a:p>
+                  </a:txBody>
+                  <a:tcPr marL="54864" marR="54864" marT="0" marB="0" anchor="ctr">
+                    <a:lnL w="0" cap="flat" cmpd="sng" algn="ctr">
+                      <a:noFill/>
+                    </a:lnL>
+                    <a:lnR w="0" cap="flat" cmpd="sng" algn="ctr">
+                      <a:noFill/>
+                    </a:lnR>
+                    <a:lnT w="0" cap="flat" cmpd="sng" algn="ctr">
+                      <a:noFill/>
+                    </a:lnT>
+                    <a:lnB w="0" cap="flat" cmpd="sng" algn="ctr">
+                      <a:noFill/>
+                    </a:lnB>
+                    <a:solidFill>
+                      <a:srgbClr val="F3F0FA"/>
+                    </a:solidFill>
+                  </a:tcPr>
+                </a:tc>
+                <a:tc>
+                  <a:txBody>
+                    <a:bodyPr/>
+                    <a:lstStyle/>
+                    <a:p>
+                      <a:pPr algn="l" indent="0" marL="0">
+                        <a:buNone/>
+                      </a:pPr>
+                      <a:r>
+                        <a:rPr lang="en-US" sz="1050" dirty="0">
+                          <a:solidFill>
+                            <a:srgbClr val="1F1235"/>
+                          </a:solidFill>
+                          <a:latin typeface="Calibri" pitchFamily="34" charset="0"/>
+                          <a:ea typeface="Calibri" pitchFamily="34" charset="-122"/>
+                          <a:cs typeface="Calibri" pitchFamily="34" charset="-120"/>
+                        </a:rPr>
+                        <a:t>Recepción y administración</a:t>
+                      </a:r>
+                      <a:endParaRPr lang="en-US" sz="1050" dirty="0">
+                        <a:latin typeface="Calibri" charset="0"/>
+                        <a:ea typeface="Calibri" charset="0"/>
+                        <a:cs typeface="Calibri" charset="0"/>
+                      </a:endParaRPr>
+                    </a:p>
+                  </a:txBody>
+                  <a:tcPr marL="54864" marR="54864" marT="0" marB="0" anchor="ctr">
+                    <a:lnL w="0" cap="flat" cmpd="sng" algn="ctr">
+                      <a:noFill/>
+                    </a:lnL>
+                    <a:lnR w="0" cap="flat" cmpd="sng" algn="ctr">
+                      <a:noFill/>
+                    </a:lnR>
+                    <a:lnT w="0" cap="flat" cmpd="sng" algn="ctr">
+                      <a:noFill/>
+                    </a:lnT>
+                    <a:lnB w="0" cap="flat" cmpd="sng" algn="ctr">
+                      <a:noFill/>
+                    </a:lnB>
+                    <a:solidFill>
+                      <a:srgbClr val="F3F0FA"/>
+                    </a:solidFill>
+                  </a:tcPr>
+                </a:tc>
+                <a:tc>
+                  <a:txBody>
+                    <a:bodyPr/>
+                    <a:lstStyle/>
+                    <a:p>
+                      <a:pPr algn="l" indent="0" marL="0">
+                        <a:buNone/>
+                      </a:pPr>
+                      <a:r>
+                        <a:rPr lang="en-US" sz="1050" dirty="0">
+                          <a:solidFill>
+                            <a:srgbClr val="1F1235"/>
+                          </a:solidFill>
+                          <a:latin typeface="Calibri" pitchFamily="34" charset="0"/>
+                          <a:ea typeface="Calibri" pitchFamily="34" charset="-122"/>
+                          <a:cs typeface="Calibri" pitchFamily="34" charset="-120"/>
+                        </a:rPr>
+                        <a:t>Carrusel</a:t>
+                      </a:r>
+                      <a:endParaRPr lang="en-US" sz="1050" dirty="0">
+                        <a:latin typeface="Calibri" charset="0"/>
+                        <a:ea typeface="Calibri" charset="0"/>
+                        <a:cs typeface="Calibri" charset="0"/>
+                      </a:endParaRPr>
+                    </a:p>
+                  </a:txBody>
+                  <a:tcPr marL="54864" marR="54864" marT="0" marB="0" anchor="ctr">
+                    <a:lnL w="0" cap="flat" cmpd="sng" algn="ctr">
+                      <a:noFill/>
+                    </a:lnL>
+                    <a:lnR w="0" cap="flat" cmpd="sng" algn="ctr">
+                      <a:noFill/>
+                    </a:lnR>
+                    <a:lnT w="0" cap="flat" cmpd="sng" algn="ctr">
+                      <a:noFill/>
+                    </a:lnT>
+                    <a:lnB w="0" cap="flat" cmpd="sng" algn="ctr">
+                      <a:noFill/>
+                    </a:lnB>
+                    <a:solidFill>
+                      <a:srgbClr val="F3F0FA"/>
+                    </a:solidFill>
+                  </a:tcPr>
+                </a:tc>
+                <a:tc>
+                  <a:txBody>
+                    <a:bodyPr/>
+                    <a:lstStyle/>
+                    <a:p>
+                      <a:pPr algn="l" indent="0" marL="0">
+                        <a:buNone/>
+                      </a:pPr>
+                      <a:r>
+                        <a:rPr lang="en-US" sz="1050" dirty="0">
+                          <a:solidFill>
+                            <a:srgbClr val="1F1235"/>
+                          </a:solidFill>
+                          <a:latin typeface="Calibri" pitchFamily="34" charset="0"/>
+                          <a:ea typeface="Calibri" pitchFamily="34" charset="-122"/>
+                          <a:cs typeface="Calibri" pitchFamily="34" charset="-120"/>
+                        </a:rPr>
+                        <a:t>"For Medical Offices"</a:t>
+                      </a:r>
+                      <a:endParaRPr lang="en-US" sz="1050" dirty="0">
+                        <a:latin typeface="Calibri" charset="0"/>
+                        <a:ea typeface="Calibri" charset="0"/>
+                        <a:cs typeface="Calibri" charset="0"/>
+                      </a:endParaRPr>
+                    </a:p>
+                  </a:txBody>
+                  <a:tcPr marL="54864" marR="54864" marT="0" marB="0" anchor="ctr">
+                    <a:lnL w="0" cap="flat" cmpd="sng" algn="ctr">
+                      <a:noFill/>
+                    </a:lnL>
+                    <a:lnR w="0" cap="flat" cmpd="sng" algn="ctr">
+                      <a:noFill/>
+                    </a:lnR>
+                    <a:lnT w="0" cap="flat" cmpd="sng" algn="ctr">
+                      <a:noFill/>
+                    </a:lnT>
+                    <a:lnB w="0" cap="flat" cmpd="sng" algn="ctr">
+                      <a:noFill/>
+                    </a:lnB>
+                    <a:solidFill>
+                      <a:srgbClr val="F3F0FA"/>
+                    </a:solidFill>
+                  </a:tcPr>
+                </a:tc>
+              </a:tr>
+            </a:tbl>
+          </a:graphicData>
+        </a:graphic>
+      </p:graphicFrame>
+      <p:sp>
+        <p:nvSpPr>
+          <p:cNvPr id="4" name="Creative specs"/>
+          <p:cNvSpPr txBox="1"/>
+          <p:nvPr/>
+        </p:nvSpPr>
+        <p:spPr>
+          <a:xfrm>
+            <a:off x="457200" y="4069080"/>
+            <a:ext cx="8229600" cy="548640"/>
+          </a:xfrm>
+          <a:prstGeom prst="rect">
+            <a:avLst/>
+          </a:prstGeom>
+          <a:noFill/>
+          <a:ln/>
+        </p:spPr>
+        <p:txBody>
+          <a:bodyPr wrap="square" lIns="0" tIns="0" rIns="0" bIns="0" rtlCol="0" anchor="t"/>
+          <a:lstStyle/>
+          <a:p>
+            <a:pPr indent="0" marL="0">
+              <a:buNone/>
+            </a:pPr>
+            <a:r>
+              <a:rPr lang="en-US" sz="1100" b="1" dirty="0">
+                <a:solidFill>
+                  <a:schemeClr val="tx1"/>
+                </a:solidFill>
+              </a:rPr>
+              <a:t>Requisitos por pieza: </a:t>
+            </a:r>
+            <a:pPr indent="0" marL="0">
+              <a:buNone/>
+            </a:pPr>
+            <a:r>
+              <a:rPr lang="en-US" sz="1100" dirty="0">
+                <a:solidFill>
+                  <a:schemeClr val="tx1"/>
+                </a:solidFill>
+              </a:rPr>
+              <a:t>hook que nombre al comprador en los primeros 3 s, texto en pantalla, subtítulos, CTA "Book a free call", sin términos de empleo y una versión por placement (9:16 y 4:5).</a:t>
+            </a:r>
+            <a:endParaRPr lang="en-US" sz="1100" dirty="0"/>
+          </a:p>
+        </p:txBody>
+      </p:sp>
+      <p:sp>
+        <p:nvSpPr>
+          <p:cNvPr id="25" name="Slide Number Placeholder 0"/>
+          <p:cNvSpPr>
+            <a:spLocks noGrp="1"/>
+          </p:cNvSpPr>
+          <p:nvPr>
+            <p:ph type="sldNum" sz="quarter" idx="4294967295"/>
+          </p:nvPr>
+        </p:nvSpPr>
+        <p:spPr>
+          <a:xfrm>
+            <a:off x="8321040" y="4800600"/>
+            <a:ext cx="365760" cy="228600"/>
+          </a:xfrm>
+          <a:prstGeom prst="rect">
+            <a:avLst/>
+          </a:prstGeom>
+          <a:extLst>
+            <a:ext uri="{C572A759-6A51-4108-AA02-DFA0A04FC94B}">
+              <ma14:wrappingTextBoxFlag xmlns:ma14="http://schemas.microsoft.com/office/mac/drawingml/2011/main" val="0"/>
+            </a:ext>
+          </a:extLst>
+        </p:spPr>
+        <p:txBody>
+          <a:bodyPr/>
+          <a:lstStyle>
+            <a:lvl1pPr>
+              <a:defRPr sz="900">
+                <a:solidFill>
+                  <a:schemeClr val="accent6"/>
+                </a:solidFill>
+              </a:defRPr>
+            </a:lvl1pPr>
+          </a:lstStyle>
+          <a:p>
+            <a:pPr algn="r"/>
+            <a:fld id="{F7021451-1387-4CA6-816F-3879F97B5CBC}" type="slidenum">
+              <a:rPr b="0" lang="en-US"/>
+              <a:t>13</a:t>
+            </a:fld>
+            <a:endParaRPr lang="en-US"/>
+          </a:p>
+        </p:txBody>
+      </p:sp>
+    </p:spTree>
+  </p:cSld>
+  <p:clrMapOvr>
+    <a:masterClrMapping/>
+  </p:clrMapOvr>
+</p:sld>
+</file>
+
+<file path=ppt/slides/slide14.xml><?xml version="1.0" encoding="utf-8"?>
+<p:sld xmlns:a="http://schemas.openxmlformats.org/drawingml/2006/main" xmlns:r="http://schemas.openxmlformats.org/officeDocument/2006/relationships" xmlns:p="http://schemas.openxmlformats.org/presentationml/2006/main">
+  <p:cSld name="Slide 14">
+    <p:spTree>
+      <p:nvGrpSpPr>
+        <p:cNvPr id="1" name=""/>
+        <p:cNvGrpSpPr/>
+        <p:nvPr/>
+      </p:nvGrpSpPr>
+      <p:grpSpPr>
+        <a:xfrm>
+          <a:off x="0" y="0"/>
+          <a:ext cx="0" cy="0"/>
+          <a:chOff x="0" y="0"/>
+          <a:chExt cx="0" cy="0"/>
+        </a:xfrm>
+      </p:grpSpPr>
+      <p:sp>
+        <p:nvSpPr>
+          <p:cNvPr id="2" name="Text 0"/>
+          <p:cNvSpPr/>
+          <p:nvPr>
+            <p:ph idx="100" type="title" hasCustomPrompt="1"/>
+          </p:nvPr>
+        </p:nvSpPr>
+        <p:spPr>
+          <a:xfrm>
+            <a:off x="457200" y="274320"/>
+            <a:ext cx="8229600" cy="685800"/>
+          </a:xfrm>
+          <a:prstGeom prst="rect">
+            <a:avLst/>
+          </a:prstGeom>
+          <a:noFill/>
+          <a:ln/>
+        </p:spPr>
+        <p:txBody>
+          <a:bodyPr wrap="square" lIns="0" tIns="0" rIns="0" bIns="0" rtlCol="0" anchor="ctr"/>
+          <a:lstStyle/>
+          <a:p>
+            <a:pPr algn="l" indent="0" marL="0">
+              <a:buNone/>
+            </a:pPr>
+            <a:r>
+              <a:rPr lang="en-US" sz="3000" b="1" dirty="0">
+                <a:solidFill>
+                  <a:schemeClr val="tx2"/>
+                </a:solidFill>
+              </a:rPr>
+              <a:t>Plan · 12 – 18 oct</a:t>
+            </a:r>
+            <a:endParaRPr lang="en-US" sz="3000" dirty="0"/>
+          </a:p>
+        </p:txBody>
+      </p:sp>
+      <p:sp>
+        <p:nvSpPr>
+          <p:cNvPr id="3" name="Plan card 1"/>
+          <p:cNvSpPr/>
+          <p:nvPr/>
+        </p:nvSpPr>
+        <p:spPr>
+          <a:xfrm>
+            <a:off x="457200" y="1097280"/>
+            <a:ext cx="2615184" cy="3017520"/>
+          </a:xfrm>
+          <a:prstGeom prst="roundRect">
+            <a:avLst>
+              <a:gd name="adj" fmla="val 4196"/>
+            </a:avLst>
+          </a:prstGeom>
+          <a:solidFill>
+            <a:schemeClr val="bg2"/>
+          </a:solidFill>
+          <a:ln w="12700">
+            <a:solidFill>
+              <a:schemeClr val="bg2"/>
+            </a:solidFill>
+            <a:prstDash val="solid"/>
+          </a:ln>
+        </p:spPr>
+      </p:sp>
+      <p:sp>
+        <p:nvSpPr>
+          <p:cNvPr id="4" name="Plan dot 1"/>
+          <p:cNvSpPr/>
+          <p:nvPr/>
+        </p:nvSpPr>
+        <p:spPr>
+          <a:xfrm>
+            <a:off x="685800" y="1325880"/>
+            <a:ext cx="457200" cy="457200"/>
+          </a:xfrm>
+          <a:prstGeom prst="ellipse">
+            <a:avLst/>
+          </a:prstGeom>
+          <a:solidFill>
+            <a:schemeClr val="tx2"/>
+          </a:solidFill>
+          <a:ln w="12700">
+            <a:solidFill>
+              <a:schemeClr val="tx2"/>
+            </a:solidFill>
+            <a:prstDash val="solid"/>
+          </a:ln>
+        </p:spPr>
+      </p:sp>
+      <p:sp>
+        <p:nvSpPr>
+          <p:cNvPr id="5" name="Plan dot 1 label"/>
+          <p:cNvSpPr txBox="1"/>
+          <p:nvPr/>
+        </p:nvSpPr>
+        <p:spPr>
+          <a:xfrm>
+            <a:off x="685800" y="1325880"/>
+            <a:ext cx="457200" cy="457200"/>
+          </a:xfrm>
+          <a:prstGeom prst="rect">
+            <a:avLst/>
+          </a:prstGeom>
+          <a:noFill/>
+          <a:ln/>
+        </p:spPr>
+        <p:txBody>
+          <a:bodyPr wrap="square" lIns="0" tIns="0" rIns="0" bIns="0" rtlCol="0" anchor="ctr"/>
+          <a:lstStyle/>
+          <a:p>
+            <a:pPr algn="ctr" indent="0" marL="0">
+              <a:buNone/>
+            </a:pPr>
+            <a:r>
+              <a:rPr lang="en-US" sz="1400" b="1" dirty="0">
+                <a:solidFill>
+                  <a:schemeClr val="bg1"/>
+                </a:solidFill>
+              </a:rPr>
+              <a:t>1</a:t>
+            </a:r>
+            <a:endParaRPr lang="en-US" sz="1400" dirty="0"/>
+          </a:p>
+        </p:txBody>
+      </p:sp>
+      <p:sp>
+        <p:nvSpPr>
+          <p:cNvPr id="6" name="Plan head 1"/>
+          <p:cNvSpPr txBox="1"/>
+          <p:nvPr/>
+        </p:nvSpPr>
+        <p:spPr>
+          <a:xfrm>
+            <a:off x="685800" y="1965960"/>
+            <a:ext cx="2194560" cy="548640"/>
+          </a:xfrm>
+          <a:prstGeom prst="rect">
+            <a:avLst/>
+          </a:prstGeom>
+          <a:noFill/>
+          <a:ln/>
+        </p:spPr>
+        <p:txBody>
+          <a:bodyPr wrap="square" lIns="0" tIns="0" rIns="0" bIns="0" rtlCol="0" anchor="t"/>
+          <a:lstStyle/>
+          <a:p>
+            <a:pPr indent="0" marL="0">
+              <a:buNone/>
+            </a:pPr>
+            <a:r>
+              <a:rPr lang="en-US" sz="1700" b="1" dirty="0">
+                <a:solidFill>
+                  <a:schemeClr val="tx2"/>
+                </a:solidFill>
+                <a:latin typeface="Cambria" pitchFamily="34" charset="0"/>
+                <a:ea typeface="Cambria" pitchFamily="34" charset="-122"/>
+                <a:cs typeface="Cambria" pitchFamily="34" charset="-120"/>
+              </a:rPr>
+              <a:t>Fase de aprendizaje</a:t>
+            </a:r>
+            <a:endParaRPr lang="en-US" sz="1700" dirty="0"/>
+          </a:p>
+        </p:txBody>
+      </p:sp>
+      <p:sp>
+        <p:nvSpPr>
+          <p:cNvPr id="7" name="Plan body 1"/>
+          <p:cNvSpPr txBox="1"/>
+          <p:nvPr/>
+        </p:nvSpPr>
+        <p:spPr>
+          <a:xfrm>
+            <a:off x="685800" y="2560320"/>
+            <a:ext cx="2194560" cy="1463040"/>
+          </a:xfrm>
+          <a:prstGeom prst="rect">
+            <a:avLst/>
+          </a:prstGeom>
+          <a:noFill/>
+          <a:ln/>
+        </p:spPr>
+        <p:txBody>
+          <a:bodyPr wrap="square" lIns="0" tIns="0" rIns="0" bIns="0" rtlCol="0" anchor="t"/>
+          <a:lstStyle/>
+          <a:p>
+            <a:pPr indent="0" marL="0">
+              <a:buNone/>
+            </a:pPr>
+            <a:r>
+              <a:rPr lang="en-US" sz="1300" dirty="0">
+                <a:solidFill>
+                  <a:schemeClr val="tx1"/>
+                </a:solidFill>
+              </a:rPr>
+              <a:t>Sin cambios durante 5 días. Criterio de pausa: ~$120 de gasto sin lead calificado.</a:t>
+            </a:r>
+            <a:endParaRPr lang="en-US" sz="1300" dirty="0"/>
+          </a:p>
+        </p:txBody>
+      </p:sp>
+      <p:sp>
+        <p:nvSpPr>
+          <p:cNvPr id="8" name="Plan card 2"/>
+          <p:cNvSpPr/>
+          <p:nvPr/>
+        </p:nvSpPr>
+        <p:spPr>
+          <a:xfrm>
+            <a:off x="3264408" y="1097280"/>
+            <a:ext cx="2615184" cy="3017520"/>
+          </a:xfrm>
+          <a:prstGeom prst="roundRect">
+            <a:avLst>
+              <a:gd name="adj" fmla="val 4196"/>
+            </a:avLst>
+          </a:prstGeom>
+          <a:solidFill>
+            <a:schemeClr val="bg2"/>
+          </a:solidFill>
+          <a:ln w="12700">
+            <a:solidFill>
+              <a:schemeClr val="bg2"/>
+            </a:solidFill>
+            <a:prstDash val="solid"/>
+          </a:ln>
+        </p:spPr>
+      </p:sp>
+      <p:sp>
+        <p:nvSpPr>
+          <p:cNvPr id="9" name="Plan dot 2"/>
+          <p:cNvSpPr/>
+          <p:nvPr/>
+        </p:nvSpPr>
+        <p:spPr>
+          <a:xfrm>
+            <a:off x="3493008" y="1325880"/>
+            <a:ext cx="457200" cy="457200"/>
+          </a:xfrm>
+          <a:prstGeom prst="ellipse">
+            <a:avLst/>
+          </a:prstGeom>
+          <a:solidFill>
+            <a:schemeClr val="tx2"/>
+          </a:solidFill>
+          <a:ln w="12700">
+            <a:solidFill>
+              <a:schemeClr val="tx2"/>
+            </a:solidFill>
+            <a:prstDash val="solid"/>
+          </a:ln>
+        </p:spPr>
+      </p:sp>
+      <p:sp>
+        <p:nvSpPr>
+          <p:cNvPr id="10" name="Plan dot 2 label"/>
+          <p:cNvSpPr txBox="1"/>
+          <p:nvPr/>
+        </p:nvSpPr>
+        <p:spPr>
+          <a:xfrm>
+            <a:off x="3493008" y="1325880"/>
+            <a:ext cx="457200" cy="457200"/>
+          </a:xfrm>
+          <a:prstGeom prst="rect">
+            <a:avLst/>
+          </a:prstGeom>
+          <a:noFill/>
+          <a:ln/>
+        </p:spPr>
+        <p:txBody>
+          <a:bodyPr wrap="square" lIns="0" tIns="0" rIns="0" bIns="0" rtlCol="0" anchor="ctr"/>
+          <a:lstStyle/>
+          <a:p>
+            <a:pPr algn="ctr" indent="0" marL="0">
+              <a:buNone/>
+            </a:pPr>
+            <a:r>
+              <a:rPr lang="en-US" sz="1400" b="1" dirty="0">
+                <a:solidFill>
+                  <a:schemeClr val="bg1"/>
+                </a:solidFill>
+              </a:rPr>
+              <a:t>2</a:t>
+            </a:r>
+            <a:endParaRPr lang="en-US" sz="1400" dirty="0"/>
+          </a:p>
+        </p:txBody>
+      </p:sp>
+      <p:sp>
+        <p:nvSpPr>
+          <p:cNvPr id="11" name="Plan head 2"/>
+          <p:cNvSpPr txBox="1"/>
+          <p:nvPr/>
+        </p:nvSpPr>
+        <p:spPr>
+          <a:xfrm>
+            <a:off x="3493008" y="1965960"/>
+            <a:ext cx="2194560" cy="548640"/>
+          </a:xfrm>
+          <a:prstGeom prst="rect">
+            <a:avLst/>
+          </a:prstGeom>
+          <a:noFill/>
+          <a:ln/>
+        </p:spPr>
+        <p:txBody>
+          <a:bodyPr wrap="square" lIns="0" tIns="0" rIns="0" bIns="0" rtlCol="0" anchor="t"/>
+          <a:lstStyle/>
+          <a:p>
+            <a:pPr indent="0" marL="0">
+              <a:buNone/>
+            </a:pPr>
+            <a:r>
+              <a:rPr lang="en-US" sz="1700" b="1" dirty="0">
+                <a:solidFill>
+                  <a:schemeClr val="tx2"/>
+                </a:solidFill>
+                <a:latin typeface="Cambria" pitchFamily="34" charset="0"/>
+                <a:ea typeface="Cambria" pitchFamily="34" charset="-122"/>
+                <a:cs typeface="Cambria" pitchFamily="34" charset="-120"/>
+              </a:rPr>
+              <a:t>Medición en GHL</a:t>
+            </a:r>
+            <a:endParaRPr lang="en-US" sz="1700" dirty="0"/>
+          </a:p>
+        </p:txBody>
+      </p:sp>
+      <p:sp>
+        <p:nvSpPr>
+          <p:cNvPr id="12" name="Plan body 2"/>
+          <p:cNvSpPr txBox="1"/>
+          <p:nvPr/>
+        </p:nvSpPr>
+        <p:spPr>
+          <a:xfrm>
+            <a:off x="3493008" y="2560320"/>
+            <a:ext cx="2194560" cy="1463040"/>
+          </a:xfrm>
+          <a:prstGeom prst="rect">
+            <a:avLst/>
+          </a:prstGeom>
+          <a:noFill/>
+          <a:ln/>
+        </p:spPr>
+        <p:txBody>
+          <a:bodyPr wrap="square" lIns="0" tIns="0" rIns="0" bIns="0" rtlCol="0" anchor="t"/>
+          <a:lstStyle/>
+          <a:p>
+            <a:pPr indent="0" marL="0">
+              <a:buNone/>
+            </a:pPr>
+            <a:r>
+              <a:rPr lang="en-US" sz="1300" dirty="0">
+                <a:solidFill>
+                  <a:schemeClr val="tx1"/>
+                </a:solidFill>
+              </a:rPr>
+              <a:t>Reporte diario de leads calificados vs. no calificados por anuncio.</a:t>
+            </a:r>
+            <a:endParaRPr lang="en-US" sz="1300" dirty="0"/>
+          </a:p>
+        </p:txBody>
+      </p:sp>
+      <p:sp>
+        <p:nvSpPr>
+          <p:cNvPr id="13" name="Plan card 3"/>
+          <p:cNvSpPr/>
+          <p:nvPr/>
+        </p:nvSpPr>
+        <p:spPr>
+          <a:xfrm>
+            <a:off x="6071616" y="1097280"/>
+            <a:ext cx="2615184" cy="3017520"/>
+          </a:xfrm>
+          <a:prstGeom prst="roundRect">
+            <a:avLst>
+              <a:gd name="adj" fmla="val 4196"/>
+            </a:avLst>
+          </a:prstGeom>
+          <a:solidFill>
+            <a:schemeClr val="bg2"/>
+          </a:solidFill>
+          <a:ln w="12700">
+            <a:solidFill>
+              <a:schemeClr val="bg2"/>
+            </a:solidFill>
+            <a:prstDash val="solid"/>
+          </a:ln>
+        </p:spPr>
+      </p:sp>
+      <p:sp>
+        <p:nvSpPr>
+          <p:cNvPr id="14" name="Plan dot 3"/>
+          <p:cNvSpPr/>
+          <p:nvPr/>
+        </p:nvSpPr>
+        <p:spPr>
+          <a:xfrm>
+            <a:off x="6300216" y="1325880"/>
+            <a:ext cx="457200" cy="457200"/>
+          </a:xfrm>
+          <a:prstGeom prst="ellipse">
+            <a:avLst/>
+          </a:prstGeom>
+          <a:solidFill>
+            <a:schemeClr val="tx2"/>
+          </a:solidFill>
+          <a:ln w="12700">
+            <a:solidFill>
+              <a:schemeClr val="tx2"/>
+            </a:solidFill>
+            <a:prstDash val="solid"/>
+          </a:ln>
+        </p:spPr>
+      </p:sp>
+      <p:sp>
+        <p:nvSpPr>
+          <p:cNvPr id="15" name="Plan dot 3 label"/>
+          <p:cNvSpPr txBox="1"/>
+          <p:nvPr/>
+        </p:nvSpPr>
+        <p:spPr>
+          <a:xfrm>
+            <a:off x="6300216" y="1325880"/>
+            <a:ext cx="457200" cy="457200"/>
+          </a:xfrm>
+          <a:prstGeom prst="rect">
+            <a:avLst/>
+          </a:prstGeom>
+          <a:noFill/>
+          <a:ln/>
+        </p:spPr>
+        <p:txBody>
+          <a:bodyPr wrap="square" lIns="0" tIns="0" rIns="0" bIns="0" rtlCol="0" anchor="ctr"/>
+          <a:lstStyle/>
+          <a:p>
+            <a:pPr algn="ctr" indent="0" marL="0">
+              <a:buNone/>
+            </a:pPr>
+            <a:r>
+              <a:rPr lang="en-US" sz="1400" b="1" dirty="0">
+                <a:solidFill>
+                  <a:schemeClr val="bg1"/>
+                </a:solidFill>
+              </a:rPr>
+              <a:t>3</a:t>
+            </a:r>
+            <a:endParaRPr lang="en-US" sz="1400" dirty="0"/>
+          </a:p>
+        </p:txBody>
+      </p:sp>
+      <p:sp>
+        <p:nvSpPr>
+          <p:cNvPr id="16" name="Plan head 3"/>
+          <p:cNvSpPr txBox="1"/>
+          <p:nvPr/>
+        </p:nvSpPr>
+        <p:spPr>
+          <a:xfrm>
+            <a:off x="6300216" y="1965960"/>
+            <a:ext cx="2194560" cy="548640"/>
+          </a:xfrm>
+          <a:prstGeom prst="rect">
+            <a:avLst/>
+          </a:prstGeom>
+          <a:noFill/>
+          <a:ln/>
+        </p:spPr>
+        <p:txBody>
+          <a:bodyPr wrap="square" lIns="0" tIns="0" rIns="0" bIns="0" rtlCol="0" anchor="t"/>
+          <a:lstStyle/>
+          <a:p>
+            <a:pPr indent="0" marL="0">
+              <a:buNone/>
+            </a:pPr>
+            <a:r>
+              <a:rPr lang="en-US" sz="1700" b="1" dirty="0">
+                <a:solidFill>
+                  <a:schemeClr val="tx2"/>
+                </a:solidFill>
+                <a:latin typeface="Cambria" pitchFamily="34" charset="0"/>
+                <a:ea typeface="Cambria" pitchFamily="34" charset="-122"/>
+                <a:cs typeface="Cambria" pitchFamily="34" charset="-120"/>
+              </a:rPr>
+              <a:t>Producción creativa</a:t>
+            </a:r>
+            <a:endParaRPr lang="en-US" sz="1700" dirty="0"/>
+          </a:p>
+        </p:txBody>
+      </p:sp>
+      <p:sp>
+        <p:nvSpPr>
+          <p:cNvPr id="17" name="Plan body 3"/>
+          <p:cNvSpPr txBox="1"/>
+          <p:nvPr/>
+        </p:nvSpPr>
+        <p:spPr>
+          <a:xfrm>
+            <a:off x="6300216" y="2560320"/>
+            <a:ext cx="2194560" cy="1463040"/>
+          </a:xfrm>
+          <a:prstGeom prst="rect">
+            <a:avLst/>
+          </a:prstGeom>
+          <a:noFill/>
+          <a:ln/>
+        </p:spPr>
+        <p:txBody>
+          <a:bodyPr wrap="square" lIns="0" tIns="0" rIns="0" bIns="0" rtlCol="0" anchor="t"/>
+          <a:lstStyle/>
+          <a:p>
+            <a:pPr indent="0" marL="0">
+              <a:buNone/>
+            </a:pPr>
+            <a:r>
+              <a:rPr lang="en-US" sz="1300" dirty="0">
+                <a:solidFill>
+                  <a:schemeClr val="tx1"/>
+                </a:solidFill>
+              </a:rPr>
+              <a:t>Conceptos 1, 3 y 6 de la matriz como prioridad. V2: reemplazar "19 jobs" por "19 roles".</a:t>
+            </a:r>
+            <a:endParaRPr lang="en-US" sz="1300" dirty="0"/>
+          </a:p>
+        </p:txBody>
+      </p:sp>
+      <p:sp>
+        <p:nvSpPr>
+          <p:cNvPr id="25" name="Slide Number Placeholder 0"/>
+          <p:cNvSpPr>
+            <a:spLocks noGrp="1"/>
+          </p:cNvSpPr>
+          <p:nvPr>
+            <p:ph type="sldNum" sz="quarter" idx="4294967295"/>
+          </p:nvPr>
+        </p:nvSpPr>
+        <p:spPr>
+          <a:xfrm>
+            <a:off x="8321040" y="4800600"/>
+            <a:ext cx="365760" cy="228600"/>
+          </a:xfrm>
+          <a:prstGeom prst="rect">
+            <a:avLst/>
+          </a:prstGeom>
+          <a:extLst>
+            <a:ext uri="{C572A759-6A51-4108-AA02-DFA0A04FC94B}">
+              <ma14:wrappingTextBoxFlag xmlns:ma14="http://schemas.microsoft.com/office/mac/drawingml/2011/main" val="0"/>
+            </a:ext>
+          </a:extLst>
+        </p:spPr>
+        <p:txBody>
+          <a:bodyPr/>
+          <a:lstStyle>
+            <a:lvl1pPr>
+              <a:defRPr sz="900">
+                <a:solidFill>
+                  <a:schemeClr val="accent6"/>
+                </a:solidFill>
+              </a:defRPr>
+            </a:lvl1pPr>
+          </a:lstStyle>
+          <a:p>
+            <a:pPr algn="r"/>
+            <a:fld id="{F7021451-1387-4CA6-816F-3879F97B5CBC}" type="slidenum">
+              <a:rPr b="0" lang="en-US"/>
+              <a:t>14</a:t>
+            </a:fld>
+            <a:endParaRPr lang="en-US"/>
+          </a:p>
+        </p:txBody>
+      </p:sp>
+    </p:spTree>
+  </p:cSld>
+  <p:clrMapOvr>
+    <a:masterClrMapping/>
+  </p:clrMapOvr>
+</p:sld>
+</file>
+
+<file path=ppt/slides/slide15.xml><?xml version="1.0" encoding="utf-8"?>
+<p:sld xmlns:a="http://schemas.openxmlformats.org/drawingml/2006/main" xmlns:r="http://schemas.openxmlformats.org/officeDocument/2006/relationships" xmlns:p="http://schemas.openxmlformats.org/presentationml/2006/main">
+  <p:cSld name="Slide 15">
+    <p:spTree>
+      <p:nvGrpSpPr>
+        <p:cNvPr id="1" name=""/>
+        <p:cNvGrpSpPr/>
+        <p:nvPr/>
+      </p:nvGrpSpPr>
+      <p:grpSpPr>
+        <a:xfrm>
+          <a:off x="0" y="0"/>
+          <a:ext cx="0" cy="0"/>
+          <a:chOff x="0" y="0"/>
+          <a:chExt cx="0" cy="0"/>
+        </a:xfrm>
+      </p:grpSpPr>
+      <p:sp>
+        <p:nvSpPr>
+          <p:cNvPr id="2" name="Text 0"/>
+          <p:cNvSpPr/>
+          <p:nvPr>
+            <p:ph idx="100" type="title" hasCustomPrompt="1"/>
+          </p:nvPr>
+        </p:nvSpPr>
+        <p:spPr>
+          <a:xfrm>
+            <a:off x="457200" y="274320"/>
+            <a:ext cx="8229600" cy="685800"/>
+          </a:xfrm>
+          <a:prstGeom prst="rect">
+            <a:avLst/>
+          </a:prstGeom>
+          <a:noFill/>
+          <a:ln/>
+        </p:spPr>
+        <p:txBody>
+          <a:bodyPr wrap="square" lIns="0" tIns="0" rIns="0" bIns="0" rtlCol="0" anchor="ctr"/>
+          <a:lstStyle/>
+          <a:p>
+            <a:pPr algn="l" indent="0" marL="0">
+              <a:buNone/>
+            </a:pPr>
+            <a:r>
+              <a:rPr lang="en-US" sz="3000" b="1" dirty="0">
+                <a:solidFill>
                   <a:schemeClr val="bg1"/>
                 </a:solidFill>
               </a:rPr>
@@ -4554,7 +8941,7 @@
             <a:pPr algn="r"/>
             <a:fld id="{F7021451-1387-4CA6-816F-3879F97B5CBC}" type="slidenum">
               <a:rPr b="0" lang="en-US"/>
-              <a:t>12</a:t>
+              <a:t>15</a:t>
             </a:fld>
             <a:endParaRPr lang="en-US"/>
           </a:p>
